--- a/downloads/presentations/modules/lesson-24-public-health-system-integration-patterns.pptx
+++ b/downloads/presentations/modules/lesson-24-public-health-system-integration-patterns.pptx
@@ -3088,6 +3088,45 @@
           </a:p>
         </p:txBody>
       </p:sp>
+      <p:sp>
+        <p:nvSpPr>
+          <p:cNvPr id="8" name="Text 5"/>
+          <p:cNvSpPr/>
+          <p:nvPr/>
+        </p:nvSpPr>
+        <p:spPr>
+          <a:xfrm>
+            <a:off x="11137392" y="6510528"/>
+            <a:ext cx="411480" cy="201168"/>
+          </a:xfrm>
+          <a:prstGeom prst="rect">
+            <a:avLst/>
+          </a:prstGeom>
+          <a:noFill/>
+          <a:ln/>
+        </p:spPr>
+        <p:txBody>
+          <a:bodyPr wrap="square" lIns="0" tIns="0" rIns="0" bIns="0" rtlCol="0" anchor="ctr"/>
+          <a:lstStyle/>
+          <a:p>
+            <a:pPr algn="r" indent="0" marL="0">
+              <a:buNone/>
+            </a:pPr>
+            <a:r>
+              <a:rPr lang="en-US" sz="900" dirty="0">
+                <a:solidFill>
+                  <a:srgbClr val="5F7181"/>
+                </a:solidFill>
+                <a:latin typeface="Aptos" pitchFamily="34" charset="0"/>
+                <a:ea typeface="Aptos" pitchFamily="34" charset="-122"/>
+                <a:cs typeface="Aptos" pitchFamily="34" charset="-120"/>
+              </a:rPr>
+              <a:t>1</a:t>
+            </a:r>
+            <a:endParaRPr lang="en-US" sz="900" dirty="0"/>
+          </a:p>
+        </p:txBody>
+      </p:sp>
     </p:spTree>
   </p:cSld>
   <p:clrMapOvr>
@@ -3281,7 +3320,7 @@
                 <a:ea typeface="Aptos" pitchFamily="34" charset="-122"/>
                 <a:cs typeface="Aptos" pitchFamily="34" charset="-120"/>
               </a:rPr>
-              <a:t>© Paula Soper</a:t>
+              <a:t>Â© Paula Soper</a:t>
             </a:r>
             <a:endParaRPr lang="en-US" sz="800" dirty="0"/>
           </a:p>
@@ -3289,7 +3328,46 @@
       </p:sp>
       <p:sp>
         <p:nvSpPr>
-          <p:cNvPr id="7" name="Shape 5"/>
+          <p:cNvPr id="7" name="Text 5"/>
+          <p:cNvSpPr/>
+          <p:nvPr/>
+        </p:nvSpPr>
+        <p:spPr>
+          <a:xfrm>
+            <a:off x="11137392" y="6510528"/>
+            <a:ext cx="411480" cy="201168"/>
+          </a:xfrm>
+          <a:prstGeom prst="rect">
+            <a:avLst/>
+          </a:prstGeom>
+          <a:noFill/>
+          <a:ln/>
+        </p:spPr>
+        <p:txBody>
+          <a:bodyPr wrap="square" lIns="0" tIns="0" rIns="0" bIns="0" rtlCol="0" anchor="ctr"/>
+          <a:lstStyle/>
+          <a:p>
+            <a:pPr algn="r" indent="0" marL="0">
+              <a:buNone/>
+            </a:pPr>
+            <a:r>
+              <a:rPr lang="en-US" sz="900" dirty="0">
+                <a:solidFill>
+                  <a:srgbClr val="5F7181"/>
+                </a:solidFill>
+                <a:latin typeface="Aptos" pitchFamily="34" charset="0"/>
+                <a:ea typeface="Aptos" pitchFamily="34" charset="-122"/>
+                <a:cs typeface="Aptos" pitchFamily="34" charset="-120"/>
+              </a:rPr>
+              <a:t>10</a:t>
+            </a:r>
+            <a:endParaRPr lang="en-US" sz="900" dirty="0"/>
+          </a:p>
+        </p:txBody>
+      </p:sp>
+      <p:sp>
+        <p:nvSpPr>
+          <p:cNvPr id="8" name="Shape 6"/>
           <p:cNvSpPr/>
           <p:nvPr/>
         </p:nvSpPr>
@@ -3314,7 +3392,7 @@
       </p:sp>
       <p:sp>
         <p:nvSpPr>
-          <p:cNvPr id="8" name="Text 6"/>
+          <p:cNvPr id="9" name="Text 7"/>
           <p:cNvSpPr/>
           <p:nvPr/>
         </p:nvSpPr>
@@ -3353,14 +3431,14 @@
       </p:sp>
       <p:sp>
         <p:nvSpPr>
-          <p:cNvPr id="9" name="Text 7"/>
+          <p:cNvPr id="10" name="Text 8"/>
           <p:cNvSpPr/>
           <p:nvPr/>
         </p:nvSpPr>
         <p:spPr>
           <a:xfrm>
             <a:off x="640080" y="621792"/>
-            <a:ext cx="10881360" cy="566928"/>
+            <a:ext cx="10881360" cy="713232"/>
           </a:xfrm>
           <a:prstGeom prst="rect">
             <a:avLst/>
@@ -3378,7 +3456,7 @@
               <a:buNone/>
             </a:pPr>
             <a:r>
-              <a:rPr lang="en-US" sz="2700" b="1" dirty="0">
+              <a:rPr lang="en-US" sz="3400" b="1" dirty="0">
                 <a:solidFill>
                   <a:srgbClr val="003A63"/>
                 </a:solidFill>
@@ -3388,20 +3466,20 @@
               </a:rPr>
               <a:t>Why This Topic Matters for Public Health AI</a:t>
             </a:r>
-            <a:endParaRPr lang="en-US" sz="2700" dirty="0"/>
-          </a:p>
-        </p:txBody>
-      </p:sp>
-      <p:sp>
-        <p:nvSpPr>
-          <p:cNvPr id="10" name="Text 8"/>
-          <p:cNvSpPr/>
-          <p:nvPr/>
-        </p:nvSpPr>
-        <p:spPr>
-          <a:xfrm>
-            <a:off x="868680" y="1417320"/>
-            <a:ext cx="6675120" cy="4434840"/>
+            <a:endParaRPr lang="en-US" sz="3400" dirty="0"/>
+          </a:p>
+        </p:txBody>
+      </p:sp>
+      <p:sp>
+        <p:nvSpPr>
+          <p:cNvPr id="11" name="Text 9"/>
+          <p:cNvSpPr/>
+          <p:nvPr/>
+        </p:nvSpPr>
+        <p:spPr>
+          <a:xfrm>
+            <a:off x="868680" y="1508760"/>
+            <a:ext cx="6537960" cy="4160520"/>
           </a:xfrm>
           <a:prstGeom prst="rect">
             <a:avLst/>
@@ -3416,7 +3494,7 @@
           <a:lstStyle/>
           <a:p>
             <a:r>
-              <a:rPr lang="en-US" sz="1700" dirty="0">
+              <a:rPr lang="en-US" sz="2100" dirty="0">
                 <a:solidFill>
                   <a:srgbClr val="17364A"/>
                 </a:solidFill>
@@ -3424,13 +3502,13 @@
                 <a:ea typeface="Aptos" pitchFamily="34" charset="-122"/>
                 <a:cs typeface="Aptos" pitchFamily="34" charset="-120"/>
               </a:rPr>
-              <a:t>Integration decisions determine whether AI becomes part of a reliable public health workflow or an isolated tool that adds.</a:t>
-            </a:r>
-            <a:endParaRPr lang="en-US" sz="1700" dirty="0"/>
-          </a:p>
-          <a:p>
-            <a:r>
-              <a:rPr lang="en-US" sz="1700" dirty="0">
+              <a:t>Integration decisions determine whether AI becomes part of a reliable public health workflow or an.</a:t>
+            </a:r>
+            <a:endParaRPr lang="en-US" sz="2100" dirty="0"/>
+          </a:p>
+          <a:p>
+            <a:r>
+              <a:rPr lang="en-US" sz="2100" dirty="0">
                 <a:solidFill>
                   <a:srgbClr val="17364A"/>
                 </a:solidFill>
@@ -3438,13 +3516,13 @@
                 <a:ea typeface="Aptos" pitchFamily="34" charset="-122"/>
                 <a:cs typeface="Aptos" pitchFamily="34" charset="-120"/>
               </a:rPr>
-              <a:t>If staff must copy and paste sensitive information between systems, the AI tool may appear helpful while increasing privacy.</a:t>
-            </a:r>
-            <a:endParaRPr lang="en-US" sz="1700" dirty="0"/>
-          </a:p>
-          <a:p>
-            <a:r>
-              <a:rPr lang="en-US" sz="1700" dirty="0">
+              <a:t>If staff must copy and paste sensitive information between systems, the AI tool may appear helpful.</a:t>
+            </a:r>
+            <a:endParaRPr lang="en-US" sz="2100" dirty="0"/>
+          </a:p>
+          <a:p>
+            <a:r>
+              <a:rPr lang="en-US" sz="2100" dirty="0">
                 <a:solidFill>
                   <a:srgbClr val="17364A"/>
                 </a:solidFill>
@@ -3452,29 +3530,15 @@
                 <a:ea typeface="Aptos" pitchFamily="34" charset="-122"/>
                 <a:cs typeface="Aptos" pitchFamily="34" charset="-120"/>
               </a:rPr>
-              <a:t>If an AI service writes back to a system of record without appropriate controls, a technical integration can become an.</a:t>
-            </a:r>
-            <a:endParaRPr lang="en-US" sz="1700" dirty="0"/>
-          </a:p>
-          <a:p>
-            <a:r>
-              <a:rPr lang="en-US" sz="1700" dirty="0">
-                <a:solidFill>
-                  <a:srgbClr val="17364A"/>
-                </a:solidFill>
-                <a:latin typeface="Aptos" pitchFamily="34" charset="0"/>
-                <a:ea typeface="Aptos" pitchFamily="34" charset="-122"/>
-                <a:cs typeface="Aptos" pitchFamily="34" charset="-120"/>
-              </a:rPr>
-              <a:t>Public health agencies often operate in mixed environments that include legacy surveillance systems, modern cloud.</a:t>
-            </a:r>
-            <a:endParaRPr lang="en-US" sz="1700" dirty="0"/>
-          </a:p>
-        </p:txBody>
-      </p:sp>
-      <p:sp>
-        <p:nvSpPr>
-          <p:cNvPr id="11" name="Shape 9"/>
+              <a:t>If an AI service writes back to a system of record without appropriate controls, a technical.</a:t>
+            </a:r>
+            <a:endParaRPr lang="en-US" sz="2100" dirty="0"/>
+          </a:p>
+        </p:txBody>
+      </p:sp>
+      <p:sp>
+        <p:nvSpPr>
+          <p:cNvPr id="12" name="Shape 10"/>
           <p:cNvSpPr/>
           <p:nvPr/>
         </p:nvSpPr>
@@ -3501,14 +3565,14 @@
       </p:sp>
       <p:sp>
         <p:nvSpPr>
-          <p:cNvPr id="12" name="Text 10"/>
+          <p:cNvPr id="13" name="Text 11"/>
           <p:cNvSpPr/>
           <p:nvPr/>
         </p:nvSpPr>
         <p:spPr>
           <a:xfrm>
             <a:off x="8074152" y="1563624"/>
-            <a:ext cx="2825496" cy="201168"/>
+            <a:ext cx="2825496" cy="256032"/>
           </a:xfrm>
           <a:prstGeom prst="rect">
             <a:avLst/>
@@ -3524,7 +3588,7 @@
               <a:buNone/>
             </a:pPr>
             <a:r>
-              <a:rPr lang="en-US" sz="950" b="1" dirty="0">
+              <a:rPr lang="en-US" sz="1300" b="1" dirty="0">
                 <a:solidFill>
                   <a:srgbClr val="0068B7"/>
                 </a:solidFill>
@@ -3534,20 +3598,20 @@
               </a:rPr>
               <a:t>Key idea</a:t>
             </a:r>
-            <a:endParaRPr lang="en-US" sz="950" dirty="0"/>
-          </a:p>
-        </p:txBody>
-      </p:sp>
-      <p:sp>
-        <p:nvSpPr>
-          <p:cNvPr id="13" name="Text 11"/>
-          <p:cNvSpPr/>
-          <p:nvPr/>
-        </p:nvSpPr>
-        <p:spPr>
-          <a:xfrm>
-            <a:off x="8074152" y="1856232"/>
-            <a:ext cx="2825496" cy="1261872"/>
+            <a:endParaRPr lang="en-US" sz="1300" dirty="0"/>
+          </a:p>
+        </p:txBody>
+      </p:sp>
+      <p:sp>
+        <p:nvSpPr>
+          <p:cNvPr id="14" name="Text 12"/>
+          <p:cNvSpPr/>
+          <p:nvPr/>
+        </p:nvSpPr>
+        <p:spPr>
+          <a:xfrm>
+            <a:off x="8074152" y="1920240"/>
+            <a:ext cx="2825496" cy="1188720"/>
           </a:xfrm>
           <a:prstGeom prst="rect">
             <a:avLst/>
@@ -3565,7 +3629,7 @@
               <a:buNone/>
             </a:pPr>
             <a:r>
-              <a:rPr lang="en-US" sz="1250" dirty="0">
+              <a:rPr lang="en-US" sz="1550" dirty="0">
                 <a:solidFill>
                   <a:srgbClr val="17364A"/>
                 </a:solidFill>
@@ -3573,15 +3637,15 @@
                 <a:ea typeface="Aptos" pitchFamily="34" charset="-122"/>
                 <a:cs typeface="Aptos" pitchFamily="34" charset="-120"/>
               </a:rPr>
-              <a:t>Integration decisions determine whether AI becomes part of a reliable public health workflow or an isolated tool that adds.</a:t>
-            </a:r>
-            <a:endParaRPr lang="en-US" sz="1250" dirty="0"/>
-          </a:p>
-        </p:txBody>
-      </p:sp>
-      <p:sp>
-        <p:nvSpPr>
-          <p:cNvPr id="14" name="Shape 12"/>
+              <a:t>Integration decisions determine whether AI becomes part of a reliable public health workflow or an.</a:t>
+            </a:r>
+            <a:endParaRPr lang="en-US" sz="1550" dirty="0"/>
+          </a:p>
+        </p:txBody>
+      </p:sp>
+      <p:sp>
+        <p:nvSpPr>
+          <p:cNvPr id="15" name="Shape 13"/>
           <p:cNvSpPr/>
           <p:nvPr/>
         </p:nvSpPr>
@@ -3608,14 +3672,14 @@
       </p:sp>
       <p:sp>
         <p:nvSpPr>
-          <p:cNvPr id="15" name="Text 13"/>
+          <p:cNvPr id="16" name="Text 14"/>
           <p:cNvSpPr/>
           <p:nvPr/>
         </p:nvSpPr>
         <p:spPr>
           <a:xfrm>
             <a:off x="8074152" y="3666744"/>
-            <a:ext cx="2825496" cy="201168"/>
+            <a:ext cx="2825496" cy="256032"/>
           </a:xfrm>
           <a:prstGeom prst="rect">
             <a:avLst/>
@@ -3631,7 +3695,7 @@
               <a:buNone/>
             </a:pPr>
             <a:r>
-              <a:rPr lang="en-US" sz="950" b="1" dirty="0">
+              <a:rPr lang="en-US" sz="1300" b="1" dirty="0">
                 <a:solidFill>
                   <a:srgbClr val="0068B7"/>
                 </a:solidFill>
@@ -3641,20 +3705,20 @@
               </a:rPr>
               <a:t>Use this for</a:t>
             </a:r>
-            <a:endParaRPr lang="en-US" sz="950" dirty="0"/>
-          </a:p>
-        </p:txBody>
-      </p:sp>
-      <p:sp>
-        <p:nvSpPr>
-          <p:cNvPr id="16" name="Text 14"/>
-          <p:cNvSpPr/>
-          <p:nvPr/>
-        </p:nvSpPr>
-        <p:spPr>
-          <a:xfrm>
-            <a:off x="8074152" y="3959352"/>
-            <a:ext cx="2825496" cy="1170432"/>
+            <a:endParaRPr lang="en-US" sz="1300" dirty="0"/>
+          </a:p>
+        </p:txBody>
+      </p:sp>
+      <p:sp>
+        <p:nvSpPr>
+          <p:cNvPr id="17" name="Text 15"/>
+          <p:cNvSpPr/>
+          <p:nvPr/>
+        </p:nvSpPr>
+        <p:spPr>
+          <a:xfrm>
+            <a:off x="8074152" y="4023360"/>
+            <a:ext cx="2825496" cy="1097280"/>
           </a:xfrm>
           <a:prstGeom prst="rect">
             <a:avLst/>
@@ -3672,7 +3736,7 @@
               <a:buNone/>
             </a:pPr>
             <a:r>
-              <a:rPr lang="en-US" sz="1250" dirty="0">
+              <a:rPr lang="en-US" sz="1550" dirty="0">
                 <a:solidFill>
                   <a:srgbClr val="17364A"/>
                 </a:solidFill>
@@ -3682,7 +3746,7 @@
               </a:rPr>
               <a:t>Connect the concept to public health decisions, safeguards, documentation, or implementation work.</a:t>
             </a:r>
-            <a:endParaRPr lang="en-US" sz="1250" dirty="0"/>
+            <a:endParaRPr lang="en-US" sz="1550" dirty="0"/>
           </a:p>
         </p:txBody>
       </p:sp>
@@ -3879,7 +3943,7 @@
                 <a:ea typeface="Aptos" pitchFamily="34" charset="-122"/>
                 <a:cs typeface="Aptos" pitchFamily="34" charset="-120"/>
               </a:rPr>
-              <a:t>© Paula Soper</a:t>
+              <a:t>Â© Paula Soper</a:t>
             </a:r>
             <a:endParaRPr lang="en-US" sz="800" dirty="0"/>
           </a:p>
@@ -3887,7 +3951,46 @@
       </p:sp>
       <p:sp>
         <p:nvSpPr>
-          <p:cNvPr id="7" name="Shape 5"/>
+          <p:cNvPr id="7" name="Text 5"/>
+          <p:cNvSpPr/>
+          <p:nvPr/>
+        </p:nvSpPr>
+        <p:spPr>
+          <a:xfrm>
+            <a:off x="11137392" y="6510528"/>
+            <a:ext cx="411480" cy="201168"/>
+          </a:xfrm>
+          <a:prstGeom prst="rect">
+            <a:avLst/>
+          </a:prstGeom>
+          <a:noFill/>
+          <a:ln/>
+        </p:spPr>
+        <p:txBody>
+          <a:bodyPr wrap="square" lIns="0" tIns="0" rIns="0" bIns="0" rtlCol="0" anchor="ctr"/>
+          <a:lstStyle/>
+          <a:p>
+            <a:pPr algn="r" indent="0" marL="0">
+              <a:buNone/>
+            </a:pPr>
+            <a:r>
+              <a:rPr lang="en-US" sz="900" dirty="0">
+                <a:solidFill>
+                  <a:srgbClr val="5F7181"/>
+                </a:solidFill>
+                <a:latin typeface="Aptos" pitchFamily="34" charset="0"/>
+                <a:ea typeface="Aptos" pitchFamily="34" charset="-122"/>
+                <a:cs typeface="Aptos" pitchFamily="34" charset="-120"/>
+              </a:rPr>
+              <a:t>11</a:t>
+            </a:r>
+            <a:endParaRPr lang="en-US" sz="900" dirty="0"/>
+          </a:p>
+        </p:txBody>
+      </p:sp>
+      <p:sp>
+        <p:nvSpPr>
+          <p:cNvPr id="8" name="Shape 6"/>
           <p:cNvSpPr/>
           <p:nvPr/>
         </p:nvSpPr>
@@ -3912,7 +4015,7 @@
       </p:sp>
       <p:sp>
         <p:nvSpPr>
-          <p:cNvPr id="8" name="Text 6"/>
+          <p:cNvPr id="9" name="Text 7"/>
           <p:cNvSpPr/>
           <p:nvPr/>
         </p:nvSpPr>
@@ -3951,14 +4054,14 @@
       </p:sp>
       <p:sp>
         <p:nvSpPr>
-          <p:cNvPr id="9" name="Text 7"/>
+          <p:cNvPr id="10" name="Text 8"/>
           <p:cNvSpPr/>
           <p:nvPr/>
         </p:nvSpPr>
         <p:spPr>
           <a:xfrm>
             <a:off x="640080" y="621792"/>
-            <a:ext cx="10881360" cy="566928"/>
+            <a:ext cx="10881360" cy="713232"/>
           </a:xfrm>
           <a:prstGeom prst="rect">
             <a:avLst/>
@@ -3976,7 +4079,7 @@
               <a:buNone/>
             </a:pPr>
             <a:r>
-              <a:rPr lang="en-US" sz="2700" b="1" dirty="0">
+              <a:rPr lang="en-US" sz="3400" b="1" dirty="0">
                 <a:solidFill>
                   <a:srgbClr val="003A63"/>
                 </a:solidFill>
@@ -3986,20 +4089,20 @@
               </a:rPr>
               <a:t>Public Health Example</a:t>
             </a:r>
-            <a:endParaRPr lang="en-US" sz="2700" dirty="0"/>
-          </a:p>
-        </p:txBody>
-      </p:sp>
-      <p:sp>
-        <p:nvSpPr>
-          <p:cNvPr id="10" name="Text 8"/>
-          <p:cNvSpPr/>
-          <p:nvPr/>
-        </p:nvSpPr>
-        <p:spPr>
-          <a:xfrm>
-            <a:off x="868680" y="1417320"/>
-            <a:ext cx="6675120" cy="4434840"/>
+            <a:endParaRPr lang="en-US" sz="3400" dirty="0"/>
+          </a:p>
+        </p:txBody>
+      </p:sp>
+      <p:sp>
+        <p:nvSpPr>
+          <p:cNvPr id="11" name="Text 9"/>
+          <p:cNvSpPr/>
+          <p:nvPr/>
+        </p:nvSpPr>
+        <p:spPr>
+          <a:xfrm>
+            <a:off x="868680" y="1508760"/>
+            <a:ext cx="6537960" cy="4160520"/>
           </a:xfrm>
           <a:prstGeom prst="rect">
             <a:avLst/>
@@ -4014,7 +4117,7 @@
           <a:lstStyle/>
           <a:p>
             <a:r>
-              <a:rPr lang="en-US" sz="1700" dirty="0">
+              <a:rPr lang="en-US" sz="2100" dirty="0">
                 <a:solidFill>
                   <a:srgbClr val="17364A"/>
                 </a:solidFill>
@@ -4022,13 +4125,13 @@
                 <a:ea typeface="Aptos" pitchFamily="34" charset="-122"/>
                 <a:cs typeface="Aptos" pitchFamily="34" charset="-120"/>
               </a:rPr>
-              <a:t>A health department may want an AI assistant to summarize incoming case reports and create follow-up tasks for investigators.</a:t>
-            </a:r>
-            <a:endParaRPr lang="en-US" sz="1700" dirty="0"/>
-          </a:p>
-          <a:p>
-            <a:r>
-              <a:rPr lang="en-US" sz="1700" dirty="0">
+              <a:t>A health department may want an AI assistant to summarize incoming case reports and create follow-up.</a:t>
+            </a:r>
+            <a:endParaRPr lang="en-US" sz="2100" dirty="0"/>
+          </a:p>
+          <a:p>
+            <a:r>
+              <a:rPr lang="en-US" sz="2100" dirty="0">
                 <a:solidFill>
                   <a:srgbClr val="17364A"/>
                 </a:solidFill>
@@ -4036,13 +4139,13 @@
                 <a:ea typeface="Aptos" pitchFamily="34" charset="-122"/>
                 <a:cs typeface="Aptos" pitchFamily="34" charset="-120"/>
               </a:rPr>
-              <a:t>A weak integration pattern would require staff to export case data, paste it into an external tool, copy the summary, and.</a:t>
-            </a:r>
-            <a:endParaRPr lang="en-US" sz="1700" dirty="0"/>
-          </a:p>
-          <a:p>
-            <a:r>
-              <a:rPr lang="en-US" sz="1700" dirty="0">
+              <a:t>A weak integration pattern would require staff to export case data, paste it into an external tool,.</a:t>
+            </a:r>
+            <a:endParaRPr lang="en-US" sz="2100" dirty="0"/>
+          </a:p>
+          <a:p>
+            <a:r>
+              <a:rPr lang="en-US" sz="2100" dirty="0">
                 <a:solidFill>
                   <a:srgbClr val="17364A"/>
                 </a:solidFill>
@@ -4050,29 +4153,15 @@
                 <a:ea typeface="Aptos" pitchFamily="34" charset="-122"/>
                 <a:cs typeface="Aptos" pitchFamily="34" charset="-120"/>
               </a:rPr>
-              <a:t>A stronger pattern would retrieve approved fields from the surveillance system, generate a draft summary inside the.</a:t>
-            </a:r>
-            <a:endParaRPr lang="en-US" sz="1700" dirty="0"/>
-          </a:p>
-          <a:p>
-            <a:r>
-              <a:rPr lang="en-US" sz="1700" dirty="0">
-                <a:solidFill>
-                  <a:srgbClr val="17364A"/>
-                </a:solidFill>
-                <a:latin typeface="Aptos" pitchFamily="34" charset="0"/>
-                <a:ea typeface="Aptos" pitchFamily="34" charset="-122"/>
-                <a:cs typeface="Aptos" pitchFamily="34" charset="-120"/>
-              </a:rPr>
-              <a:t>The technical design matters because the AI tool is no longer just generating text.</a:t>
-            </a:r>
-            <a:endParaRPr lang="en-US" sz="1700" dirty="0"/>
-          </a:p>
-        </p:txBody>
-      </p:sp>
-      <p:sp>
-        <p:nvSpPr>
-          <p:cNvPr id="11" name="Shape 9"/>
+              <a:t>A stronger pattern would retrieve approved fields from the surveillance system, generate a draft.</a:t>
+            </a:r>
+            <a:endParaRPr lang="en-US" sz="2100" dirty="0"/>
+          </a:p>
+        </p:txBody>
+      </p:sp>
+      <p:sp>
+        <p:nvSpPr>
+          <p:cNvPr id="12" name="Shape 10"/>
           <p:cNvSpPr/>
           <p:nvPr/>
         </p:nvSpPr>
@@ -4099,14 +4188,14 @@
       </p:sp>
       <p:sp>
         <p:nvSpPr>
-          <p:cNvPr id="12" name="Text 10"/>
+          <p:cNvPr id="13" name="Text 11"/>
           <p:cNvSpPr/>
           <p:nvPr/>
         </p:nvSpPr>
         <p:spPr>
           <a:xfrm>
             <a:off x="8074152" y="1563624"/>
-            <a:ext cx="2825496" cy="201168"/>
+            <a:ext cx="2825496" cy="256032"/>
           </a:xfrm>
           <a:prstGeom prst="rect">
             <a:avLst/>
@@ -4122,7 +4211,7 @@
               <a:buNone/>
             </a:pPr>
             <a:r>
-              <a:rPr lang="en-US" sz="950" b="1" dirty="0">
+              <a:rPr lang="en-US" sz="1300" b="1" dirty="0">
                 <a:solidFill>
                   <a:srgbClr val="0068B7"/>
                 </a:solidFill>
@@ -4132,20 +4221,20 @@
               </a:rPr>
               <a:t>Key idea</a:t>
             </a:r>
-            <a:endParaRPr lang="en-US" sz="950" dirty="0"/>
-          </a:p>
-        </p:txBody>
-      </p:sp>
-      <p:sp>
-        <p:nvSpPr>
-          <p:cNvPr id="13" name="Text 11"/>
-          <p:cNvSpPr/>
-          <p:nvPr/>
-        </p:nvSpPr>
-        <p:spPr>
-          <a:xfrm>
-            <a:off x="8074152" y="1856232"/>
-            <a:ext cx="2825496" cy="1261872"/>
+            <a:endParaRPr lang="en-US" sz="1300" dirty="0"/>
+          </a:p>
+        </p:txBody>
+      </p:sp>
+      <p:sp>
+        <p:nvSpPr>
+          <p:cNvPr id="14" name="Text 12"/>
+          <p:cNvSpPr/>
+          <p:nvPr/>
+        </p:nvSpPr>
+        <p:spPr>
+          <a:xfrm>
+            <a:off x="8074152" y="1920240"/>
+            <a:ext cx="2825496" cy="1188720"/>
           </a:xfrm>
           <a:prstGeom prst="rect">
             <a:avLst/>
@@ -4163,7 +4252,7 @@
               <a:buNone/>
             </a:pPr>
             <a:r>
-              <a:rPr lang="en-US" sz="1250" dirty="0">
+              <a:rPr lang="en-US" sz="1550" dirty="0">
                 <a:solidFill>
                   <a:srgbClr val="17364A"/>
                 </a:solidFill>
@@ -4171,15 +4260,15 @@
                 <a:ea typeface="Aptos" pitchFamily="34" charset="-122"/>
                 <a:cs typeface="Aptos" pitchFamily="34" charset="-120"/>
               </a:rPr>
-              <a:t>A health department may want an AI assistant to summarize incoming case reports and create follow-up tasks for investigators.</a:t>
-            </a:r>
-            <a:endParaRPr lang="en-US" sz="1250" dirty="0"/>
-          </a:p>
-        </p:txBody>
-      </p:sp>
-      <p:sp>
-        <p:nvSpPr>
-          <p:cNvPr id="14" name="Shape 12"/>
+              <a:t>A health department may want an AI assistant to summarize incoming case reports and create follow-up.</a:t>
+            </a:r>
+            <a:endParaRPr lang="en-US" sz="1550" dirty="0"/>
+          </a:p>
+        </p:txBody>
+      </p:sp>
+      <p:sp>
+        <p:nvSpPr>
+          <p:cNvPr id="15" name="Shape 13"/>
           <p:cNvSpPr/>
           <p:nvPr/>
         </p:nvSpPr>
@@ -4206,14 +4295,14 @@
       </p:sp>
       <p:sp>
         <p:nvSpPr>
-          <p:cNvPr id="15" name="Text 13"/>
+          <p:cNvPr id="16" name="Text 14"/>
           <p:cNvSpPr/>
           <p:nvPr/>
         </p:nvSpPr>
         <p:spPr>
           <a:xfrm>
             <a:off x="8074152" y="3666744"/>
-            <a:ext cx="2825496" cy="201168"/>
+            <a:ext cx="2825496" cy="256032"/>
           </a:xfrm>
           <a:prstGeom prst="rect">
             <a:avLst/>
@@ -4229,7 +4318,7 @@
               <a:buNone/>
             </a:pPr>
             <a:r>
-              <a:rPr lang="en-US" sz="950" b="1" dirty="0">
+              <a:rPr lang="en-US" sz="1300" b="1" dirty="0">
                 <a:solidFill>
                   <a:srgbClr val="0068B7"/>
                 </a:solidFill>
@@ -4239,20 +4328,20 @@
               </a:rPr>
               <a:t>Use this for</a:t>
             </a:r>
-            <a:endParaRPr lang="en-US" sz="950" dirty="0"/>
-          </a:p>
-        </p:txBody>
-      </p:sp>
-      <p:sp>
-        <p:nvSpPr>
-          <p:cNvPr id="16" name="Text 14"/>
-          <p:cNvSpPr/>
-          <p:nvPr/>
-        </p:nvSpPr>
-        <p:spPr>
-          <a:xfrm>
-            <a:off x="8074152" y="3959352"/>
-            <a:ext cx="2825496" cy="1170432"/>
+            <a:endParaRPr lang="en-US" sz="1300" dirty="0"/>
+          </a:p>
+        </p:txBody>
+      </p:sp>
+      <p:sp>
+        <p:nvSpPr>
+          <p:cNvPr id="17" name="Text 15"/>
+          <p:cNvSpPr/>
+          <p:nvPr/>
+        </p:nvSpPr>
+        <p:spPr>
+          <a:xfrm>
+            <a:off x="8074152" y="4023360"/>
+            <a:ext cx="2825496" cy="1097280"/>
           </a:xfrm>
           <a:prstGeom prst="rect">
             <a:avLst/>
@@ -4270,7 +4359,7 @@
               <a:buNone/>
             </a:pPr>
             <a:r>
-              <a:rPr lang="en-US" sz="1250" dirty="0">
+              <a:rPr lang="en-US" sz="1550" dirty="0">
                 <a:solidFill>
                   <a:srgbClr val="17364A"/>
                 </a:solidFill>
@@ -4280,7 +4369,7 @@
               </a:rPr>
               <a:t>Connect the concept to public health decisions, safeguards, documentation, or implementation work.</a:t>
             </a:r>
-            <a:endParaRPr lang="en-US" sz="1250" dirty="0"/>
+            <a:endParaRPr lang="en-US" sz="1550" dirty="0"/>
           </a:p>
         </p:txBody>
       </p:sp>
@@ -4477,7 +4566,7 @@
                 <a:ea typeface="Aptos" pitchFamily="34" charset="-122"/>
                 <a:cs typeface="Aptos" pitchFamily="34" charset="-120"/>
               </a:rPr>
-              <a:t>© Paula Soper</a:t>
+              <a:t>Â© Paula Soper</a:t>
             </a:r>
             <a:endParaRPr lang="en-US" sz="800" dirty="0"/>
           </a:p>
@@ -4485,7 +4574,46 @@
       </p:sp>
       <p:sp>
         <p:nvSpPr>
-          <p:cNvPr id="7" name="Shape 5"/>
+          <p:cNvPr id="7" name="Text 5"/>
+          <p:cNvSpPr/>
+          <p:nvPr/>
+        </p:nvSpPr>
+        <p:spPr>
+          <a:xfrm>
+            <a:off x="11137392" y="6510528"/>
+            <a:ext cx="411480" cy="201168"/>
+          </a:xfrm>
+          <a:prstGeom prst="rect">
+            <a:avLst/>
+          </a:prstGeom>
+          <a:noFill/>
+          <a:ln/>
+        </p:spPr>
+        <p:txBody>
+          <a:bodyPr wrap="square" lIns="0" tIns="0" rIns="0" bIns="0" rtlCol="0" anchor="ctr"/>
+          <a:lstStyle/>
+          <a:p>
+            <a:pPr algn="r" indent="0" marL="0">
+              <a:buNone/>
+            </a:pPr>
+            <a:r>
+              <a:rPr lang="en-US" sz="900" dirty="0">
+                <a:solidFill>
+                  <a:srgbClr val="5F7181"/>
+                </a:solidFill>
+                <a:latin typeface="Aptos" pitchFamily="34" charset="0"/>
+                <a:ea typeface="Aptos" pitchFamily="34" charset="-122"/>
+                <a:cs typeface="Aptos" pitchFamily="34" charset="-120"/>
+              </a:rPr>
+              <a:t>12</a:t>
+            </a:r>
+            <a:endParaRPr lang="en-US" sz="900" dirty="0"/>
+          </a:p>
+        </p:txBody>
+      </p:sp>
+      <p:sp>
+        <p:nvSpPr>
+          <p:cNvPr id="8" name="Shape 6"/>
           <p:cNvSpPr/>
           <p:nvPr/>
         </p:nvSpPr>
@@ -4510,7 +4638,7 @@
       </p:sp>
       <p:sp>
         <p:nvSpPr>
-          <p:cNvPr id="8" name="Text 6"/>
+          <p:cNvPr id="9" name="Text 7"/>
           <p:cNvSpPr/>
           <p:nvPr/>
         </p:nvSpPr>
@@ -4549,14 +4677,14 @@
       </p:sp>
       <p:sp>
         <p:nvSpPr>
-          <p:cNvPr id="9" name="Text 7"/>
+          <p:cNvPr id="10" name="Text 8"/>
           <p:cNvSpPr/>
           <p:nvPr/>
         </p:nvSpPr>
         <p:spPr>
           <a:xfrm>
             <a:off x="640080" y="621792"/>
-            <a:ext cx="10881360" cy="566928"/>
+            <a:ext cx="10881360" cy="713232"/>
           </a:xfrm>
           <a:prstGeom prst="rect">
             <a:avLst/>
@@ -4574,7 +4702,7 @@
               <a:buNone/>
             </a:pPr>
             <a:r>
-              <a:rPr lang="en-US" sz="2700" b="1" dirty="0">
+              <a:rPr lang="en-US" sz="3400" b="1" dirty="0">
                 <a:solidFill>
                   <a:srgbClr val="003A63"/>
                 </a:solidFill>
@@ -4584,20 +4712,20 @@
               </a:rPr>
               <a:t>Technical and Operational Deep Dive</a:t>
             </a:r>
-            <a:endParaRPr lang="en-US" sz="2700" dirty="0"/>
-          </a:p>
-        </p:txBody>
-      </p:sp>
-      <p:sp>
-        <p:nvSpPr>
-          <p:cNvPr id="10" name="Text 8"/>
-          <p:cNvSpPr/>
-          <p:nvPr/>
-        </p:nvSpPr>
-        <p:spPr>
-          <a:xfrm>
-            <a:off x="868680" y="1417320"/>
-            <a:ext cx="6675120" cy="4434840"/>
+            <a:endParaRPr lang="en-US" sz="3400" dirty="0"/>
+          </a:p>
+        </p:txBody>
+      </p:sp>
+      <p:sp>
+        <p:nvSpPr>
+          <p:cNvPr id="11" name="Text 9"/>
+          <p:cNvSpPr/>
+          <p:nvPr/>
+        </p:nvSpPr>
+        <p:spPr>
+          <a:xfrm>
+            <a:off x="868680" y="1508760"/>
+            <a:ext cx="6537960" cy="4160520"/>
           </a:xfrm>
           <a:prstGeom prst="rect">
             <a:avLst/>
@@ -4612,7 +4740,7 @@
           <a:lstStyle/>
           <a:p>
             <a:r>
-              <a:rPr lang="en-US" sz="1700" dirty="0">
+              <a:rPr lang="en-US" sz="2100" dirty="0">
                 <a:solidFill>
                   <a:srgbClr val="17364A"/>
                 </a:solidFill>
@@ -4622,11 +4750,11 @@
               </a:rPr>
               <a:t>Point-to-point interfaces connect two systems directly.</a:t>
             </a:r>
-            <a:endParaRPr lang="en-US" sz="1700" dirty="0"/>
-          </a:p>
-          <a:p>
-            <a:r>
-              <a:rPr lang="en-US" sz="1700" dirty="0">
+            <a:endParaRPr lang="en-US" sz="2100" dirty="0"/>
+          </a:p>
+          <a:p>
+            <a:r>
+              <a:rPr lang="en-US" sz="2100" dirty="0">
                 <a:solidFill>
                   <a:srgbClr val="17364A"/>
                 </a:solidFill>
@@ -4634,13 +4762,13 @@
                 <a:ea typeface="Aptos" pitchFamily="34" charset="-122"/>
                 <a:cs typeface="Aptos" pitchFamily="34" charset="-120"/>
               </a:rPr>
-              <a:t>They can be useful when the exchange is stable and narrow, but they become difficult to maintain as the number of systems.</a:t>
-            </a:r>
-            <a:endParaRPr lang="en-US" sz="1700" dirty="0"/>
-          </a:p>
-          <a:p>
-            <a:r>
-              <a:rPr lang="en-US" sz="1700" dirty="0">
+              <a:t>They can be useful when the exchange is stable and narrow, but they become difficult to maintain as the.</a:t>
+            </a:r>
+            <a:endParaRPr lang="en-US" sz="2100" dirty="0"/>
+          </a:p>
+          <a:p>
+            <a:r>
+              <a:rPr lang="en-US" sz="2100" dirty="0">
                 <a:solidFill>
                   <a:srgbClr val="17364A"/>
                 </a:solidFill>
@@ -4648,29 +4776,15 @@
                 <a:ea typeface="Aptos" pitchFamily="34" charset="-122"/>
                 <a:cs typeface="Aptos" pitchFamily="34" charset="-120"/>
               </a:rPr>
-              <a:t>In public health, too many point-to-point connections can create brittle architecture, inconsistent validation, and high.</a:t>
-            </a:r>
-            <a:endParaRPr lang="en-US" sz="1700" dirty="0"/>
-          </a:p>
-          <a:p>
-            <a:r>
-              <a:rPr lang="en-US" sz="1700" dirty="0">
-                <a:solidFill>
-                  <a:srgbClr val="17364A"/>
-                </a:solidFill>
-                <a:latin typeface="Aptos" pitchFamily="34" charset="0"/>
-                <a:ea typeface="Aptos" pitchFamily="34" charset="-122"/>
-                <a:cs typeface="Aptos" pitchFamily="34" charset="-120"/>
-              </a:rPr>
-              <a:t>Interface engines and message brokers support more scalable exchange.</a:t>
-            </a:r>
-            <a:endParaRPr lang="en-US" sz="1700" dirty="0"/>
-          </a:p>
-        </p:txBody>
-      </p:sp>
-      <p:sp>
-        <p:nvSpPr>
-          <p:cNvPr id="11" name="Shape 9"/>
+              <a:t>In public health, too many point-to-point connections can create brittle architecture, inconsistent.</a:t>
+            </a:r>
+            <a:endParaRPr lang="en-US" sz="2100" dirty="0"/>
+          </a:p>
+        </p:txBody>
+      </p:sp>
+      <p:sp>
+        <p:nvSpPr>
+          <p:cNvPr id="12" name="Shape 10"/>
           <p:cNvSpPr/>
           <p:nvPr/>
         </p:nvSpPr>
@@ -4697,14 +4811,14 @@
       </p:sp>
       <p:sp>
         <p:nvSpPr>
-          <p:cNvPr id="12" name="Text 10"/>
+          <p:cNvPr id="13" name="Text 11"/>
           <p:cNvSpPr/>
           <p:nvPr/>
         </p:nvSpPr>
         <p:spPr>
           <a:xfrm>
             <a:off x="8074152" y="1563624"/>
-            <a:ext cx="2825496" cy="201168"/>
+            <a:ext cx="2825496" cy="256032"/>
           </a:xfrm>
           <a:prstGeom prst="rect">
             <a:avLst/>
@@ -4720,7 +4834,7 @@
               <a:buNone/>
             </a:pPr>
             <a:r>
-              <a:rPr lang="en-US" sz="950" b="1" dirty="0">
+              <a:rPr lang="en-US" sz="1300" b="1" dirty="0">
                 <a:solidFill>
                   <a:srgbClr val="0068B7"/>
                 </a:solidFill>
@@ -4730,20 +4844,20 @@
               </a:rPr>
               <a:t>Key idea</a:t>
             </a:r>
-            <a:endParaRPr lang="en-US" sz="950" dirty="0"/>
-          </a:p>
-        </p:txBody>
-      </p:sp>
-      <p:sp>
-        <p:nvSpPr>
-          <p:cNvPr id="13" name="Text 11"/>
-          <p:cNvSpPr/>
-          <p:nvPr/>
-        </p:nvSpPr>
-        <p:spPr>
-          <a:xfrm>
-            <a:off x="8074152" y="1856232"/>
-            <a:ext cx="2825496" cy="1261872"/>
+            <a:endParaRPr lang="en-US" sz="1300" dirty="0"/>
+          </a:p>
+        </p:txBody>
+      </p:sp>
+      <p:sp>
+        <p:nvSpPr>
+          <p:cNvPr id="14" name="Text 12"/>
+          <p:cNvSpPr/>
+          <p:nvPr/>
+        </p:nvSpPr>
+        <p:spPr>
+          <a:xfrm>
+            <a:off x="8074152" y="1920240"/>
+            <a:ext cx="2825496" cy="1188720"/>
           </a:xfrm>
           <a:prstGeom prst="rect">
             <a:avLst/>
@@ -4761,7 +4875,7 @@
               <a:buNone/>
             </a:pPr>
             <a:r>
-              <a:rPr lang="en-US" sz="1250" dirty="0">
+              <a:rPr lang="en-US" sz="1550" dirty="0">
                 <a:solidFill>
                   <a:srgbClr val="17364A"/>
                 </a:solidFill>
@@ -4771,13 +4885,13 @@
               </a:rPr>
               <a:t>Point-to-point interfaces connect two systems directly.</a:t>
             </a:r>
-            <a:endParaRPr lang="en-US" sz="1250" dirty="0"/>
-          </a:p>
-        </p:txBody>
-      </p:sp>
-      <p:sp>
-        <p:nvSpPr>
-          <p:cNvPr id="14" name="Shape 12"/>
+            <a:endParaRPr lang="en-US" sz="1550" dirty="0"/>
+          </a:p>
+        </p:txBody>
+      </p:sp>
+      <p:sp>
+        <p:nvSpPr>
+          <p:cNvPr id="15" name="Shape 13"/>
           <p:cNvSpPr/>
           <p:nvPr/>
         </p:nvSpPr>
@@ -4804,14 +4918,14 @@
       </p:sp>
       <p:sp>
         <p:nvSpPr>
-          <p:cNvPr id="15" name="Text 13"/>
+          <p:cNvPr id="16" name="Text 14"/>
           <p:cNvSpPr/>
           <p:nvPr/>
         </p:nvSpPr>
         <p:spPr>
           <a:xfrm>
             <a:off x="8074152" y="3666744"/>
-            <a:ext cx="2825496" cy="201168"/>
+            <a:ext cx="2825496" cy="256032"/>
           </a:xfrm>
           <a:prstGeom prst="rect">
             <a:avLst/>
@@ -4827,7 +4941,7 @@
               <a:buNone/>
             </a:pPr>
             <a:r>
-              <a:rPr lang="en-US" sz="950" b="1" dirty="0">
+              <a:rPr lang="en-US" sz="1300" b="1" dirty="0">
                 <a:solidFill>
                   <a:srgbClr val="0068B7"/>
                 </a:solidFill>
@@ -4837,20 +4951,20 @@
               </a:rPr>
               <a:t>Use this for</a:t>
             </a:r>
-            <a:endParaRPr lang="en-US" sz="950" dirty="0"/>
-          </a:p>
-        </p:txBody>
-      </p:sp>
-      <p:sp>
-        <p:nvSpPr>
-          <p:cNvPr id="16" name="Text 14"/>
-          <p:cNvSpPr/>
-          <p:nvPr/>
-        </p:nvSpPr>
-        <p:spPr>
-          <a:xfrm>
-            <a:off x="8074152" y="3959352"/>
-            <a:ext cx="2825496" cy="1170432"/>
+            <a:endParaRPr lang="en-US" sz="1300" dirty="0"/>
+          </a:p>
+        </p:txBody>
+      </p:sp>
+      <p:sp>
+        <p:nvSpPr>
+          <p:cNvPr id="17" name="Text 15"/>
+          <p:cNvSpPr/>
+          <p:nvPr/>
+        </p:nvSpPr>
+        <p:spPr>
+          <a:xfrm>
+            <a:off x="8074152" y="4023360"/>
+            <a:ext cx="2825496" cy="1097280"/>
           </a:xfrm>
           <a:prstGeom prst="rect">
             <a:avLst/>
@@ -4868,7 +4982,7 @@
               <a:buNone/>
             </a:pPr>
             <a:r>
-              <a:rPr lang="en-US" sz="1250" dirty="0">
+              <a:rPr lang="en-US" sz="1550" dirty="0">
                 <a:solidFill>
                   <a:srgbClr val="17364A"/>
                 </a:solidFill>
@@ -4878,7 +4992,7 @@
               </a:rPr>
               <a:t>Connect the concept to public health decisions, safeguards, documentation, or implementation work.</a:t>
             </a:r>
-            <a:endParaRPr lang="en-US" sz="1250" dirty="0"/>
+            <a:endParaRPr lang="en-US" sz="1550" dirty="0"/>
           </a:p>
         </p:txBody>
       </p:sp>
@@ -5075,7 +5189,7 @@
                 <a:ea typeface="Aptos" pitchFamily="34" charset="-122"/>
                 <a:cs typeface="Aptos" pitchFamily="34" charset="-120"/>
               </a:rPr>
-              <a:t>© Paula Soper</a:t>
+              <a:t>Â© Paula Soper</a:t>
             </a:r>
             <a:endParaRPr lang="en-US" sz="800" dirty="0"/>
           </a:p>
@@ -5083,7 +5197,46 @@
       </p:sp>
       <p:sp>
         <p:nvSpPr>
-          <p:cNvPr id="7" name="Shape 5"/>
+          <p:cNvPr id="7" name="Text 5"/>
+          <p:cNvSpPr/>
+          <p:nvPr/>
+        </p:nvSpPr>
+        <p:spPr>
+          <a:xfrm>
+            <a:off x="11137392" y="6510528"/>
+            <a:ext cx="411480" cy="201168"/>
+          </a:xfrm>
+          <a:prstGeom prst="rect">
+            <a:avLst/>
+          </a:prstGeom>
+          <a:noFill/>
+          <a:ln/>
+        </p:spPr>
+        <p:txBody>
+          <a:bodyPr wrap="square" lIns="0" tIns="0" rIns="0" bIns="0" rtlCol="0" anchor="ctr"/>
+          <a:lstStyle/>
+          <a:p>
+            <a:pPr algn="r" indent="0" marL="0">
+              <a:buNone/>
+            </a:pPr>
+            <a:r>
+              <a:rPr lang="en-US" sz="900" dirty="0">
+                <a:solidFill>
+                  <a:srgbClr val="5F7181"/>
+                </a:solidFill>
+                <a:latin typeface="Aptos" pitchFamily="34" charset="0"/>
+                <a:ea typeface="Aptos" pitchFamily="34" charset="-122"/>
+                <a:cs typeface="Aptos" pitchFamily="34" charset="-120"/>
+              </a:rPr>
+              <a:t>13</a:t>
+            </a:r>
+            <a:endParaRPr lang="en-US" sz="900" dirty="0"/>
+          </a:p>
+        </p:txBody>
+      </p:sp>
+      <p:sp>
+        <p:nvSpPr>
+          <p:cNvPr id="8" name="Shape 6"/>
           <p:cNvSpPr/>
           <p:nvPr/>
         </p:nvSpPr>
@@ -5108,7 +5261,7 @@
       </p:sp>
       <p:sp>
         <p:nvSpPr>
-          <p:cNvPr id="8" name="Text 6"/>
+          <p:cNvPr id="9" name="Text 7"/>
           <p:cNvSpPr/>
           <p:nvPr/>
         </p:nvSpPr>
@@ -5147,14 +5300,14 @@
       </p:sp>
       <p:sp>
         <p:nvSpPr>
-          <p:cNvPr id="9" name="Text 7"/>
+          <p:cNvPr id="10" name="Text 8"/>
           <p:cNvSpPr/>
           <p:nvPr/>
         </p:nvSpPr>
         <p:spPr>
           <a:xfrm>
             <a:off x="640080" y="621792"/>
-            <a:ext cx="10881360" cy="566928"/>
+            <a:ext cx="10881360" cy="713232"/>
           </a:xfrm>
           <a:prstGeom prst="rect">
             <a:avLst/>
@@ -5172,7 +5325,7 @@
               <a:buNone/>
             </a:pPr>
             <a:r>
-              <a:rPr lang="en-US" sz="2700" b="1" dirty="0">
+              <a:rPr lang="en-US" sz="3400" b="1" dirty="0">
                 <a:solidFill>
                   <a:srgbClr val="003A63"/>
                 </a:solidFill>
@@ -5182,20 +5335,20 @@
               </a:rPr>
               <a:t>Risks, Failure Modes, and Guardrails</a:t>
             </a:r>
-            <a:endParaRPr lang="en-US" sz="2700" dirty="0"/>
-          </a:p>
-        </p:txBody>
-      </p:sp>
-      <p:sp>
-        <p:nvSpPr>
-          <p:cNvPr id="10" name="Text 8"/>
-          <p:cNvSpPr/>
-          <p:nvPr/>
-        </p:nvSpPr>
-        <p:spPr>
-          <a:xfrm>
-            <a:off x="868680" y="1417320"/>
-            <a:ext cx="6675120" cy="4434840"/>
+            <a:endParaRPr lang="en-US" sz="3400" dirty="0"/>
+          </a:p>
+        </p:txBody>
+      </p:sp>
+      <p:sp>
+        <p:nvSpPr>
+          <p:cNvPr id="11" name="Text 9"/>
+          <p:cNvSpPr/>
+          <p:nvPr/>
+        </p:nvSpPr>
+        <p:spPr>
+          <a:xfrm>
+            <a:off x="868680" y="1508760"/>
+            <a:ext cx="6537960" cy="4160520"/>
           </a:xfrm>
           <a:prstGeom prst="rect">
             <a:avLst/>
@@ -5210,7 +5363,7 @@
           <a:lstStyle/>
           <a:p>
             <a:r>
-              <a:rPr lang="en-US" sz="1700" dirty="0">
+              <a:rPr lang="en-US" sz="2100" dirty="0">
                 <a:solidFill>
                   <a:srgbClr val="17364A"/>
                 </a:solidFill>
@@ -5220,11 +5373,11 @@
               </a:rPr>
               <a:t>A common failure mode is integration by workaround.</a:t>
             </a:r>
-            <a:endParaRPr lang="en-US" sz="1700" dirty="0"/>
-          </a:p>
-          <a:p>
-            <a:r>
-              <a:rPr lang="en-US" sz="1700" dirty="0">
+            <a:endParaRPr lang="en-US" sz="2100" dirty="0"/>
+          </a:p>
+          <a:p>
+            <a:r>
+              <a:rPr lang="en-US" sz="2100" dirty="0">
                 <a:solidFill>
                   <a:srgbClr val="17364A"/>
                 </a:solidFill>
@@ -5232,13 +5385,13 @@
                 <a:ea typeface="Aptos" pitchFamily="34" charset="-122"/>
                 <a:cs typeface="Aptos" pitchFamily="34" charset="-120"/>
               </a:rPr>
-              <a:t>Staff may use manual exports, screenshots, shared drives, or copy-and-paste workflows when a tool is not properly integrated.</a:t>
-            </a:r>
-            <a:endParaRPr lang="en-US" sz="1700" dirty="0"/>
-          </a:p>
-          <a:p>
-            <a:r>
-              <a:rPr lang="en-US" sz="1700" dirty="0">
+              <a:t>Staff may use manual exports, screenshots, shared drives, or copy-and-paste workflows when a tool is.</a:t>
+            </a:r>
+            <a:endParaRPr lang="en-US" sz="2100" dirty="0"/>
+          </a:p>
+          <a:p>
+            <a:r>
+              <a:rPr lang="en-US" sz="2100" dirty="0">
                 <a:solidFill>
                   <a:srgbClr val="17364A"/>
                 </a:solidFill>
@@ -5248,27 +5401,13 @@
               </a:rPr>
               <a:t>These practices can create privacy risk, version confusion, and gaps in the official record.</a:t>
             </a:r>
-            <a:endParaRPr lang="en-US" sz="1700" dirty="0"/>
-          </a:p>
-          <a:p>
-            <a:r>
-              <a:rPr lang="en-US" sz="1700" dirty="0">
-                <a:solidFill>
-                  <a:srgbClr val="17364A"/>
-                </a:solidFill>
-                <a:latin typeface="Aptos" pitchFamily="34" charset="0"/>
-                <a:ea typeface="Aptos" pitchFamily="34" charset="-122"/>
-                <a:cs typeface="Aptos" pitchFamily="34" charset="-120"/>
-              </a:rPr>
-              <a:t>A guardrail is to require integration review before operational use and to document whether manual transfer of sensitive.</a:t>
-            </a:r>
-            <a:endParaRPr lang="en-US" sz="1700" dirty="0"/>
-          </a:p>
-        </p:txBody>
-      </p:sp>
-      <p:sp>
-        <p:nvSpPr>
-          <p:cNvPr id="11" name="Shape 9"/>
+            <a:endParaRPr lang="en-US" sz="2100" dirty="0"/>
+          </a:p>
+        </p:txBody>
+      </p:sp>
+      <p:sp>
+        <p:nvSpPr>
+          <p:cNvPr id="12" name="Shape 10"/>
           <p:cNvSpPr/>
           <p:nvPr/>
         </p:nvSpPr>
@@ -5295,14 +5434,14 @@
       </p:sp>
       <p:sp>
         <p:nvSpPr>
-          <p:cNvPr id="12" name="Text 10"/>
+          <p:cNvPr id="13" name="Text 11"/>
           <p:cNvSpPr/>
           <p:nvPr/>
         </p:nvSpPr>
         <p:spPr>
           <a:xfrm>
             <a:off x="8074152" y="1563624"/>
-            <a:ext cx="2825496" cy="201168"/>
+            <a:ext cx="2825496" cy="256032"/>
           </a:xfrm>
           <a:prstGeom prst="rect">
             <a:avLst/>
@@ -5318,7 +5457,7 @@
               <a:buNone/>
             </a:pPr>
             <a:r>
-              <a:rPr lang="en-US" sz="950" b="1" dirty="0">
+              <a:rPr lang="en-US" sz="1300" b="1" dirty="0">
                 <a:solidFill>
                   <a:srgbClr val="0068B7"/>
                 </a:solidFill>
@@ -5328,20 +5467,20 @@
               </a:rPr>
               <a:t>Key idea</a:t>
             </a:r>
-            <a:endParaRPr lang="en-US" sz="950" dirty="0"/>
-          </a:p>
-        </p:txBody>
-      </p:sp>
-      <p:sp>
-        <p:nvSpPr>
-          <p:cNvPr id="13" name="Text 11"/>
-          <p:cNvSpPr/>
-          <p:nvPr/>
-        </p:nvSpPr>
-        <p:spPr>
-          <a:xfrm>
-            <a:off x="8074152" y="1856232"/>
-            <a:ext cx="2825496" cy="1261872"/>
+            <a:endParaRPr lang="en-US" sz="1300" dirty="0"/>
+          </a:p>
+        </p:txBody>
+      </p:sp>
+      <p:sp>
+        <p:nvSpPr>
+          <p:cNvPr id="14" name="Text 12"/>
+          <p:cNvSpPr/>
+          <p:nvPr/>
+        </p:nvSpPr>
+        <p:spPr>
+          <a:xfrm>
+            <a:off x="8074152" y="1920240"/>
+            <a:ext cx="2825496" cy="1188720"/>
           </a:xfrm>
           <a:prstGeom prst="rect">
             <a:avLst/>
@@ -5359,7 +5498,7 @@
               <a:buNone/>
             </a:pPr>
             <a:r>
-              <a:rPr lang="en-US" sz="1250" dirty="0">
+              <a:rPr lang="en-US" sz="1550" dirty="0">
                 <a:solidFill>
                   <a:srgbClr val="17364A"/>
                 </a:solidFill>
@@ -5369,13 +5508,13 @@
               </a:rPr>
               <a:t>A common failure mode is integration by workaround.</a:t>
             </a:r>
-            <a:endParaRPr lang="en-US" sz="1250" dirty="0"/>
-          </a:p>
-        </p:txBody>
-      </p:sp>
-      <p:sp>
-        <p:nvSpPr>
-          <p:cNvPr id="14" name="Shape 12"/>
+            <a:endParaRPr lang="en-US" sz="1550" dirty="0"/>
+          </a:p>
+        </p:txBody>
+      </p:sp>
+      <p:sp>
+        <p:nvSpPr>
+          <p:cNvPr id="15" name="Shape 13"/>
           <p:cNvSpPr/>
           <p:nvPr/>
         </p:nvSpPr>
@@ -5402,14 +5541,14 @@
       </p:sp>
       <p:sp>
         <p:nvSpPr>
-          <p:cNvPr id="15" name="Text 13"/>
+          <p:cNvPr id="16" name="Text 14"/>
           <p:cNvSpPr/>
           <p:nvPr/>
         </p:nvSpPr>
         <p:spPr>
           <a:xfrm>
             <a:off x="8074152" y="3666744"/>
-            <a:ext cx="2825496" cy="201168"/>
+            <a:ext cx="2825496" cy="256032"/>
           </a:xfrm>
           <a:prstGeom prst="rect">
             <a:avLst/>
@@ -5425,7 +5564,7 @@
               <a:buNone/>
             </a:pPr>
             <a:r>
-              <a:rPr lang="en-US" sz="950" b="1" dirty="0">
+              <a:rPr lang="en-US" sz="1300" b="1" dirty="0">
                 <a:solidFill>
                   <a:srgbClr val="0068B7"/>
                 </a:solidFill>
@@ -5435,20 +5574,20 @@
               </a:rPr>
               <a:t>Use this for</a:t>
             </a:r>
-            <a:endParaRPr lang="en-US" sz="950" dirty="0"/>
-          </a:p>
-        </p:txBody>
-      </p:sp>
-      <p:sp>
-        <p:nvSpPr>
-          <p:cNvPr id="16" name="Text 14"/>
-          <p:cNvSpPr/>
-          <p:nvPr/>
-        </p:nvSpPr>
-        <p:spPr>
-          <a:xfrm>
-            <a:off x="8074152" y="3959352"/>
-            <a:ext cx="2825496" cy="1170432"/>
+            <a:endParaRPr lang="en-US" sz="1300" dirty="0"/>
+          </a:p>
+        </p:txBody>
+      </p:sp>
+      <p:sp>
+        <p:nvSpPr>
+          <p:cNvPr id="17" name="Text 15"/>
+          <p:cNvSpPr/>
+          <p:nvPr/>
+        </p:nvSpPr>
+        <p:spPr>
+          <a:xfrm>
+            <a:off x="8074152" y="4023360"/>
+            <a:ext cx="2825496" cy="1097280"/>
           </a:xfrm>
           <a:prstGeom prst="rect">
             <a:avLst/>
@@ -5466,7 +5605,7 @@
               <a:buNone/>
             </a:pPr>
             <a:r>
-              <a:rPr lang="en-US" sz="1250" dirty="0">
+              <a:rPr lang="en-US" sz="1550" dirty="0">
                 <a:solidFill>
                   <a:srgbClr val="17364A"/>
                 </a:solidFill>
@@ -5476,7 +5615,7 @@
               </a:rPr>
               <a:t>Connect the concept to public health decisions, safeguards, documentation, or implementation work.</a:t>
             </a:r>
-            <a:endParaRPr lang="en-US" sz="1250" dirty="0"/>
+            <a:endParaRPr lang="en-US" sz="1550" dirty="0"/>
           </a:p>
         </p:txBody>
       </p:sp>
@@ -5673,7 +5812,7 @@
                 <a:ea typeface="Aptos" pitchFamily="34" charset="-122"/>
                 <a:cs typeface="Aptos" pitchFamily="34" charset="-120"/>
               </a:rPr>
-              <a:t>© Paula Soper</a:t>
+              <a:t>Â© Paula Soper</a:t>
             </a:r>
             <a:endParaRPr lang="en-US" sz="800" dirty="0"/>
           </a:p>
@@ -5681,7 +5820,46 @@
       </p:sp>
       <p:sp>
         <p:nvSpPr>
-          <p:cNvPr id="7" name="Shape 5"/>
+          <p:cNvPr id="7" name="Text 5"/>
+          <p:cNvSpPr/>
+          <p:nvPr/>
+        </p:nvSpPr>
+        <p:spPr>
+          <a:xfrm>
+            <a:off x="11137392" y="6510528"/>
+            <a:ext cx="411480" cy="201168"/>
+          </a:xfrm>
+          <a:prstGeom prst="rect">
+            <a:avLst/>
+          </a:prstGeom>
+          <a:noFill/>
+          <a:ln/>
+        </p:spPr>
+        <p:txBody>
+          <a:bodyPr wrap="square" lIns="0" tIns="0" rIns="0" bIns="0" rtlCol="0" anchor="ctr"/>
+          <a:lstStyle/>
+          <a:p>
+            <a:pPr algn="r" indent="0" marL="0">
+              <a:buNone/>
+            </a:pPr>
+            <a:r>
+              <a:rPr lang="en-US" sz="900" dirty="0">
+                <a:solidFill>
+                  <a:srgbClr val="5F7181"/>
+                </a:solidFill>
+                <a:latin typeface="Aptos" pitchFamily="34" charset="0"/>
+                <a:ea typeface="Aptos" pitchFamily="34" charset="-122"/>
+                <a:cs typeface="Aptos" pitchFamily="34" charset="-120"/>
+              </a:rPr>
+              <a:t>14</a:t>
+            </a:r>
+            <a:endParaRPr lang="en-US" sz="900" dirty="0"/>
+          </a:p>
+        </p:txBody>
+      </p:sp>
+      <p:sp>
+        <p:nvSpPr>
+          <p:cNvPr id="8" name="Shape 6"/>
           <p:cNvSpPr/>
           <p:nvPr/>
         </p:nvSpPr>
@@ -5706,7 +5884,7 @@
       </p:sp>
       <p:sp>
         <p:nvSpPr>
-          <p:cNvPr id="8" name="Text 6"/>
+          <p:cNvPr id="9" name="Text 7"/>
           <p:cNvSpPr/>
           <p:nvPr/>
         </p:nvSpPr>
@@ -5745,14 +5923,14 @@
       </p:sp>
       <p:sp>
         <p:nvSpPr>
-          <p:cNvPr id="9" name="Text 7"/>
+          <p:cNvPr id="10" name="Text 8"/>
           <p:cNvSpPr/>
           <p:nvPr/>
         </p:nvSpPr>
         <p:spPr>
           <a:xfrm>
             <a:off x="640080" y="621792"/>
-            <a:ext cx="10881360" cy="566928"/>
+            <a:ext cx="10881360" cy="713232"/>
           </a:xfrm>
           <a:prstGeom prst="rect">
             <a:avLst/>
@@ -5770,7 +5948,7 @@
               <a:buNone/>
             </a:pPr>
             <a:r>
-              <a:rPr lang="en-US" sz="2700" b="1" dirty="0">
+              <a:rPr lang="en-US" sz="3400" b="1" dirty="0">
                 <a:solidFill>
                   <a:srgbClr val="003A63"/>
                 </a:solidFill>
@@ -5780,20 +5958,20 @@
               </a:rPr>
               <a:t>Application to AI-Supported Workflows</a:t>
             </a:r>
-            <a:endParaRPr lang="en-US" sz="2700" dirty="0"/>
-          </a:p>
-        </p:txBody>
-      </p:sp>
-      <p:sp>
-        <p:nvSpPr>
-          <p:cNvPr id="10" name="Text 8"/>
-          <p:cNvSpPr/>
-          <p:nvPr/>
-        </p:nvSpPr>
-        <p:spPr>
-          <a:xfrm>
-            <a:off x="868680" y="1417320"/>
-            <a:ext cx="6675120" cy="4434840"/>
+            <a:endParaRPr lang="en-US" sz="3400" dirty="0"/>
+          </a:p>
+        </p:txBody>
+      </p:sp>
+      <p:sp>
+        <p:nvSpPr>
+          <p:cNvPr id="11" name="Text 9"/>
+          <p:cNvSpPr/>
+          <p:nvPr/>
+        </p:nvSpPr>
+        <p:spPr>
+          <a:xfrm>
+            <a:off x="868680" y="1508760"/>
+            <a:ext cx="6537960" cy="4160520"/>
           </a:xfrm>
           <a:prstGeom prst="rect">
             <a:avLst/>
@@ -5808,7 +5986,7 @@
           <a:lstStyle/>
           <a:p>
             <a:r>
-              <a:rPr lang="en-US" sz="1700" dirty="0">
+              <a:rPr lang="en-US" sz="2100" dirty="0">
                 <a:solidFill>
                   <a:srgbClr val="17364A"/>
                 </a:solidFill>
@@ -5816,13 +5994,13 @@
                 <a:ea typeface="Aptos" pitchFamily="34" charset="-122"/>
                 <a:cs typeface="Aptos" pitchFamily="34" charset="-120"/>
               </a:rPr>
-              <a:t>Generative AI may require integration with document repositories or systems of record so outputs can be grounded in.</a:t>
-            </a:r>
-            <a:endParaRPr lang="en-US" sz="1700" dirty="0"/>
-          </a:p>
-          <a:p>
-            <a:r>
-              <a:rPr lang="en-US" sz="1700" dirty="0">
+              <a:t>Generative AI may require integration with document repositories or systems of record so outputs can be.</a:t>
+            </a:r>
+            <a:endParaRPr lang="en-US" sz="2100" dirty="0"/>
+          </a:p>
+          <a:p>
+            <a:r>
+              <a:rPr lang="en-US" sz="2100" dirty="0">
                 <a:solidFill>
                   <a:srgbClr val="17364A"/>
                 </a:solidFill>
@@ -5832,11 +6010,11 @@
               </a:rPr>
               <a:t>Predictive models may require scheduled data feeds and monitoring dashboards.</a:t>
             </a:r>
-            <a:endParaRPr lang="en-US" sz="1700" dirty="0"/>
-          </a:p>
-          <a:p>
-            <a:r>
-              <a:rPr lang="en-US" sz="1700" dirty="0">
+            <a:endParaRPr lang="en-US" sz="2100" dirty="0"/>
+          </a:p>
+          <a:p>
+            <a:r>
+              <a:rPr lang="en-US" sz="2100" dirty="0">
                 <a:solidFill>
                   <a:srgbClr val="17364A"/>
                 </a:solidFill>
@@ -5844,29 +6022,15 @@
                 <a:ea typeface="Aptos" pitchFamily="34" charset="-122"/>
                 <a:cs typeface="Aptos" pitchFamily="34" charset="-120"/>
               </a:rPr>
-              <a:t>Agentic workflows require the strongest integration controls because they may call tools, access data, create tasks, or.</a:t>
-            </a:r>
-            <a:endParaRPr lang="en-US" sz="1700" dirty="0"/>
-          </a:p>
-          <a:p>
-            <a:r>
-              <a:rPr lang="en-US" sz="1700" dirty="0">
-                <a:solidFill>
-                  <a:srgbClr val="17364A"/>
-                </a:solidFill>
-                <a:latin typeface="Aptos" pitchFamily="34" charset="0"/>
-                <a:ea typeface="Aptos" pitchFamily="34" charset="-122"/>
-                <a:cs typeface="Aptos" pitchFamily="34" charset="-120"/>
-              </a:rPr>
-              <a:t>For each AI use case, the integration pattern should match the sensitivity and operational consequence of the action.</a:t>
-            </a:r>
-            <a:endParaRPr lang="en-US" sz="1700" dirty="0"/>
-          </a:p>
-        </p:txBody>
-      </p:sp>
-      <p:sp>
-        <p:nvSpPr>
-          <p:cNvPr id="11" name="Shape 9"/>
+              <a:t>Agentic workflows require the strongest integration controls because they may call tools, access data,.</a:t>
+            </a:r>
+            <a:endParaRPr lang="en-US" sz="2100" dirty="0"/>
+          </a:p>
+        </p:txBody>
+      </p:sp>
+      <p:sp>
+        <p:nvSpPr>
+          <p:cNvPr id="12" name="Shape 10"/>
           <p:cNvSpPr/>
           <p:nvPr/>
         </p:nvSpPr>
@@ -5893,14 +6057,14 @@
       </p:sp>
       <p:sp>
         <p:nvSpPr>
-          <p:cNvPr id="12" name="Text 10"/>
+          <p:cNvPr id="13" name="Text 11"/>
           <p:cNvSpPr/>
           <p:nvPr/>
         </p:nvSpPr>
         <p:spPr>
           <a:xfrm>
             <a:off x="8074152" y="1563624"/>
-            <a:ext cx="2825496" cy="201168"/>
+            <a:ext cx="2825496" cy="256032"/>
           </a:xfrm>
           <a:prstGeom prst="rect">
             <a:avLst/>
@@ -5916,7 +6080,7 @@
               <a:buNone/>
             </a:pPr>
             <a:r>
-              <a:rPr lang="en-US" sz="950" b="1" dirty="0">
+              <a:rPr lang="en-US" sz="1300" b="1" dirty="0">
                 <a:solidFill>
                   <a:srgbClr val="0068B7"/>
                 </a:solidFill>
@@ -5926,20 +6090,20 @@
               </a:rPr>
               <a:t>Key idea</a:t>
             </a:r>
-            <a:endParaRPr lang="en-US" sz="950" dirty="0"/>
-          </a:p>
-        </p:txBody>
-      </p:sp>
-      <p:sp>
-        <p:nvSpPr>
-          <p:cNvPr id="13" name="Text 11"/>
-          <p:cNvSpPr/>
-          <p:nvPr/>
-        </p:nvSpPr>
-        <p:spPr>
-          <a:xfrm>
-            <a:off x="8074152" y="1856232"/>
-            <a:ext cx="2825496" cy="1261872"/>
+            <a:endParaRPr lang="en-US" sz="1300" dirty="0"/>
+          </a:p>
+        </p:txBody>
+      </p:sp>
+      <p:sp>
+        <p:nvSpPr>
+          <p:cNvPr id="14" name="Text 12"/>
+          <p:cNvSpPr/>
+          <p:nvPr/>
+        </p:nvSpPr>
+        <p:spPr>
+          <a:xfrm>
+            <a:off x="8074152" y="1920240"/>
+            <a:ext cx="2825496" cy="1188720"/>
           </a:xfrm>
           <a:prstGeom prst="rect">
             <a:avLst/>
@@ -5957,7 +6121,7 @@
               <a:buNone/>
             </a:pPr>
             <a:r>
-              <a:rPr lang="en-US" sz="1250" dirty="0">
+              <a:rPr lang="en-US" sz="1550" dirty="0">
                 <a:solidFill>
                   <a:srgbClr val="17364A"/>
                 </a:solidFill>
@@ -5965,15 +6129,15 @@
                 <a:ea typeface="Aptos" pitchFamily="34" charset="-122"/>
                 <a:cs typeface="Aptos" pitchFamily="34" charset="-120"/>
               </a:rPr>
-              <a:t>Generative AI may require integration with document repositories or systems of record so outputs can be grounded in.</a:t>
-            </a:r>
-            <a:endParaRPr lang="en-US" sz="1250" dirty="0"/>
-          </a:p>
-        </p:txBody>
-      </p:sp>
-      <p:sp>
-        <p:nvSpPr>
-          <p:cNvPr id="14" name="Shape 12"/>
+              <a:t>Generative AI may require integration with document repositories or systems of record so outputs can be.</a:t>
+            </a:r>
+            <a:endParaRPr lang="en-US" sz="1550" dirty="0"/>
+          </a:p>
+        </p:txBody>
+      </p:sp>
+      <p:sp>
+        <p:nvSpPr>
+          <p:cNvPr id="15" name="Shape 13"/>
           <p:cNvSpPr/>
           <p:nvPr/>
         </p:nvSpPr>
@@ -6000,14 +6164,14 @@
       </p:sp>
       <p:sp>
         <p:nvSpPr>
-          <p:cNvPr id="15" name="Text 13"/>
+          <p:cNvPr id="16" name="Text 14"/>
           <p:cNvSpPr/>
           <p:nvPr/>
         </p:nvSpPr>
         <p:spPr>
           <a:xfrm>
             <a:off x="8074152" y="3666744"/>
-            <a:ext cx="2825496" cy="201168"/>
+            <a:ext cx="2825496" cy="256032"/>
           </a:xfrm>
           <a:prstGeom prst="rect">
             <a:avLst/>
@@ -6023,7 +6187,7 @@
               <a:buNone/>
             </a:pPr>
             <a:r>
-              <a:rPr lang="en-US" sz="950" b="1" dirty="0">
+              <a:rPr lang="en-US" sz="1300" b="1" dirty="0">
                 <a:solidFill>
                   <a:srgbClr val="0068B7"/>
                 </a:solidFill>
@@ -6033,20 +6197,20 @@
               </a:rPr>
               <a:t>Use this for</a:t>
             </a:r>
-            <a:endParaRPr lang="en-US" sz="950" dirty="0"/>
-          </a:p>
-        </p:txBody>
-      </p:sp>
-      <p:sp>
-        <p:nvSpPr>
-          <p:cNvPr id="16" name="Text 14"/>
-          <p:cNvSpPr/>
-          <p:nvPr/>
-        </p:nvSpPr>
-        <p:spPr>
-          <a:xfrm>
-            <a:off x="8074152" y="3959352"/>
-            <a:ext cx="2825496" cy="1170432"/>
+            <a:endParaRPr lang="en-US" sz="1300" dirty="0"/>
+          </a:p>
+        </p:txBody>
+      </p:sp>
+      <p:sp>
+        <p:nvSpPr>
+          <p:cNvPr id="17" name="Text 15"/>
+          <p:cNvSpPr/>
+          <p:nvPr/>
+        </p:nvSpPr>
+        <p:spPr>
+          <a:xfrm>
+            <a:off x="8074152" y="4023360"/>
+            <a:ext cx="2825496" cy="1097280"/>
           </a:xfrm>
           <a:prstGeom prst="rect">
             <a:avLst/>
@@ -6064,7 +6228,7 @@
               <a:buNone/>
             </a:pPr>
             <a:r>
-              <a:rPr lang="en-US" sz="1250" dirty="0">
+              <a:rPr lang="en-US" sz="1550" dirty="0">
                 <a:solidFill>
                   <a:srgbClr val="17364A"/>
                 </a:solidFill>
@@ -6074,7 +6238,7 @@
               </a:rPr>
               <a:t>Connect the concept to public health decisions, safeguards, documentation, or implementation work.</a:t>
             </a:r>
-            <a:endParaRPr lang="en-US" sz="1250" dirty="0"/>
+            <a:endParaRPr lang="en-US" sz="1550" dirty="0"/>
           </a:p>
         </p:txBody>
       </p:sp>
@@ -6271,7 +6435,7 @@
                 <a:ea typeface="Aptos" pitchFamily="34" charset="-122"/>
                 <a:cs typeface="Aptos" pitchFamily="34" charset="-120"/>
               </a:rPr>
-              <a:t>© Paula Soper</a:t>
+              <a:t>Â© Paula Soper</a:t>
             </a:r>
             <a:endParaRPr lang="en-US" sz="800" dirty="0"/>
           </a:p>
@@ -6279,7 +6443,46 @@
       </p:sp>
       <p:sp>
         <p:nvSpPr>
-          <p:cNvPr id="7" name="Shape 5"/>
+          <p:cNvPr id="7" name="Text 5"/>
+          <p:cNvSpPr/>
+          <p:nvPr/>
+        </p:nvSpPr>
+        <p:spPr>
+          <a:xfrm>
+            <a:off x="11137392" y="6510528"/>
+            <a:ext cx="411480" cy="201168"/>
+          </a:xfrm>
+          <a:prstGeom prst="rect">
+            <a:avLst/>
+          </a:prstGeom>
+          <a:noFill/>
+          <a:ln/>
+        </p:spPr>
+        <p:txBody>
+          <a:bodyPr wrap="square" lIns="0" tIns="0" rIns="0" bIns="0" rtlCol="0" anchor="ctr"/>
+          <a:lstStyle/>
+          <a:p>
+            <a:pPr algn="r" indent="0" marL="0">
+              <a:buNone/>
+            </a:pPr>
+            <a:r>
+              <a:rPr lang="en-US" sz="900" dirty="0">
+                <a:solidFill>
+                  <a:srgbClr val="5F7181"/>
+                </a:solidFill>
+                <a:latin typeface="Aptos" pitchFamily="34" charset="0"/>
+                <a:ea typeface="Aptos" pitchFamily="34" charset="-122"/>
+                <a:cs typeface="Aptos" pitchFamily="34" charset="-120"/>
+              </a:rPr>
+              <a:t>15</a:t>
+            </a:r>
+            <a:endParaRPr lang="en-US" sz="900" dirty="0"/>
+          </a:p>
+        </p:txBody>
+      </p:sp>
+      <p:sp>
+        <p:nvSpPr>
+          <p:cNvPr id="8" name="Shape 6"/>
           <p:cNvSpPr/>
           <p:nvPr/>
         </p:nvSpPr>
@@ -6304,7 +6507,7 @@
       </p:sp>
       <p:sp>
         <p:nvSpPr>
-          <p:cNvPr id="8" name="Text 6"/>
+          <p:cNvPr id="9" name="Text 7"/>
           <p:cNvSpPr/>
           <p:nvPr/>
         </p:nvSpPr>
@@ -6343,14 +6546,14 @@
       </p:sp>
       <p:sp>
         <p:nvSpPr>
-          <p:cNvPr id="9" name="Text 7"/>
+          <p:cNvPr id="10" name="Text 8"/>
           <p:cNvSpPr/>
           <p:nvPr/>
         </p:nvSpPr>
         <p:spPr>
           <a:xfrm>
             <a:off x="640080" y="621792"/>
-            <a:ext cx="10881360" cy="566928"/>
+            <a:ext cx="10881360" cy="713232"/>
           </a:xfrm>
           <a:prstGeom prst="rect">
             <a:avLst/>
@@ -6368,7 +6571,7 @@
               <a:buNone/>
             </a:pPr>
             <a:r>
-              <a:rPr lang="en-US" sz="2700" b="1" dirty="0">
+              <a:rPr lang="en-US" sz="3400" b="1" dirty="0">
                 <a:solidFill>
                   <a:srgbClr val="003A63"/>
                 </a:solidFill>
@@ -6378,20 +6581,20 @@
               </a:rPr>
               <a:t>Reflection Questions</a:t>
             </a:r>
-            <a:endParaRPr lang="en-US" sz="2700" dirty="0"/>
-          </a:p>
-        </p:txBody>
-      </p:sp>
-      <p:sp>
-        <p:nvSpPr>
-          <p:cNvPr id="10" name="Text 8"/>
-          <p:cNvSpPr/>
-          <p:nvPr/>
-        </p:nvSpPr>
-        <p:spPr>
-          <a:xfrm>
-            <a:off x="868680" y="1417320"/>
-            <a:ext cx="6675120" cy="4434840"/>
+            <a:endParaRPr lang="en-US" sz="3400" dirty="0"/>
+          </a:p>
+        </p:txBody>
+      </p:sp>
+      <p:sp>
+        <p:nvSpPr>
+          <p:cNvPr id="11" name="Text 9"/>
+          <p:cNvSpPr/>
+          <p:nvPr/>
+        </p:nvSpPr>
+        <p:spPr>
+          <a:xfrm>
+            <a:off x="868680" y="1508760"/>
+            <a:ext cx="6537960" cy="4160520"/>
           </a:xfrm>
           <a:prstGeom prst="rect">
             <a:avLst/>
@@ -6406,7 +6609,7 @@
           <a:lstStyle/>
           <a:p>
             <a:r>
-              <a:rPr lang="en-US" sz="1700" dirty="0">
+              <a:rPr lang="en-US" sz="2100" dirty="0">
                 <a:solidFill>
                   <a:srgbClr val="17364A"/>
                 </a:solidFill>
@@ -6416,11 +6619,11 @@
               </a:rPr>
               <a:t>Which workflows currently depend on manual transfer between systems?</a:t>
             </a:r>
-            <a:endParaRPr lang="en-US" sz="1700" dirty="0"/>
-          </a:p>
-          <a:p>
-            <a:r>
-              <a:rPr lang="en-US" sz="1700" dirty="0">
+            <a:endParaRPr lang="en-US" sz="2100" dirty="0"/>
+          </a:p>
+          <a:p>
+            <a:r>
+              <a:rPr lang="en-US" sz="2100" dirty="0">
                 <a:solidFill>
                   <a:srgbClr val="17364A"/>
                 </a:solidFill>
@@ -6430,11 +6633,11 @@
               </a:rPr>
               <a:t>Which systems are the official systems of record?</a:t>
             </a:r>
-            <a:endParaRPr lang="en-US" sz="1700" dirty="0"/>
-          </a:p>
-          <a:p>
-            <a:r>
-              <a:rPr lang="en-US" sz="1700" dirty="0">
+            <a:endParaRPr lang="en-US" sz="2100" dirty="0"/>
+          </a:p>
+          <a:p>
+            <a:r>
+              <a:rPr lang="en-US" sz="2100" dirty="0">
                 <a:solidFill>
                   <a:srgbClr val="17364A"/>
                 </a:solidFill>
@@ -6444,13 +6647,13 @@
               </a:rPr>
               <a:t>Where would API access reduce burden without increasing risk?</a:t>
             </a:r>
-            <a:endParaRPr lang="en-US" sz="1700" dirty="0"/>
-          </a:p>
-        </p:txBody>
-      </p:sp>
-      <p:sp>
-        <p:nvSpPr>
-          <p:cNvPr id="11" name="Shape 9"/>
+            <a:endParaRPr lang="en-US" sz="2100" dirty="0"/>
+          </a:p>
+        </p:txBody>
+      </p:sp>
+      <p:sp>
+        <p:nvSpPr>
+          <p:cNvPr id="12" name="Shape 10"/>
           <p:cNvSpPr/>
           <p:nvPr/>
         </p:nvSpPr>
@@ -6477,14 +6680,14 @@
       </p:sp>
       <p:sp>
         <p:nvSpPr>
-          <p:cNvPr id="12" name="Text 10"/>
+          <p:cNvPr id="13" name="Text 11"/>
           <p:cNvSpPr/>
           <p:nvPr/>
         </p:nvSpPr>
         <p:spPr>
           <a:xfrm>
             <a:off x="8074152" y="1563624"/>
-            <a:ext cx="2825496" cy="201168"/>
+            <a:ext cx="2825496" cy="256032"/>
           </a:xfrm>
           <a:prstGeom prst="rect">
             <a:avLst/>
@@ -6500,7 +6703,7 @@
               <a:buNone/>
             </a:pPr>
             <a:r>
-              <a:rPr lang="en-US" sz="950" b="1" dirty="0">
+              <a:rPr lang="en-US" sz="1300" b="1" dirty="0">
                 <a:solidFill>
                   <a:srgbClr val="0068B7"/>
                 </a:solidFill>
@@ -6510,20 +6713,20 @@
               </a:rPr>
               <a:t>Key idea</a:t>
             </a:r>
-            <a:endParaRPr lang="en-US" sz="950" dirty="0"/>
-          </a:p>
-        </p:txBody>
-      </p:sp>
-      <p:sp>
-        <p:nvSpPr>
-          <p:cNvPr id="13" name="Text 11"/>
-          <p:cNvSpPr/>
-          <p:nvPr/>
-        </p:nvSpPr>
-        <p:spPr>
-          <a:xfrm>
-            <a:off x="8074152" y="1856232"/>
-            <a:ext cx="2825496" cy="1261872"/>
+            <a:endParaRPr lang="en-US" sz="1300" dirty="0"/>
+          </a:p>
+        </p:txBody>
+      </p:sp>
+      <p:sp>
+        <p:nvSpPr>
+          <p:cNvPr id="14" name="Text 12"/>
+          <p:cNvSpPr/>
+          <p:nvPr/>
+        </p:nvSpPr>
+        <p:spPr>
+          <a:xfrm>
+            <a:off x="8074152" y="1920240"/>
+            <a:ext cx="2825496" cy="1188720"/>
           </a:xfrm>
           <a:prstGeom prst="rect">
             <a:avLst/>
@@ -6541,7 +6744,7 @@
               <a:buNone/>
             </a:pPr>
             <a:r>
-              <a:rPr lang="en-US" sz="1250" dirty="0">
+              <a:rPr lang="en-US" sz="1550" dirty="0">
                 <a:solidFill>
                   <a:srgbClr val="17364A"/>
                 </a:solidFill>
@@ -6551,13 +6754,13 @@
               </a:rPr>
               <a:t>Which workflows currently depend on manual transfer between systems?</a:t>
             </a:r>
-            <a:endParaRPr lang="en-US" sz="1250" dirty="0"/>
-          </a:p>
-        </p:txBody>
-      </p:sp>
-      <p:sp>
-        <p:nvSpPr>
-          <p:cNvPr id="14" name="Shape 12"/>
+            <a:endParaRPr lang="en-US" sz="1550" dirty="0"/>
+          </a:p>
+        </p:txBody>
+      </p:sp>
+      <p:sp>
+        <p:nvSpPr>
+          <p:cNvPr id="15" name="Shape 13"/>
           <p:cNvSpPr/>
           <p:nvPr/>
         </p:nvSpPr>
@@ -6584,14 +6787,14 @@
       </p:sp>
       <p:sp>
         <p:nvSpPr>
-          <p:cNvPr id="15" name="Text 13"/>
+          <p:cNvPr id="16" name="Text 14"/>
           <p:cNvSpPr/>
           <p:nvPr/>
         </p:nvSpPr>
         <p:spPr>
           <a:xfrm>
             <a:off x="8074152" y="3666744"/>
-            <a:ext cx="2825496" cy="201168"/>
+            <a:ext cx="2825496" cy="256032"/>
           </a:xfrm>
           <a:prstGeom prst="rect">
             <a:avLst/>
@@ -6607,7 +6810,7 @@
               <a:buNone/>
             </a:pPr>
             <a:r>
-              <a:rPr lang="en-US" sz="950" b="1" dirty="0">
+              <a:rPr lang="en-US" sz="1300" b="1" dirty="0">
                 <a:solidFill>
                   <a:srgbClr val="0068B7"/>
                 </a:solidFill>
@@ -6617,20 +6820,20 @@
               </a:rPr>
               <a:t>Use this for</a:t>
             </a:r>
-            <a:endParaRPr lang="en-US" sz="950" dirty="0"/>
-          </a:p>
-        </p:txBody>
-      </p:sp>
-      <p:sp>
-        <p:nvSpPr>
-          <p:cNvPr id="16" name="Text 14"/>
-          <p:cNvSpPr/>
-          <p:nvPr/>
-        </p:nvSpPr>
-        <p:spPr>
-          <a:xfrm>
-            <a:off x="8074152" y="3959352"/>
-            <a:ext cx="2825496" cy="1170432"/>
+            <a:endParaRPr lang="en-US" sz="1300" dirty="0"/>
+          </a:p>
+        </p:txBody>
+      </p:sp>
+      <p:sp>
+        <p:nvSpPr>
+          <p:cNvPr id="17" name="Text 15"/>
+          <p:cNvSpPr/>
+          <p:nvPr/>
+        </p:nvSpPr>
+        <p:spPr>
+          <a:xfrm>
+            <a:off x="8074152" y="4023360"/>
+            <a:ext cx="2825496" cy="1097280"/>
           </a:xfrm>
           <a:prstGeom prst="rect">
             <a:avLst/>
@@ -6648,7 +6851,7 @@
               <a:buNone/>
             </a:pPr>
             <a:r>
-              <a:rPr lang="en-US" sz="1250" dirty="0">
+              <a:rPr lang="en-US" sz="1550" dirty="0">
                 <a:solidFill>
                   <a:srgbClr val="17364A"/>
                 </a:solidFill>
@@ -6658,7 +6861,7 @@
               </a:rPr>
               <a:t>Connect the concept to public health decisions, safeguards, documentation, or implementation work.</a:t>
             </a:r>
-            <a:endParaRPr lang="en-US" sz="1250" dirty="0"/>
+            <a:endParaRPr lang="en-US" sz="1550" dirty="0"/>
           </a:p>
         </p:txBody>
       </p:sp>
@@ -6855,7 +7058,7 @@
                 <a:ea typeface="Aptos" pitchFamily="34" charset="-122"/>
                 <a:cs typeface="Aptos" pitchFamily="34" charset="-120"/>
               </a:rPr>
-              <a:t>© Paula Soper</a:t>
+              <a:t>Â© Paula Soper</a:t>
             </a:r>
             <a:endParaRPr lang="en-US" sz="800" dirty="0"/>
           </a:p>
@@ -6869,8 +7072,47 @@
         </p:nvSpPr>
         <p:spPr>
           <a:xfrm>
+            <a:off x="11137392" y="6510528"/>
+            <a:ext cx="411480" cy="201168"/>
+          </a:xfrm>
+          <a:prstGeom prst="rect">
+            <a:avLst/>
+          </a:prstGeom>
+          <a:noFill/>
+          <a:ln/>
+        </p:spPr>
+        <p:txBody>
+          <a:bodyPr wrap="square" lIns="0" tIns="0" rIns="0" bIns="0" rtlCol="0" anchor="ctr"/>
+          <a:lstStyle/>
+          <a:p>
+            <a:pPr algn="r" indent="0" marL="0">
+              <a:buNone/>
+            </a:pPr>
+            <a:r>
+              <a:rPr lang="en-US" sz="900" dirty="0">
+                <a:solidFill>
+                  <a:srgbClr val="5F7181"/>
+                </a:solidFill>
+                <a:latin typeface="Aptos" pitchFamily="34" charset="0"/>
+                <a:ea typeface="Aptos" pitchFamily="34" charset="-122"/>
+                <a:cs typeface="Aptos" pitchFamily="34" charset="-120"/>
+              </a:rPr>
+              <a:t>16</a:t>
+            </a:r>
+            <a:endParaRPr lang="en-US" sz="900" dirty="0"/>
+          </a:p>
+        </p:txBody>
+      </p:sp>
+      <p:sp>
+        <p:nvSpPr>
+          <p:cNvPr id="8" name="Text 6"/>
+          <p:cNvSpPr/>
+          <p:nvPr/>
+        </p:nvSpPr>
+        <p:spPr>
+          <a:xfrm>
             <a:off x="640080" y="658368"/>
-            <a:ext cx="10881360" cy="566928"/>
+            <a:ext cx="10881360" cy="713232"/>
           </a:xfrm>
           <a:prstGeom prst="rect">
             <a:avLst/>
@@ -6888,7 +7130,7 @@
               <a:buNone/>
             </a:pPr>
             <a:r>
-              <a:rPr lang="en-US" sz="2700" b="1" dirty="0">
+              <a:rPr lang="en-US" sz="3400" b="1" dirty="0">
                 <a:solidFill>
                   <a:srgbClr val="003A63"/>
                 </a:solidFill>
@@ -6898,20 +7140,20 @@
               </a:rPr>
               <a:t>Reflection Questions Continued</a:t>
             </a:r>
-            <a:endParaRPr lang="en-US" sz="2700" dirty="0"/>
-          </a:p>
-        </p:txBody>
-      </p:sp>
-      <p:sp>
-        <p:nvSpPr>
-          <p:cNvPr id="8" name="Text 6"/>
-          <p:cNvSpPr/>
-          <p:nvPr/>
-        </p:nvSpPr>
-        <p:spPr>
-          <a:xfrm>
-            <a:off x="868680" y="1417320"/>
-            <a:ext cx="6675120" cy="4434840"/>
+            <a:endParaRPr lang="en-US" sz="3400" dirty="0"/>
+          </a:p>
+        </p:txBody>
+      </p:sp>
+      <p:sp>
+        <p:nvSpPr>
+          <p:cNvPr id="9" name="Text 7"/>
+          <p:cNvSpPr/>
+          <p:nvPr/>
+        </p:nvSpPr>
+        <p:spPr>
+          <a:xfrm>
+            <a:off x="868680" y="1508760"/>
+            <a:ext cx="6537960" cy="4160520"/>
           </a:xfrm>
           <a:prstGeom prst="rect">
             <a:avLst/>
@@ -6926,7 +7168,7 @@
           <a:lstStyle/>
           <a:p>
             <a:r>
-              <a:rPr lang="en-US" sz="1700" dirty="0">
+              <a:rPr lang="en-US" sz="2100" dirty="0">
                 <a:solidFill>
                   <a:srgbClr val="17364A"/>
                 </a:solidFill>
@@ -6936,11 +7178,11 @@
               </a:rPr>
               <a:t>Which actions should remain read-only?</a:t>
             </a:r>
-            <a:endParaRPr lang="en-US" sz="1700" dirty="0"/>
-          </a:p>
-          <a:p>
-            <a:r>
-              <a:rPr lang="en-US" sz="1700" dirty="0">
+            <a:endParaRPr lang="en-US" sz="2100" dirty="0"/>
+          </a:p>
+          <a:p>
+            <a:r>
+              <a:rPr lang="en-US" sz="2100" dirty="0">
                 <a:solidFill>
                   <a:srgbClr val="17364A"/>
                 </a:solidFill>
@@ -6950,13 +7192,13 @@
               </a:rPr>
               <a:t>What logs would be needed to reconstruct an AI-supported action?</a:t>
             </a:r>
-            <a:endParaRPr lang="en-US" sz="1700" dirty="0"/>
-          </a:p>
-        </p:txBody>
-      </p:sp>
-      <p:sp>
-        <p:nvSpPr>
-          <p:cNvPr id="9" name="Shape 7"/>
+            <a:endParaRPr lang="en-US" sz="2100" dirty="0"/>
+          </a:p>
+        </p:txBody>
+      </p:sp>
+      <p:sp>
+        <p:nvSpPr>
+          <p:cNvPr id="10" name="Shape 8"/>
           <p:cNvSpPr/>
           <p:nvPr/>
         </p:nvSpPr>
@@ -6983,14 +7225,14 @@
       </p:sp>
       <p:sp>
         <p:nvSpPr>
-          <p:cNvPr id="10" name="Text 8"/>
+          <p:cNvPr id="11" name="Text 9"/>
           <p:cNvSpPr/>
           <p:nvPr/>
         </p:nvSpPr>
         <p:spPr>
           <a:xfrm>
             <a:off x="8074152" y="1563624"/>
-            <a:ext cx="2825496" cy="201168"/>
+            <a:ext cx="2825496" cy="256032"/>
           </a:xfrm>
           <a:prstGeom prst="rect">
             <a:avLst/>
@@ -7006,7 +7248,7 @@
               <a:buNone/>
             </a:pPr>
             <a:r>
-              <a:rPr lang="en-US" sz="950" b="1" dirty="0">
+              <a:rPr lang="en-US" sz="1300" b="1" dirty="0">
                 <a:solidFill>
                   <a:srgbClr val="0068B7"/>
                 </a:solidFill>
@@ -7016,20 +7258,20 @@
               </a:rPr>
               <a:t>Key idea</a:t>
             </a:r>
-            <a:endParaRPr lang="en-US" sz="950" dirty="0"/>
-          </a:p>
-        </p:txBody>
-      </p:sp>
-      <p:sp>
-        <p:nvSpPr>
-          <p:cNvPr id="11" name="Text 9"/>
-          <p:cNvSpPr/>
-          <p:nvPr/>
-        </p:nvSpPr>
-        <p:spPr>
-          <a:xfrm>
-            <a:off x="8074152" y="1856232"/>
-            <a:ext cx="2825496" cy="1261872"/>
+            <a:endParaRPr lang="en-US" sz="1300" dirty="0"/>
+          </a:p>
+        </p:txBody>
+      </p:sp>
+      <p:sp>
+        <p:nvSpPr>
+          <p:cNvPr id="12" name="Text 10"/>
+          <p:cNvSpPr/>
+          <p:nvPr/>
+        </p:nvSpPr>
+        <p:spPr>
+          <a:xfrm>
+            <a:off x="8074152" y="1920240"/>
+            <a:ext cx="2825496" cy="1188720"/>
           </a:xfrm>
           <a:prstGeom prst="rect">
             <a:avLst/>
@@ -7047,7 +7289,7 @@
               <a:buNone/>
             </a:pPr>
             <a:r>
-              <a:rPr lang="en-US" sz="1250" dirty="0">
+              <a:rPr lang="en-US" sz="1550" dirty="0">
                 <a:solidFill>
                   <a:srgbClr val="17364A"/>
                 </a:solidFill>
@@ -7057,13 +7299,13 @@
               </a:rPr>
               <a:t>Which actions should remain read-only?</a:t>
             </a:r>
-            <a:endParaRPr lang="en-US" sz="1250" dirty="0"/>
-          </a:p>
-        </p:txBody>
-      </p:sp>
-      <p:sp>
-        <p:nvSpPr>
-          <p:cNvPr id="12" name="Shape 10"/>
+            <a:endParaRPr lang="en-US" sz="1550" dirty="0"/>
+          </a:p>
+        </p:txBody>
+      </p:sp>
+      <p:sp>
+        <p:nvSpPr>
+          <p:cNvPr id="13" name="Shape 11"/>
           <p:cNvSpPr/>
           <p:nvPr/>
         </p:nvSpPr>
@@ -7090,14 +7332,14 @@
       </p:sp>
       <p:sp>
         <p:nvSpPr>
-          <p:cNvPr id="13" name="Text 11"/>
+          <p:cNvPr id="14" name="Text 12"/>
           <p:cNvSpPr/>
           <p:nvPr/>
         </p:nvSpPr>
         <p:spPr>
           <a:xfrm>
             <a:off x="8074152" y="3666744"/>
-            <a:ext cx="2825496" cy="201168"/>
+            <a:ext cx="2825496" cy="256032"/>
           </a:xfrm>
           <a:prstGeom prst="rect">
             <a:avLst/>
@@ -7113,7 +7355,7 @@
               <a:buNone/>
             </a:pPr>
             <a:r>
-              <a:rPr lang="en-US" sz="950" b="1" dirty="0">
+              <a:rPr lang="en-US" sz="1300" b="1" dirty="0">
                 <a:solidFill>
                   <a:srgbClr val="0068B7"/>
                 </a:solidFill>
@@ -7123,20 +7365,20 @@
               </a:rPr>
               <a:t>Use this for</a:t>
             </a:r>
-            <a:endParaRPr lang="en-US" sz="950" dirty="0"/>
-          </a:p>
-        </p:txBody>
-      </p:sp>
-      <p:sp>
-        <p:nvSpPr>
-          <p:cNvPr id="14" name="Text 12"/>
-          <p:cNvSpPr/>
-          <p:nvPr/>
-        </p:nvSpPr>
-        <p:spPr>
-          <a:xfrm>
-            <a:off x="8074152" y="3959352"/>
-            <a:ext cx="2825496" cy="1170432"/>
+            <a:endParaRPr lang="en-US" sz="1300" dirty="0"/>
+          </a:p>
+        </p:txBody>
+      </p:sp>
+      <p:sp>
+        <p:nvSpPr>
+          <p:cNvPr id="15" name="Text 13"/>
+          <p:cNvSpPr/>
+          <p:nvPr/>
+        </p:nvSpPr>
+        <p:spPr>
+          <a:xfrm>
+            <a:off x="8074152" y="4023360"/>
+            <a:ext cx="2825496" cy="1097280"/>
           </a:xfrm>
           <a:prstGeom prst="rect">
             <a:avLst/>
@@ -7154,7 +7396,7 @@
               <a:buNone/>
             </a:pPr>
             <a:r>
-              <a:rPr lang="en-US" sz="1250" dirty="0">
+              <a:rPr lang="en-US" sz="1550" dirty="0">
                 <a:solidFill>
                   <a:srgbClr val="17364A"/>
                 </a:solidFill>
@@ -7164,7 +7406,7 @@
               </a:rPr>
               <a:t>Connect the concept to public health decisions, safeguards, documentation, or implementation work.</a:t>
             </a:r>
-            <a:endParaRPr lang="en-US" sz="1250" dirty="0"/>
+            <a:endParaRPr lang="en-US" sz="1550" dirty="0"/>
           </a:p>
         </p:txBody>
       </p:sp>
@@ -7361,7 +7603,7 @@
                 <a:ea typeface="Aptos" pitchFamily="34" charset="-122"/>
                 <a:cs typeface="Aptos" pitchFamily="34" charset="-120"/>
               </a:rPr>
-              <a:t>© Paula Soper</a:t>
+              <a:t>Â© Paula Soper</a:t>
             </a:r>
             <a:endParaRPr lang="en-US" sz="800" dirty="0"/>
           </a:p>
@@ -7369,7 +7611,46 @@
       </p:sp>
       <p:sp>
         <p:nvSpPr>
-          <p:cNvPr id="7" name="Shape 5"/>
+          <p:cNvPr id="7" name="Text 5"/>
+          <p:cNvSpPr/>
+          <p:nvPr/>
+        </p:nvSpPr>
+        <p:spPr>
+          <a:xfrm>
+            <a:off x="11137392" y="6510528"/>
+            <a:ext cx="411480" cy="201168"/>
+          </a:xfrm>
+          <a:prstGeom prst="rect">
+            <a:avLst/>
+          </a:prstGeom>
+          <a:noFill/>
+          <a:ln/>
+        </p:spPr>
+        <p:txBody>
+          <a:bodyPr wrap="square" lIns="0" tIns="0" rIns="0" bIns="0" rtlCol="0" anchor="ctr"/>
+          <a:lstStyle/>
+          <a:p>
+            <a:pPr algn="r" indent="0" marL="0">
+              <a:buNone/>
+            </a:pPr>
+            <a:r>
+              <a:rPr lang="en-US" sz="900" dirty="0">
+                <a:solidFill>
+                  <a:srgbClr val="5F7181"/>
+                </a:solidFill>
+                <a:latin typeface="Aptos" pitchFamily="34" charset="0"/>
+                <a:ea typeface="Aptos" pitchFamily="34" charset="-122"/>
+                <a:cs typeface="Aptos" pitchFamily="34" charset="-120"/>
+              </a:rPr>
+              <a:t>17</a:t>
+            </a:r>
+            <a:endParaRPr lang="en-US" sz="900" dirty="0"/>
+          </a:p>
+        </p:txBody>
+      </p:sp>
+      <p:sp>
+        <p:nvSpPr>
+          <p:cNvPr id="8" name="Shape 6"/>
           <p:cNvSpPr/>
           <p:nvPr/>
         </p:nvSpPr>
@@ -7394,7 +7675,7 @@
       </p:sp>
       <p:sp>
         <p:nvSpPr>
-          <p:cNvPr id="8" name="Text 6"/>
+          <p:cNvPr id="9" name="Text 7"/>
           <p:cNvSpPr/>
           <p:nvPr/>
         </p:nvSpPr>
@@ -7433,14 +7714,14 @@
       </p:sp>
       <p:sp>
         <p:nvSpPr>
-          <p:cNvPr id="9" name="Text 7"/>
+          <p:cNvPr id="10" name="Text 8"/>
           <p:cNvSpPr/>
           <p:nvPr/>
         </p:nvSpPr>
         <p:spPr>
           <a:xfrm>
             <a:off x="640080" y="621792"/>
-            <a:ext cx="10881360" cy="566928"/>
+            <a:ext cx="10881360" cy="713232"/>
           </a:xfrm>
           <a:prstGeom prst="rect">
             <a:avLst/>
@@ -7458,7 +7739,7 @@
               <a:buNone/>
             </a:pPr>
             <a:r>
-              <a:rPr lang="en-US" sz="2700" b="1" dirty="0">
+              <a:rPr lang="en-US" sz="3400" b="1" dirty="0">
                 <a:solidFill>
                   <a:srgbClr val="003A63"/>
                 </a:solidFill>
@@ -7468,20 +7749,20 @@
               </a:rPr>
               <a:t>Practical Exercise</a:t>
             </a:r>
-            <a:endParaRPr lang="en-US" sz="2700" dirty="0"/>
-          </a:p>
-        </p:txBody>
-      </p:sp>
-      <p:sp>
-        <p:nvSpPr>
-          <p:cNvPr id="10" name="Text 8"/>
-          <p:cNvSpPr/>
-          <p:nvPr/>
-        </p:nvSpPr>
-        <p:spPr>
-          <a:xfrm>
-            <a:off x="868680" y="1417320"/>
-            <a:ext cx="6675120" cy="4434840"/>
+            <a:endParaRPr lang="en-US" sz="3400" dirty="0"/>
+          </a:p>
+        </p:txBody>
+      </p:sp>
+      <p:sp>
+        <p:nvSpPr>
+          <p:cNvPr id="11" name="Text 9"/>
+          <p:cNvSpPr/>
+          <p:nvPr/>
+        </p:nvSpPr>
+        <p:spPr>
+          <a:xfrm>
+            <a:off x="868680" y="1508760"/>
+            <a:ext cx="6537960" cy="4160520"/>
           </a:xfrm>
           <a:prstGeom prst="rect">
             <a:avLst/>
@@ -7496,7 +7777,7 @@
           <a:lstStyle/>
           <a:p>
             <a:r>
-              <a:rPr lang="en-US" sz="1700" dirty="0">
+              <a:rPr lang="en-US" sz="2100" dirty="0">
                 <a:solidFill>
                   <a:srgbClr val="17364A"/>
                 </a:solidFill>
@@ -7506,11 +7787,11 @@
               </a:rPr>
               <a:t>Create an integration pattern worksheet for one AI-supported workflow.</a:t>
             </a:r>
-            <a:endParaRPr lang="en-US" sz="1700" dirty="0"/>
-          </a:p>
-          <a:p>
-            <a:r>
-              <a:rPr lang="en-US" sz="1700" dirty="0">
+            <a:endParaRPr lang="en-US" sz="2100" dirty="0"/>
+          </a:p>
+          <a:p>
+            <a:r>
+              <a:rPr lang="en-US" sz="2100" dirty="0">
                 <a:solidFill>
                   <a:srgbClr val="17364A"/>
                 </a:solidFill>
@@ -7518,15 +7799,15 @@
                 <a:ea typeface="Aptos" pitchFamily="34" charset="-122"/>
                 <a:cs typeface="Aptos" pitchFamily="34" charset="-120"/>
               </a:rPr>
-              <a:t>Identify the systems involved, the data exchanged, the integration method, whether the AI tool is read-only or write-back,.</a:t>
-            </a:r>
-            <a:endParaRPr lang="en-US" sz="1700" dirty="0"/>
-          </a:p>
-        </p:txBody>
-      </p:sp>
-      <p:sp>
-        <p:nvSpPr>
-          <p:cNvPr id="11" name="Shape 9"/>
+              <a:t>Identify the systems involved, the data exchanged, the integration method, whether the AI tool is.</a:t>
+            </a:r>
+            <a:endParaRPr lang="en-US" sz="2100" dirty="0"/>
+          </a:p>
+        </p:txBody>
+      </p:sp>
+      <p:sp>
+        <p:nvSpPr>
+          <p:cNvPr id="12" name="Shape 10"/>
           <p:cNvSpPr/>
           <p:nvPr/>
         </p:nvSpPr>
@@ -7553,14 +7834,14 @@
       </p:sp>
       <p:sp>
         <p:nvSpPr>
-          <p:cNvPr id="12" name="Text 10"/>
+          <p:cNvPr id="13" name="Text 11"/>
           <p:cNvSpPr/>
           <p:nvPr/>
         </p:nvSpPr>
         <p:spPr>
           <a:xfrm>
             <a:off x="8074152" y="1563624"/>
-            <a:ext cx="2825496" cy="201168"/>
+            <a:ext cx="2825496" cy="256032"/>
           </a:xfrm>
           <a:prstGeom prst="rect">
             <a:avLst/>
@@ -7576,7 +7857,7 @@
               <a:buNone/>
             </a:pPr>
             <a:r>
-              <a:rPr lang="en-US" sz="950" b="1" dirty="0">
+              <a:rPr lang="en-US" sz="1300" b="1" dirty="0">
                 <a:solidFill>
                   <a:srgbClr val="0068B7"/>
                 </a:solidFill>
@@ -7586,20 +7867,20 @@
               </a:rPr>
               <a:t>Key idea</a:t>
             </a:r>
-            <a:endParaRPr lang="en-US" sz="950" dirty="0"/>
-          </a:p>
-        </p:txBody>
-      </p:sp>
-      <p:sp>
-        <p:nvSpPr>
-          <p:cNvPr id="13" name="Text 11"/>
-          <p:cNvSpPr/>
-          <p:nvPr/>
-        </p:nvSpPr>
-        <p:spPr>
-          <a:xfrm>
-            <a:off x="8074152" y="1856232"/>
-            <a:ext cx="2825496" cy="1261872"/>
+            <a:endParaRPr lang="en-US" sz="1300" dirty="0"/>
+          </a:p>
+        </p:txBody>
+      </p:sp>
+      <p:sp>
+        <p:nvSpPr>
+          <p:cNvPr id="14" name="Text 12"/>
+          <p:cNvSpPr/>
+          <p:nvPr/>
+        </p:nvSpPr>
+        <p:spPr>
+          <a:xfrm>
+            <a:off x="8074152" y="1920240"/>
+            <a:ext cx="2825496" cy="1188720"/>
           </a:xfrm>
           <a:prstGeom prst="rect">
             <a:avLst/>
@@ -7617,7 +7898,7 @@
               <a:buNone/>
             </a:pPr>
             <a:r>
-              <a:rPr lang="en-US" sz="1250" dirty="0">
+              <a:rPr lang="en-US" sz="1550" dirty="0">
                 <a:solidFill>
                   <a:srgbClr val="17364A"/>
                 </a:solidFill>
@@ -7627,13 +7908,13 @@
               </a:rPr>
               <a:t>Create an integration pattern worksheet for one AI-supported workflow.</a:t>
             </a:r>
-            <a:endParaRPr lang="en-US" sz="1250" dirty="0"/>
-          </a:p>
-        </p:txBody>
-      </p:sp>
-      <p:sp>
-        <p:nvSpPr>
-          <p:cNvPr id="14" name="Shape 12"/>
+            <a:endParaRPr lang="en-US" sz="1550" dirty="0"/>
+          </a:p>
+        </p:txBody>
+      </p:sp>
+      <p:sp>
+        <p:nvSpPr>
+          <p:cNvPr id="15" name="Shape 13"/>
           <p:cNvSpPr/>
           <p:nvPr/>
         </p:nvSpPr>
@@ -7660,14 +7941,14 @@
       </p:sp>
       <p:sp>
         <p:nvSpPr>
-          <p:cNvPr id="15" name="Text 13"/>
+          <p:cNvPr id="16" name="Text 14"/>
           <p:cNvSpPr/>
           <p:nvPr/>
         </p:nvSpPr>
         <p:spPr>
           <a:xfrm>
             <a:off x="8074152" y="3666744"/>
-            <a:ext cx="2825496" cy="201168"/>
+            <a:ext cx="2825496" cy="256032"/>
           </a:xfrm>
           <a:prstGeom prst="rect">
             <a:avLst/>
@@ -7683,7 +7964,7 @@
               <a:buNone/>
             </a:pPr>
             <a:r>
-              <a:rPr lang="en-US" sz="950" b="1" dirty="0">
+              <a:rPr lang="en-US" sz="1300" b="1" dirty="0">
                 <a:solidFill>
                   <a:srgbClr val="0068B7"/>
                 </a:solidFill>
@@ -7693,20 +7974,20 @@
               </a:rPr>
               <a:t>Use this for</a:t>
             </a:r>
-            <a:endParaRPr lang="en-US" sz="950" dirty="0"/>
-          </a:p>
-        </p:txBody>
-      </p:sp>
-      <p:sp>
-        <p:nvSpPr>
-          <p:cNvPr id="16" name="Text 14"/>
-          <p:cNvSpPr/>
-          <p:nvPr/>
-        </p:nvSpPr>
-        <p:spPr>
-          <a:xfrm>
-            <a:off x="8074152" y="3959352"/>
-            <a:ext cx="2825496" cy="1170432"/>
+            <a:endParaRPr lang="en-US" sz="1300" dirty="0"/>
+          </a:p>
+        </p:txBody>
+      </p:sp>
+      <p:sp>
+        <p:nvSpPr>
+          <p:cNvPr id="17" name="Text 15"/>
+          <p:cNvSpPr/>
+          <p:nvPr/>
+        </p:nvSpPr>
+        <p:spPr>
+          <a:xfrm>
+            <a:off x="8074152" y="4023360"/>
+            <a:ext cx="2825496" cy="1097280"/>
           </a:xfrm>
           <a:prstGeom prst="rect">
             <a:avLst/>
@@ -7724,7 +8005,7 @@
               <a:buNone/>
             </a:pPr>
             <a:r>
-              <a:rPr lang="en-US" sz="1250" dirty="0">
+              <a:rPr lang="en-US" sz="1550" dirty="0">
                 <a:solidFill>
                   <a:srgbClr val="17364A"/>
                 </a:solidFill>
@@ -7734,7 +8015,7 @@
               </a:rPr>
               <a:t>Connect the concept to public health decisions, safeguards, documentation, or implementation work.</a:t>
             </a:r>
-            <a:endParaRPr lang="en-US" sz="1250" dirty="0"/>
+            <a:endParaRPr lang="en-US" sz="1550" dirty="0"/>
           </a:p>
         </p:txBody>
       </p:sp>
@@ -7931,7 +8212,7 @@
                 <a:ea typeface="Aptos" pitchFamily="34" charset="-122"/>
                 <a:cs typeface="Aptos" pitchFamily="34" charset="-120"/>
               </a:rPr>
-              <a:t>© Paula Soper</a:t>
+              <a:t>Â© Paula Soper</a:t>
             </a:r>
             <a:endParaRPr lang="en-US" sz="800" dirty="0"/>
           </a:p>
@@ -7939,7 +8220,46 @@
       </p:sp>
       <p:sp>
         <p:nvSpPr>
-          <p:cNvPr id="7" name="Shape 5"/>
+          <p:cNvPr id="7" name="Text 5"/>
+          <p:cNvSpPr/>
+          <p:nvPr/>
+        </p:nvSpPr>
+        <p:spPr>
+          <a:xfrm>
+            <a:off x="11137392" y="6510528"/>
+            <a:ext cx="411480" cy="201168"/>
+          </a:xfrm>
+          <a:prstGeom prst="rect">
+            <a:avLst/>
+          </a:prstGeom>
+          <a:noFill/>
+          <a:ln/>
+        </p:spPr>
+        <p:txBody>
+          <a:bodyPr wrap="square" lIns="0" tIns="0" rIns="0" bIns="0" rtlCol="0" anchor="ctr"/>
+          <a:lstStyle/>
+          <a:p>
+            <a:pPr algn="r" indent="0" marL="0">
+              <a:buNone/>
+            </a:pPr>
+            <a:r>
+              <a:rPr lang="en-US" sz="900" dirty="0">
+                <a:solidFill>
+                  <a:srgbClr val="5F7181"/>
+                </a:solidFill>
+                <a:latin typeface="Aptos" pitchFamily="34" charset="0"/>
+                <a:ea typeface="Aptos" pitchFamily="34" charset="-122"/>
+                <a:cs typeface="Aptos" pitchFamily="34" charset="-120"/>
+              </a:rPr>
+              <a:t>18</a:t>
+            </a:r>
+            <a:endParaRPr lang="en-US" sz="900" dirty="0"/>
+          </a:p>
+        </p:txBody>
+      </p:sp>
+      <p:sp>
+        <p:nvSpPr>
+          <p:cNvPr id="8" name="Shape 6"/>
           <p:cNvSpPr/>
           <p:nvPr/>
         </p:nvSpPr>
@@ -7964,7 +8284,7 @@
       </p:sp>
       <p:sp>
         <p:nvSpPr>
-          <p:cNvPr id="8" name="Text 6"/>
+          <p:cNvPr id="9" name="Text 7"/>
           <p:cNvSpPr/>
           <p:nvPr/>
         </p:nvSpPr>
@@ -8003,14 +8323,14 @@
       </p:sp>
       <p:sp>
         <p:nvSpPr>
-          <p:cNvPr id="9" name="Text 7"/>
+          <p:cNvPr id="10" name="Text 8"/>
           <p:cNvSpPr/>
           <p:nvPr/>
         </p:nvSpPr>
         <p:spPr>
           <a:xfrm>
             <a:off x="640080" y="621792"/>
-            <a:ext cx="10881360" cy="566928"/>
+            <a:ext cx="10881360" cy="713232"/>
           </a:xfrm>
           <a:prstGeom prst="rect">
             <a:avLst/>
@@ -8028,7 +8348,7 @@
               <a:buNone/>
             </a:pPr>
             <a:r>
-              <a:rPr lang="en-US" sz="2700" b="1" dirty="0">
+              <a:rPr lang="en-US" sz="3400" b="1" dirty="0">
                 <a:solidFill>
                   <a:srgbClr val="003A63"/>
                 </a:solidFill>
@@ -8038,20 +8358,20 @@
               </a:rPr>
               <a:t>Expected Artifact or Evidence</a:t>
             </a:r>
-            <a:endParaRPr lang="en-US" sz="2700" dirty="0"/>
-          </a:p>
-        </p:txBody>
-      </p:sp>
-      <p:sp>
-        <p:nvSpPr>
-          <p:cNvPr id="10" name="Text 8"/>
-          <p:cNvSpPr/>
-          <p:nvPr/>
-        </p:nvSpPr>
-        <p:spPr>
-          <a:xfrm>
-            <a:off x="868680" y="1417320"/>
-            <a:ext cx="6675120" cy="4434840"/>
+            <a:endParaRPr lang="en-US" sz="3400" dirty="0"/>
+          </a:p>
+        </p:txBody>
+      </p:sp>
+      <p:sp>
+        <p:nvSpPr>
+          <p:cNvPr id="11" name="Text 9"/>
+          <p:cNvSpPr/>
+          <p:nvPr/>
+        </p:nvSpPr>
+        <p:spPr>
+          <a:xfrm>
+            <a:off x="868680" y="1508760"/>
+            <a:ext cx="6537960" cy="4160520"/>
           </a:xfrm>
           <a:prstGeom prst="rect">
             <a:avLst/>
@@ -8066,7 +8386,7 @@
           <a:lstStyle/>
           <a:p>
             <a:r>
-              <a:rPr lang="en-US" sz="1700" dirty="0">
+              <a:rPr lang="en-US" sz="2100" dirty="0">
                 <a:solidFill>
                   <a:srgbClr val="17364A"/>
                 </a:solidFill>
@@ -8076,11 +8396,11 @@
               </a:rPr>
               <a:t>Integration pattern worksheet</a:t>
             </a:r>
-            <a:endParaRPr lang="en-US" sz="1700" dirty="0"/>
-          </a:p>
-          <a:p>
-            <a:r>
-              <a:rPr lang="en-US" sz="1700" dirty="0">
+            <a:endParaRPr lang="en-US" sz="2100" dirty="0"/>
+          </a:p>
+          <a:p>
+            <a:r>
+              <a:rPr lang="en-US" sz="2100" dirty="0">
                 <a:solidFill>
                   <a:srgbClr val="17364A"/>
                 </a:solidFill>
@@ -8090,11 +8410,11 @@
               </a:rPr>
               <a:t>System-of-record and source-system list</a:t>
             </a:r>
-            <a:endParaRPr lang="en-US" sz="1700" dirty="0"/>
-          </a:p>
-          <a:p>
-            <a:r>
-              <a:rPr lang="en-US" sz="1700" dirty="0">
+            <a:endParaRPr lang="en-US" sz="2100" dirty="0"/>
+          </a:p>
+          <a:p>
+            <a:r>
+              <a:rPr lang="en-US" sz="2100" dirty="0">
                 <a:solidFill>
                   <a:srgbClr val="17364A"/>
                 </a:solidFill>
@@ -8104,13 +8424,13 @@
               </a:rPr>
               <a:t>Read/write permission recommendation</a:t>
             </a:r>
-            <a:endParaRPr lang="en-US" sz="1700" dirty="0"/>
-          </a:p>
-        </p:txBody>
-      </p:sp>
-      <p:sp>
-        <p:nvSpPr>
-          <p:cNvPr id="11" name="Shape 9"/>
+            <a:endParaRPr lang="en-US" sz="2100" dirty="0"/>
+          </a:p>
+        </p:txBody>
+      </p:sp>
+      <p:sp>
+        <p:nvSpPr>
+          <p:cNvPr id="12" name="Shape 10"/>
           <p:cNvSpPr/>
           <p:nvPr/>
         </p:nvSpPr>
@@ -8137,14 +8457,14 @@
       </p:sp>
       <p:sp>
         <p:nvSpPr>
-          <p:cNvPr id="12" name="Text 10"/>
+          <p:cNvPr id="13" name="Text 11"/>
           <p:cNvSpPr/>
           <p:nvPr/>
         </p:nvSpPr>
         <p:spPr>
           <a:xfrm>
             <a:off x="8074152" y="1563624"/>
-            <a:ext cx="2825496" cy="201168"/>
+            <a:ext cx="2825496" cy="256032"/>
           </a:xfrm>
           <a:prstGeom prst="rect">
             <a:avLst/>
@@ -8160,7 +8480,7 @@
               <a:buNone/>
             </a:pPr>
             <a:r>
-              <a:rPr lang="en-US" sz="950" b="1" dirty="0">
+              <a:rPr lang="en-US" sz="1300" b="1" dirty="0">
                 <a:solidFill>
                   <a:srgbClr val="0068B7"/>
                 </a:solidFill>
@@ -8170,20 +8490,20 @@
               </a:rPr>
               <a:t>Key idea</a:t>
             </a:r>
-            <a:endParaRPr lang="en-US" sz="950" dirty="0"/>
-          </a:p>
-        </p:txBody>
-      </p:sp>
-      <p:sp>
-        <p:nvSpPr>
-          <p:cNvPr id="13" name="Text 11"/>
-          <p:cNvSpPr/>
-          <p:nvPr/>
-        </p:nvSpPr>
-        <p:spPr>
-          <a:xfrm>
-            <a:off x="8074152" y="1856232"/>
-            <a:ext cx="2825496" cy="1261872"/>
+            <a:endParaRPr lang="en-US" sz="1300" dirty="0"/>
+          </a:p>
+        </p:txBody>
+      </p:sp>
+      <p:sp>
+        <p:nvSpPr>
+          <p:cNvPr id="14" name="Text 12"/>
+          <p:cNvSpPr/>
+          <p:nvPr/>
+        </p:nvSpPr>
+        <p:spPr>
+          <a:xfrm>
+            <a:off x="8074152" y="1920240"/>
+            <a:ext cx="2825496" cy="1188720"/>
           </a:xfrm>
           <a:prstGeom prst="rect">
             <a:avLst/>
@@ -8201,7 +8521,7 @@
               <a:buNone/>
             </a:pPr>
             <a:r>
-              <a:rPr lang="en-US" sz="1250" dirty="0">
+              <a:rPr lang="en-US" sz="1550" dirty="0">
                 <a:solidFill>
                   <a:srgbClr val="17364A"/>
                 </a:solidFill>
@@ -8211,13 +8531,13 @@
               </a:rPr>
               <a:t>Integration pattern worksheet</a:t>
             </a:r>
-            <a:endParaRPr lang="en-US" sz="1250" dirty="0"/>
-          </a:p>
-        </p:txBody>
-      </p:sp>
-      <p:sp>
-        <p:nvSpPr>
-          <p:cNvPr id="14" name="Shape 12"/>
+            <a:endParaRPr lang="en-US" sz="1550" dirty="0"/>
+          </a:p>
+        </p:txBody>
+      </p:sp>
+      <p:sp>
+        <p:nvSpPr>
+          <p:cNvPr id="15" name="Shape 13"/>
           <p:cNvSpPr/>
           <p:nvPr/>
         </p:nvSpPr>
@@ -8244,14 +8564,14 @@
       </p:sp>
       <p:sp>
         <p:nvSpPr>
-          <p:cNvPr id="15" name="Text 13"/>
+          <p:cNvPr id="16" name="Text 14"/>
           <p:cNvSpPr/>
           <p:nvPr/>
         </p:nvSpPr>
         <p:spPr>
           <a:xfrm>
             <a:off x="8074152" y="3666744"/>
-            <a:ext cx="2825496" cy="201168"/>
+            <a:ext cx="2825496" cy="256032"/>
           </a:xfrm>
           <a:prstGeom prst="rect">
             <a:avLst/>
@@ -8267,7 +8587,7 @@
               <a:buNone/>
             </a:pPr>
             <a:r>
-              <a:rPr lang="en-US" sz="950" b="1" dirty="0">
+              <a:rPr lang="en-US" sz="1300" b="1" dirty="0">
                 <a:solidFill>
                   <a:srgbClr val="0068B7"/>
                 </a:solidFill>
@@ -8277,20 +8597,20 @@
               </a:rPr>
               <a:t>Use this for</a:t>
             </a:r>
-            <a:endParaRPr lang="en-US" sz="950" dirty="0"/>
-          </a:p>
-        </p:txBody>
-      </p:sp>
-      <p:sp>
-        <p:nvSpPr>
-          <p:cNvPr id="16" name="Text 14"/>
-          <p:cNvSpPr/>
-          <p:nvPr/>
-        </p:nvSpPr>
-        <p:spPr>
-          <a:xfrm>
-            <a:off x="8074152" y="3959352"/>
-            <a:ext cx="2825496" cy="1170432"/>
+            <a:endParaRPr lang="en-US" sz="1300" dirty="0"/>
+          </a:p>
+        </p:txBody>
+      </p:sp>
+      <p:sp>
+        <p:nvSpPr>
+          <p:cNvPr id="17" name="Text 15"/>
+          <p:cNvSpPr/>
+          <p:nvPr/>
+        </p:nvSpPr>
+        <p:spPr>
+          <a:xfrm>
+            <a:off x="8074152" y="4023360"/>
+            <a:ext cx="2825496" cy="1097280"/>
           </a:xfrm>
           <a:prstGeom prst="rect">
             <a:avLst/>
@@ -8308,7 +8628,7 @@
               <a:buNone/>
             </a:pPr>
             <a:r>
-              <a:rPr lang="en-US" sz="1250" dirty="0">
+              <a:rPr lang="en-US" sz="1550" dirty="0">
                 <a:solidFill>
                   <a:srgbClr val="17364A"/>
                 </a:solidFill>
@@ -8318,7 +8638,7 @@
               </a:rPr>
               <a:t>Connect the concept to public health decisions, safeguards, documentation, or implementation work.</a:t>
             </a:r>
-            <a:endParaRPr lang="en-US" sz="1250" dirty="0"/>
+            <a:endParaRPr lang="en-US" sz="1550" dirty="0"/>
           </a:p>
         </p:txBody>
       </p:sp>
@@ -8515,7 +8835,7 @@
                 <a:ea typeface="Aptos" pitchFamily="34" charset="-122"/>
                 <a:cs typeface="Aptos" pitchFamily="34" charset="-120"/>
               </a:rPr>
-              <a:t>© Paula Soper</a:t>
+              <a:t>Â© Paula Soper</a:t>
             </a:r>
             <a:endParaRPr lang="en-US" sz="800" dirty="0"/>
           </a:p>
@@ -8529,8 +8849,47 @@
         </p:nvSpPr>
         <p:spPr>
           <a:xfrm>
+            <a:off x="11137392" y="6510528"/>
+            <a:ext cx="411480" cy="201168"/>
+          </a:xfrm>
+          <a:prstGeom prst="rect">
+            <a:avLst/>
+          </a:prstGeom>
+          <a:noFill/>
+          <a:ln/>
+        </p:spPr>
+        <p:txBody>
+          <a:bodyPr wrap="square" lIns="0" tIns="0" rIns="0" bIns="0" rtlCol="0" anchor="ctr"/>
+          <a:lstStyle/>
+          <a:p>
+            <a:pPr algn="r" indent="0" marL="0">
+              <a:buNone/>
+            </a:pPr>
+            <a:r>
+              <a:rPr lang="en-US" sz="900" dirty="0">
+                <a:solidFill>
+                  <a:srgbClr val="5F7181"/>
+                </a:solidFill>
+                <a:latin typeface="Aptos" pitchFamily="34" charset="0"/>
+                <a:ea typeface="Aptos" pitchFamily="34" charset="-122"/>
+                <a:cs typeface="Aptos" pitchFamily="34" charset="-120"/>
+              </a:rPr>
+              <a:t>19</a:t>
+            </a:r>
+            <a:endParaRPr lang="en-US" sz="900" dirty="0"/>
+          </a:p>
+        </p:txBody>
+      </p:sp>
+      <p:sp>
+        <p:nvSpPr>
+          <p:cNvPr id="8" name="Text 6"/>
+          <p:cNvSpPr/>
+          <p:nvPr/>
+        </p:nvSpPr>
+        <p:spPr>
+          <a:xfrm>
             <a:off x="640080" y="658368"/>
-            <a:ext cx="10881360" cy="566928"/>
+            <a:ext cx="10881360" cy="713232"/>
           </a:xfrm>
           <a:prstGeom prst="rect">
             <a:avLst/>
@@ -8548,7 +8907,7 @@
               <a:buNone/>
             </a:pPr>
             <a:r>
-              <a:rPr lang="en-US" sz="2700" b="1" dirty="0">
+              <a:rPr lang="en-US" sz="3400" b="1" dirty="0">
                 <a:solidFill>
                   <a:srgbClr val="003A63"/>
                 </a:solidFill>
@@ -8558,20 +8917,20 @@
               </a:rPr>
               <a:t>Expected Artifact or Evidence Continued</a:t>
             </a:r>
-            <a:endParaRPr lang="en-US" sz="2700" dirty="0"/>
-          </a:p>
-        </p:txBody>
-      </p:sp>
-      <p:sp>
-        <p:nvSpPr>
-          <p:cNvPr id="8" name="Text 6"/>
-          <p:cNvSpPr/>
-          <p:nvPr/>
-        </p:nvSpPr>
-        <p:spPr>
-          <a:xfrm>
-            <a:off x="868680" y="1417320"/>
-            <a:ext cx="6675120" cy="4434840"/>
+            <a:endParaRPr lang="en-US" sz="3400" dirty="0"/>
+          </a:p>
+        </p:txBody>
+      </p:sp>
+      <p:sp>
+        <p:nvSpPr>
+          <p:cNvPr id="9" name="Text 7"/>
+          <p:cNvSpPr/>
+          <p:nvPr/>
+        </p:nvSpPr>
+        <p:spPr>
+          <a:xfrm>
+            <a:off x="868680" y="1508760"/>
+            <a:ext cx="6537960" cy="4160520"/>
           </a:xfrm>
           <a:prstGeom prst="rect">
             <a:avLst/>
@@ -8586,7 +8945,7 @@
           <a:lstStyle/>
           <a:p>
             <a:r>
-              <a:rPr lang="en-US" sz="1700" dirty="0">
+              <a:rPr lang="en-US" sz="2100" dirty="0">
                 <a:solidFill>
                   <a:srgbClr val="17364A"/>
                 </a:solidFill>
@@ -8596,13 +8955,13 @@
               </a:rPr>
               <a:t>Error handling and audit log requirements</a:t>
             </a:r>
-            <a:endParaRPr lang="en-US" sz="1700" dirty="0"/>
-          </a:p>
-        </p:txBody>
-      </p:sp>
-      <p:sp>
-        <p:nvSpPr>
-          <p:cNvPr id="9" name="Shape 7"/>
+            <a:endParaRPr lang="en-US" sz="2100" dirty="0"/>
+          </a:p>
+        </p:txBody>
+      </p:sp>
+      <p:sp>
+        <p:nvSpPr>
+          <p:cNvPr id="10" name="Shape 8"/>
           <p:cNvSpPr/>
           <p:nvPr/>
         </p:nvSpPr>
@@ -8629,14 +8988,14 @@
       </p:sp>
       <p:sp>
         <p:nvSpPr>
-          <p:cNvPr id="10" name="Text 8"/>
+          <p:cNvPr id="11" name="Text 9"/>
           <p:cNvSpPr/>
           <p:nvPr/>
         </p:nvSpPr>
         <p:spPr>
           <a:xfrm>
             <a:off x="8074152" y="1563624"/>
-            <a:ext cx="2825496" cy="201168"/>
+            <a:ext cx="2825496" cy="256032"/>
           </a:xfrm>
           <a:prstGeom prst="rect">
             <a:avLst/>
@@ -8652,7 +9011,7 @@
               <a:buNone/>
             </a:pPr>
             <a:r>
-              <a:rPr lang="en-US" sz="950" b="1" dirty="0">
+              <a:rPr lang="en-US" sz="1300" b="1" dirty="0">
                 <a:solidFill>
                   <a:srgbClr val="0068B7"/>
                 </a:solidFill>
@@ -8662,20 +9021,20 @@
               </a:rPr>
               <a:t>Key idea</a:t>
             </a:r>
-            <a:endParaRPr lang="en-US" sz="950" dirty="0"/>
-          </a:p>
-        </p:txBody>
-      </p:sp>
-      <p:sp>
-        <p:nvSpPr>
-          <p:cNvPr id="11" name="Text 9"/>
-          <p:cNvSpPr/>
-          <p:nvPr/>
-        </p:nvSpPr>
-        <p:spPr>
-          <a:xfrm>
-            <a:off x="8074152" y="1856232"/>
-            <a:ext cx="2825496" cy="1261872"/>
+            <a:endParaRPr lang="en-US" sz="1300" dirty="0"/>
+          </a:p>
+        </p:txBody>
+      </p:sp>
+      <p:sp>
+        <p:nvSpPr>
+          <p:cNvPr id="12" name="Text 10"/>
+          <p:cNvSpPr/>
+          <p:nvPr/>
+        </p:nvSpPr>
+        <p:spPr>
+          <a:xfrm>
+            <a:off x="8074152" y="1920240"/>
+            <a:ext cx="2825496" cy="1188720"/>
           </a:xfrm>
           <a:prstGeom prst="rect">
             <a:avLst/>
@@ -8693,7 +9052,7 @@
               <a:buNone/>
             </a:pPr>
             <a:r>
-              <a:rPr lang="en-US" sz="1250" dirty="0">
+              <a:rPr lang="en-US" sz="1550" dirty="0">
                 <a:solidFill>
                   <a:srgbClr val="17364A"/>
                 </a:solidFill>
@@ -8703,13 +9062,13 @@
               </a:rPr>
               <a:t>Error handling and audit log requirements</a:t>
             </a:r>
-            <a:endParaRPr lang="en-US" sz="1250" dirty="0"/>
-          </a:p>
-        </p:txBody>
-      </p:sp>
-      <p:sp>
-        <p:nvSpPr>
-          <p:cNvPr id="12" name="Shape 10"/>
+            <a:endParaRPr lang="en-US" sz="1550" dirty="0"/>
+          </a:p>
+        </p:txBody>
+      </p:sp>
+      <p:sp>
+        <p:nvSpPr>
+          <p:cNvPr id="13" name="Shape 11"/>
           <p:cNvSpPr/>
           <p:nvPr/>
         </p:nvSpPr>
@@ -8736,14 +9095,14 @@
       </p:sp>
       <p:sp>
         <p:nvSpPr>
-          <p:cNvPr id="13" name="Text 11"/>
+          <p:cNvPr id="14" name="Text 12"/>
           <p:cNvSpPr/>
           <p:nvPr/>
         </p:nvSpPr>
         <p:spPr>
           <a:xfrm>
             <a:off x="8074152" y="3666744"/>
-            <a:ext cx="2825496" cy="201168"/>
+            <a:ext cx="2825496" cy="256032"/>
           </a:xfrm>
           <a:prstGeom prst="rect">
             <a:avLst/>
@@ -8759,7 +9118,7 @@
               <a:buNone/>
             </a:pPr>
             <a:r>
-              <a:rPr lang="en-US" sz="950" b="1" dirty="0">
+              <a:rPr lang="en-US" sz="1300" b="1" dirty="0">
                 <a:solidFill>
                   <a:srgbClr val="0068B7"/>
                 </a:solidFill>
@@ -8769,20 +9128,20 @@
               </a:rPr>
               <a:t>Use this for</a:t>
             </a:r>
-            <a:endParaRPr lang="en-US" sz="950" dirty="0"/>
-          </a:p>
-        </p:txBody>
-      </p:sp>
-      <p:sp>
-        <p:nvSpPr>
-          <p:cNvPr id="14" name="Text 12"/>
-          <p:cNvSpPr/>
-          <p:nvPr/>
-        </p:nvSpPr>
-        <p:spPr>
-          <a:xfrm>
-            <a:off x="8074152" y="3959352"/>
-            <a:ext cx="2825496" cy="1170432"/>
+            <a:endParaRPr lang="en-US" sz="1300" dirty="0"/>
+          </a:p>
+        </p:txBody>
+      </p:sp>
+      <p:sp>
+        <p:nvSpPr>
+          <p:cNvPr id="15" name="Text 13"/>
+          <p:cNvSpPr/>
+          <p:nvPr/>
+        </p:nvSpPr>
+        <p:spPr>
+          <a:xfrm>
+            <a:off x="8074152" y="4023360"/>
+            <a:ext cx="2825496" cy="1097280"/>
           </a:xfrm>
           <a:prstGeom prst="rect">
             <a:avLst/>
@@ -8800,7 +9159,7 @@
               <a:buNone/>
             </a:pPr>
             <a:r>
-              <a:rPr lang="en-US" sz="1250" dirty="0">
+              <a:rPr lang="en-US" sz="1550" dirty="0">
                 <a:solidFill>
                   <a:srgbClr val="17364A"/>
                 </a:solidFill>
@@ -8810,7 +9169,7 @@
               </a:rPr>
               <a:t>Connect the concept to public health decisions, safeguards, documentation, or implementation work.</a:t>
             </a:r>
-            <a:endParaRPr lang="en-US" sz="1250" dirty="0"/>
+            <a:endParaRPr lang="en-US" sz="1550" dirty="0"/>
           </a:p>
         </p:txBody>
       </p:sp>
@@ -9007,7 +9366,7 @@
                 <a:ea typeface="Aptos" pitchFamily="34" charset="-122"/>
                 <a:cs typeface="Aptos" pitchFamily="34" charset="-120"/>
               </a:rPr>
-              <a:t>© Paula Soper</a:t>
+              <a:t>Â© Paula Soper</a:t>
             </a:r>
             <a:endParaRPr lang="en-US" sz="800" dirty="0"/>
           </a:p>
@@ -9021,8 +9380,47 @@
         </p:nvSpPr>
         <p:spPr>
           <a:xfrm>
+            <a:off x="11137392" y="6510528"/>
+            <a:ext cx="411480" cy="201168"/>
+          </a:xfrm>
+          <a:prstGeom prst="rect">
+            <a:avLst/>
+          </a:prstGeom>
+          <a:noFill/>
+          <a:ln/>
+        </p:spPr>
+        <p:txBody>
+          <a:bodyPr wrap="square" lIns="0" tIns="0" rIns="0" bIns="0" rtlCol="0" anchor="ctr"/>
+          <a:lstStyle/>
+          <a:p>
+            <a:pPr algn="r" indent="0" marL="0">
+              <a:buNone/>
+            </a:pPr>
+            <a:r>
+              <a:rPr lang="en-US" sz="900" dirty="0">
+                <a:solidFill>
+                  <a:srgbClr val="5F7181"/>
+                </a:solidFill>
+                <a:latin typeface="Aptos" pitchFamily="34" charset="0"/>
+                <a:ea typeface="Aptos" pitchFamily="34" charset="-122"/>
+                <a:cs typeface="Aptos" pitchFamily="34" charset="-120"/>
+              </a:rPr>
+              <a:t>2</a:t>
+            </a:r>
+            <a:endParaRPr lang="en-US" sz="900" dirty="0"/>
+          </a:p>
+        </p:txBody>
+      </p:sp>
+      <p:sp>
+        <p:nvSpPr>
+          <p:cNvPr id="8" name="Text 6"/>
+          <p:cNvSpPr/>
+          <p:nvPr/>
+        </p:nvSpPr>
+        <p:spPr>
+          <a:xfrm>
             <a:off x="640080" y="658368"/>
-            <a:ext cx="10881360" cy="566928"/>
+            <a:ext cx="10881360" cy="713232"/>
           </a:xfrm>
           <a:prstGeom prst="rect">
             <a:avLst/>
@@ -9040,7 +9438,7 @@
               <a:buNone/>
             </a:pPr>
             <a:r>
-              <a:rPr lang="en-US" sz="2700" b="1" dirty="0">
+              <a:rPr lang="en-US" sz="3400" b="1" dirty="0">
                 <a:solidFill>
                   <a:srgbClr val="003A63"/>
                 </a:solidFill>
@@ -9050,20 +9448,20 @@
               </a:rPr>
               <a:t>What this module helps you do</a:t>
             </a:r>
-            <a:endParaRPr lang="en-US" sz="2700" dirty="0"/>
-          </a:p>
-        </p:txBody>
-      </p:sp>
-      <p:sp>
-        <p:nvSpPr>
-          <p:cNvPr id="8" name="Text 6"/>
-          <p:cNvSpPr/>
-          <p:nvPr/>
-        </p:nvSpPr>
-        <p:spPr>
-          <a:xfrm>
-            <a:off x="868680" y="1417320"/>
-            <a:ext cx="6675120" cy="3291840"/>
+            <a:endParaRPr lang="en-US" sz="3400" dirty="0"/>
+          </a:p>
+        </p:txBody>
+      </p:sp>
+      <p:sp>
+        <p:nvSpPr>
+          <p:cNvPr id="9" name="Text 7"/>
+          <p:cNvSpPr/>
+          <p:nvPr/>
+        </p:nvSpPr>
+        <p:spPr>
+          <a:xfrm>
+            <a:off x="868680" y="1508760"/>
+            <a:ext cx="6446520" cy="2926080"/>
           </a:xfrm>
           <a:prstGeom prst="rect">
             <a:avLst/>
@@ -9078,7 +9476,7 @@
           <a:lstStyle/>
           <a:p>
             <a:r>
-              <a:rPr lang="en-US" sz="1700" dirty="0">
+              <a:rPr lang="en-US" sz="2100" dirty="0">
                 <a:solidFill>
                   <a:srgbClr val="17364A"/>
                 </a:solidFill>
@@ -9088,11 +9486,11 @@
               </a:rPr>
               <a:t>Public health AI rarely succeeds as a stand-alone application.</a:t>
             </a:r>
-            <a:endParaRPr lang="en-US" sz="1700" dirty="0"/>
-          </a:p>
-          <a:p>
-            <a:r>
-              <a:rPr lang="en-US" sz="1700" dirty="0">
+            <a:endParaRPr lang="en-US" sz="2100" dirty="0"/>
+          </a:p>
+          <a:p>
+            <a:r>
+              <a:rPr lang="en-US" sz="2100" dirty="0">
                 <a:solidFill>
                   <a:srgbClr val="17364A"/>
                 </a:solidFill>
@@ -9100,13 +9498,13 @@
                 <a:ea typeface="Aptos" pitchFamily="34" charset="-122"/>
                 <a:cs typeface="Aptos" pitchFamily="34" charset="-120"/>
               </a:rPr>
-              <a:t>The value of an AI-supported workflow depends on how well it is integrated with systems of record, data exchange services, terminology services,.</a:t>
-            </a:r>
-            <a:endParaRPr lang="en-US" sz="1700" dirty="0"/>
-          </a:p>
-          <a:p>
-            <a:r>
-              <a:rPr lang="en-US" sz="1700" dirty="0">
+              <a:t>The value of an AI-supported workflow depends on how well it is integrated with systems of record, data exchange.</a:t>
+            </a:r>
+            <a:endParaRPr lang="en-US" sz="2100" dirty="0"/>
+          </a:p>
+          <a:p>
+            <a:r>
+              <a:rPr lang="en-US" sz="2100" dirty="0">
                 <a:solidFill>
                   <a:srgbClr val="17364A"/>
                 </a:solidFill>
@@ -9114,29 +9512,15 @@
                 <a:ea typeface="Aptos" pitchFamily="34" charset="-122"/>
                 <a:cs typeface="Aptos" pitchFamily="34" charset="-120"/>
               </a:rPr>
-              <a:t>This module helps learners understand the integration patterns that allow AI to support public health work without creating fragmented pilots or.</a:t>
-            </a:r>
-            <a:endParaRPr lang="en-US" sz="1700" dirty="0"/>
-          </a:p>
-          <a:p>
-            <a:r>
-              <a:rPr lang="en-US" sz="1700" dirty="0">
-                <a:solidFill>
-                  <a:srgbClr val="17364A"/>
-                </a:solidFill>
-                <a:latin typeface="Aptos" pitchFamily="34" charset="0"/>
-                <a:ea typeface="Aptos" pitchFamily="34" charset="-122"/>
-                <a:cs typeface="Aptos" pitchFamily="34" charset="-120"/>
-              </a:rPr>
-              <a:t>The module focuses on practical integration choices rather than software engineering theory.</a:t>
-            </a:r>
-            <a:endParaRPr lang="en-US" sz="1700" dirty="0"/>
-          </a:p>
-        </p:txBody>
-      </p:sp>
-      <p:sp>
-        <p:nvSpPr>
-          <p:cNvPr id="9" name="Shape 7"/>
+              <a:t>This module helps learners understand the integration patterns that allow AI to support public health work.</a:t>
+            </a:r>
+            <a:endParaRPr lang="en-US" sz="2100" dirty="0"/>
+          </a:p>
+        </p:txBody>
+      </p:sp>
+      <p:sp>
+        <p:nvSpPr>
+          <p:cNvPr id="10" name="Shape 8"/>
           <p:cNvSpPr/>
           <p:nvPr/>
         </p:nvSpPr>
@@ -9163,14 +9547,14 @@
       </p:sp>
       <p:sp>
         <p:nvSpPr>
-          <p:cNvPr id="10" name="Text 8"/>
+          <p:cNvPr id="11" name="Text 9"/>
           <p:cNvSpPr/>
           <p:nvPr/>
         </p:nvSpPr>
         <p:spPr>
           <a:xfrm>
             <a:off x="8074152" y="1563624"/>
-            <a:ext cx="2825496" cy="201168"/>
+            <a:ext cx="2825496" cy="256032"/>
           </a:xfrm>
           <a:prstGeom prst="rect">
             <a:avLst/>
@@ -9186,7 +9570,7 @@
               <a:buNone/>
             </a:pPr>
             <a:r>
-              <a:rPr lang="en-US" sz="950" b="1" dirty="0">
+              <a:rPr lang="en-US" sz="1300" b="1" dirty="0">
                 <a:solidFill>
                   <a:srgbClr val="0068B7"/>
                 </a:solidFill>
@@ -9196,20 +9580,20 @@
               </a:rPr>
               <a:t>Module details</a:t>
             </a:r>
-            <a:endParaRPr lang="en-US" sz="950" dirty="0"/>
-          </a:p>
-        </p:txBody>
-      </p:sp>
-      <p:sp>
-        <p:nvSpPr>
-          <p:cNvPr id="11" name="Text 9"/>
-          <p:cNvSpPr/>
-          <p:nvPr/>
-        </p:nvSpPr>
-        <p:spPr>
-          <a:xfrm>
-            <a:off x="8074152" y="1856232"/>
-            <a:ext cx="2825496" cy="1353312"/>
+            <a:endParaRPr lang="en-US" sz="1300" dirty="0"/>
+          </a:p>
+        </p:txBody>
+      </p:sp>
+      <p:sp>
+        <p:nvSpPr>
+          <p:cNvPr id="12" name="Text 10"/>
+          <p:cNvSpPr/>
+          <p:nvPr/>
+        </p:nvSpPr>
+        <p:spPr>
+          <a:xfrm>
+            <a:off x="8074152" y="1920240"/>
+            <a:ext cx="2825496" cy="1280160"/>
           </a:xfrm>
           <a:prstGeom prst="rect">
             <a:avLst/>
@@ -9227,7 +9611,7 @@
               <a:buNone/>
             </a:pPr>
             <a:r>
-              <a:rPr lang="en-US" sz="1250" dirty="0">
+              <a:rPr lang="en-US" sz="1550" dirty="0">
                 <a:solidFill>
                   <a:srgbClr val="17364A"/>
                 </a:solidFill>
@@ -9237,14 +9621,14 @@
               </a:rPr>
               <a:t>Level: intermediate/practitioner</a:t>
             </a:r>
-            <a:endParaRPr lang="en-US" sz="1250" dirty="0"/>
+            <a:endParaRPr lang="en-US" sz="1550" dirty="0"/>
           </a:p>
           <a:p>
             <a:pPr indent="0" marL="0">
               <a:buNone/>
             </a:pPr>
             <a:r>
-              <a:rPr lang="en-US" sz="1250" dirty="0">
+              <a:rPr lang="en-US" sz="1550" dirty="0">
                 <a:solidFill>
                   <a:srgbClr val="17364A"/>
                 </a:solidFill>
@@ -9254,14 +9638,14 @@
               </a:rPr>
               <a:t>Primary track: Technical Architecture Track</a:t>
             </a:r>
-            <a:endParaRPr lang="en-US" sz="1250" dirty="0"/>
+            <a:endParaRPr lang="en-US" sz="1550" dirty="0"/>
           </a:p>
           <a:p>
             <a:pPr indent="0" marL="0">
               <a:buNone/>
             </a:pPr>
             <a:r>
-              <a:rPr lang="en-US" sz="1250" dirty="0">
+              <a:rPr lang="en-US" sz="1550" dirty="0">
                 <a:solidFill>
                   <a:srgbClr val="17364A"/>
                 </a:solidFill>
@@ -9271,32 +9655,32 @@
               </a:rPr>
               <a:t>Appears in tracks: technical-architecture, operations-data-quality, program-management, governance-security</a:t>
             </a:r>
-            <a:endParaRPr lang="en-US" sz="1250" dirty="0"/>
-          </a:p>
-        </p:txBody>
-      </p:sp>
-      <p:sp>
-        <p:nvSpPr>
-          <p:cNvPr id="12" name="Shape 10"/>
-          <p:cNvSpPr/>
-          <p:nvPr/>
-        </p:nvSpPr>
-        <p:spPr>
-          <a:xfrm>
-            <a:off x="7909560" y="3611880"/>
-            <a:ext cx="3154680" cy="1783080"/>
+            <a:endParaRPr lang="en-US" sz="1550" dirty="0"/>
+          </a:p>
+        </p:txBody>
+      </p:sp>
+      <p:sp>
+        <p:nvSpPr>
+          <p:cNvPr id="13" name="Shape 11"/>
+          <p:cNvSpPr/>
+          <p:nvPr/>
+        </p:nvSpPr>
+        <p:spPr>
+          <a:xfrm>
+            <a:off x="7635240" y="3730752"/>
+            <a:ext cx="1033272" cy="749808"/>
           </a:xfrm>
           <a:prstGeom prst="roundRect">
             <a:avLst>
-              <a:gd name="adj" fmla="val 6154"/>
+              <a:gd name="adj" fmla="val 14634"/>
             </a:avLst>
           </a:prstGeom>
           <a:solidFill>
-            <a:srgbClr val="EEF8ED"/>
+            <a:srgbClr val="0068B7"/>
           </a:solidFill>
           <a:ln w="12700">
             <a:solidFill>
-              <a:srgbClr val="B9D7E6"/>
+              <a:srgbClr val="0068B7"/>
             </a:solidFill>
             <a:prstDash val="solid"/>
           </a:ln>
@@ -9304,81 +9688,256 @@
       </p:sp>
       <p:sp>
         <p:nvSpPr>
-          <p:cNvPr id="13" name="Text 11"/>
-          <p:cNvSpPr/>
-          <p:nvPr/>
-        </p:nvSpPr>
-        <p:spPr>
-          <a:xfrm>
-            <a:off x="8074152" y="3758184"/>
-            <a:ext cx="2825496" cy="201168"/>
-          </a:xfrm>
-          <a:prstGeom prst="rect">
-            <a:avLst/>
-          </a:prstGeom>
-          <a:noFill/>
-          <a:ln/>
-        </p:spPr>
-        <p:txBody>
-          <a:bodyPr wrap="square" lIns="0" tIns="0" rIns="0" bIns="0" rtlCol="0" anchor="ctr"/>
-          <a:lstStyle/>
-          <a:p>
-            <a:pPr indent="0" marL="0">
-              <a:buNone/>
-            </a:pPr>
-            <a:r>
-              <a:rPr lang="en-US" sz="950" b="1" dirty="0">
-                <a:solidFill>
-                  <a:srgbClr val="0068B7"/>
-                </a:solidFill>
-                <a:latin typeface="Aptos" pitchFamily="34" charset="0"/>
-                <a:ea typeface="Aptos" pitchFamily="34" charset="-122"/>
-                <a:cs typeface="Aptos" pitchFamily="34" charset="-120"/>
-              </a:rPr>
-              <a:t>Learning approach</a:t>
-            </a:r>
-            <a:endParaRPr lang="en-US" sz="950" dirty="0"/>
-          </a:p>
-        </p:txBody>
-      </p:sp>
-      <p:sp>
-        <p:nvSpPr>
           <p:cNvPr id="14" name="Text 12"/>
           <p:cNvSpPr/>
           <p:nvPr/>
         </p:nvSpPr>
         <p:spPr>
           <a:xfrm>
-            <a:off x="8074152" y="4050792"/>
-            <a:ext cx="2825496" cy="1216152"/>
-          </a:xfrm>
-          <a:prstGeom prst="rect">
-            <a:avLst/>
-          </a:prstGeom>
-          <a:noFill/>
-          <a:ln/>
-        </p:spPr>
-        <p:txBody>
-          <a:bodyPr wrap="square" lIns="0" tIns="0" rIns="0" bIns="0" rtlCol="0" anchor="t">
+            <a:off x="7708392" y="3922776"/>
+            <a:ext cx="886968" cy="310896"/>
+          </a:xfrm>
+          <a:prstGeom prst="rect">
+            <a:avLst/>
+          </a:prstGeom>
+          <a:noFill/>
+          <a:ln/>
+        </p:spPr>
+        <p:txBody>
+          <a:bodyPr wrap="square" lIns="0" tIns="0" rIns="0" bIns="0" rtlCol="0" anchor="ctr">
             <a:normAutofit/>
           </a:bodyPr>
           <a:lstStyle/>
           <a:p>
-            <a:pPr indent="0" marL="0">
-              <a:buNone/>
-            </a:pPr>
-            <a:r>
-              <a:rPr lang="en-US" sz="1250" dirty="0">
-                <a:solidFill>
-                  <a:srgbClr val="17364A"/>
-                </a:solidFill>
-                <a:latin typeface="Aptos" pitchFamily="34" charset="0"/>
-                <a:ea typeface="Aptos" pitchFamily="34" charset="-122"/>
-                <a:cs typeface="Aptos" pitchFamily="34" charset="-120"/>
-              </a:rPr>
-              <a:t>Review the core ideas, complete the practical exercise, check your understanding, and use the related plays and tools to apply the lesson.</a:t>
-            </a:r>
-            <a:endParaRPr lang="en-US" sz="1250" dirty="0"/>
+            <a:pPr algn="ctr" indent="0" marL="0">
+              <a:buNone/>
+            </a:pPr>
+            <a:r>
+              <a:rPr lang="en-US" sz="1500" b="1" dirty="0">
+                <a:solidFill>
+                  <a:srgbClr val="FFFFFF"/>
+                </a:solidFill>
+                <a:latin typeface="Aptos" pitchFamily="34" charset="0"/>
+                <a:ea typeface="Aptos" pitchFamily="34" charset="-122"/>
+                <a:cs typeface="Aptos" pitchFamily="34" charset="-120"/>
+              </a:rPr>
+              <a:t>Learn</a:t>
+            </a:r>
+            <a:endParaRPr lang="en-US" sz="1500" dirty="0"/>
+          </a:p>
+        </p:txBody>
+      </p:sp>
+      <p:sp>
+        <p:nvSpPr>
+          <p:cNvPr id="15" name="Text 13"/>
+          <p:cNvSpPr/>
+          <p:nvPr/>
+        </p:nvSpPr>
+        <p:spPr>
+          <a:xfrm>
+            <a:off x="8695944" y="3941064"/>
+            <a:ext cx="201168" cy="256032"/>
+          </a:xfrm>
+          <a:prstGeom prst="rect">
+            <a:avLst/>
+          </a:prstGeom>
+          <a:noFill/>
+          <a:ln/>
+        </p:spPr>
+        <p:txBody>
+          <a:bodyPr wrap="square" lIns="0" tIns="0" rIns="0" bIns="0" rtlCol="0" anchor="ctr"/>
+          <a:lstStyle/>
+          <a:p>
+            <a:pPr algn="ctr" indent="0" marL="0">
+              <a:buNone/>
+            </a:pPr>
+            <a:r>
+              <a:rPr lang="en-US" sz="1800" b="1" dirty="0">
+                <a:solidFill>
+                  <a:srgbClr val="0068B7"/>
+                </a:solidFill>
+                <a:latin typeface="Aptos" pitchFamily="34" charset="0"/>
+                <a:ea typeface="Aptos" pitchFamily="34" charset="-122"/>
+                <a:cs typeface="Aptos" pitchFamily="34" charset="-120"/>
+              </a:rPr>
+              <a:t>â†’</a:t>
+            </a:r>
+            <a:endParaRPr lang="en-US" sz="1800" dirty="0"/>
+          </a:p>
+        </p:txBody>
+      </p:sp>
+      <p:sp>
+        <p:nvSpPr>
+          <p:cNvPr id="16" name="Shape 14"/>
+          <p:cNvSpPr/>
+          <p:nvPr/>
+        </p:nvSpPr>
+        <p:spPr>
+          <a:xfrm>
+            <a:off x="8924544" y="3730752"/>
+            <a:ext cx="1033272" cy="749808"/>
+          </a:xfrm>
+          <a:prstGeom prst="roundRect">
+            <a:avLst>
+              <a:gd name="adj" fmla="val 14634"/>
+            </a:avLst>
+          </a:prstGeom>
+          <a:solidFill>
+            <a:srgbClr val="2F8A28"/>
+          </a:solidFill>
+          <a:ln w="12700">
+            <a:solidFill>
+              <a:srgbClr val="2F8A28"/>
+            </a:solidFill>
+            <a:prstDash val="solid"/>
+          </a:ln>
+        </p:spPr>
+      </p:sp>
+      <p:sp>
+        <p:nvSpPr>
+          <p:cNvPr id="17" name="Text 15"/>
+          <p:cNvSpPr/>
+          <p:nvPr/>
+        </p:nvSpPr>
+        <p:spPr>
+          <a:xfrm>
+            <a:off x="8997696" y="3922776"/>
+            <a:ext cx="886968" cy="310896"/>
+          </a:xfrm>
+          <a:prstGeom prst="rect">
+            <a:avLst/>
+          </a:prstGeom>
+          <a:noFill/>
+          <a:ln/>
+        </p:spPr>
+        <p:txBody>
+          <a:bodyPr wrap="square" lIns="0" tIns="0" rIns="0" bIns="0" rtlCol="0" anchor="ctr">
+            <a:normAutofit/>
+          </a:bodyPr>
+          <a:lstStyle/>
+          <a:p>
+            <a:pPr algn="ctr" indent="0" marL="0">
+              <a:buNone/>
+            </a:pPr>
+            <a:r>
+              <a:rPr lang="en-US" sz="1500" b="1" dirty="0">
+                <a:solidFill>
+                  <a:srgbClr val="FFFFFF"/>
+                </a:solidFill>
+                <a:latin typeface="Aptos" pitchFamily="34" charset="0"/>
+                <a:ea typeface="Aptos" pitchFamily="34" charset="-122"/>
+                <a:cs typeface="Aptos" pitchFamily="34" charset="-120"/>
+              </a:rPr>
+              <a:t>Apply</a:t>
+            </a:r>
+            <a:endParaRPr lang="en-US" sz="1500" dirty="0"/>
+          </a:p>
+        </p:txBody>
+      </p:sp>
+      <p:sp>
+        <p:nvSpPr>
+          <p:cNvPr id="18" name="Text 16"/>
+          <p:cNvSpPr/>
+          <p:nvPr/>
+        </p:nvSpPr>
+        <p:spPr>
+          <a:xfrm>
+            <a:off x="9985248" y="3941064"/>
+            <a:ext cx="201168" cy="256032"/>
+          </a:xfrm>
+          <a:prstGeom prst="rect">
+            <a:avLst/>
+          </a:prstGeom>
+          <a:noFill/>
+          <a:ln/>
+        </p:spPr>
+        <p:txBody>
+          <a:bodyPr wrap="square" lIns="0" tIns="0" rIns="0" bIns="0" rtlCol="0" anchor="ctr"/>
+          <a:lstStyle/>
+          <a:p>
+            <a:pPr algn="ctr" indent="0" marL="0">
+              <a:buNone/>
+            </a:pPr>
+            <a:r>
+              <a:rPr lang="en-US" sz="1800" b="1" dirty="0">
+                <a:solidFill>
+                  <a:srgbClr val="0068B7"/>
+                </a:solidFill>
+                <a:latin typeface="Aptos" pitchFamily="34" charset="0"/>
+                <a:ea typeface="Aptos" pitchFamily="34" charset="-122"/>
+                <a:cs typeface="Aptos" pitchFamily="34" charset="-120"/>
+              </a:rPr>
+              <a:t>â†’</a:t>
+            </a:r>
+            <a:endParaRPr lang="en-US" sz="1800" dirty="0"/>
+          </a:p>
+        </p:txBody>
+      </p:sp>
+      <p:sp>
+        <p:nvSpPr>
+          <p:cNvPr id="19" name="Shape 17"/>
+          <p:cNvSpPr/>
+          <p:nvPr/>
+        </p:nvSpPr>
+        <p:spPr>
+          <a:xfrm>
+            <a:off x="10213848" y="3730752"/>
+            <a:ext cx="1033272" cy="749808"/>
+          </a:xfrm>
+          <a:prstGeom prst="roundRect">
+            <a:avLst>
+              <a:gd name="adj" fmla="val 14634"/>
+            </a:avLst>
+          </a:prstGeom>
+          <a:solidFill>
+            <a:srgbClr val="6A4CA3"/>
+          </a:solidFill>
+          <a:ln w="12700">
+            <a:solidFill>
+              <a:srgbClr val="6A4CA3"/>
+            </a:solidFill>
+            <a:prstDash val="solid"/>
+          </a:ln>
+        </p:spPr>
+      </p:sp>
+      <p:sp>
+        <p:nvSpPr>
+          <p:cNvPr id="20" name="Text 18"/>
+          <p:cNvSpPr/>
+          <p:nvPr/>
+        </p:nvSpPr>
+        <p:spPr>
+          <a:xfrm>
+            <a:off x="10287000" y="3922776"/>
+            <a:ext cx="886968" cy="310896"/>
+          </a:xfrm>
+          <a:prstGeom prst="rect">
+            <a:avLst/>
+          </a:prstGeom>
+          <a:noFill/>
+          <a:ln/>
+        </p:spPr>
+        <p:txBody>
+          <a:bodyPr wrap="square" lIns="0" tIns="0" rIns="0" bIns="0" rtlCol="0" anchor="ctr">
+            <a:normAutofit/>
+          </a:bodyPr>
+          <a:lstStyle/>
+          <a:p>
+            <a:pPr algn="ctr" indent="0" marL="0">
+              <a:buNone/>
+            </a:pPr>
+            <a:r>
+              <a:rPr lang="en-US" sz="1500" b="1" dirty="0">
+                <a:solidFill>
+                  <a:srgbClr val="FFFFFF"/>
+                </a:solidFill>
+                <a:latin typeface="Aptos" pitchFamily="34" charset="0"/>
+                <a:ea typeface="Aptos" pitchFamily="34" charset="-122"/>
+                <a:cs typeface="Aptos" pitchFamily="34" charset="-120"/>
+              </a:rPr>
+              <a:t>Document</a:t>
+            </a:r>
+            <a:endParaRPr lang="en-US" sz="1500" dirty="0"/>
           </a:p>
         </p:txBody>
       </p:sp>
@@ -9575,7 +10134,7 @@
                 <a:ea typeface="Aptos" pitchFamily="34" charset="-122"/>
                 <a:cs typeface="Aptos" pitchFamily="34" charset="-120"/>
               </a:rPr>
-              <a:t>© Paula Soper</a:t>
+              <a:t>Â© Paula Soper</a:t>
             </a:r>
             <a:endParaRPr lang="en-US" sz="800" dirty="0"/>
           </a:p>
@@ -9583,7 +10142,46 @@
       </p:sp>
       <p:sp>
         <p:nvSpPr>
-          <p:cNvPr id="7" name="Shape 5"/>
+          <p:cNvPr id="7" name="Text 5"/>
+          <p:cNvSpPr/>
+          <p:nvPr/>
+        </p:nvSpPr>
+        <p:spPr>
+          <a:xfrm>
+            <a:off x="11137392" y="6510528"/>
+            <a:ext cx="411480" cy="201168"/>
+          </a:xfrm>
+          <a:prstGeom prst="rect">
+            <a:avLst/>
+          </a:prstGeom>
+          <a:noFill/>
+          <a:ln/>
+        </p:spPr>
+        <p:txBody>
+          <a:bodyPr wrap="square" lIns="0" tIns="0" rIns="0" bIns="0" rtlCol="0" anchor="ctr"/>
+          <a:lstStyle/>
+          <a:p>
+            <a:pPr algn="r" indent="0" marL="0">
+              <a:buNone/>
+            </a:pPr>
+            <a:r>
+              <a:rPr lang="en-US" sz="900" dirty="0">
+                <a:solidFill>
+                  <a:srgbClr val="5F7181"/>
+                </a:solidFill>
+                <a:latin typeface="Aptos" pitchFamily="34" charset="0"/>
+                <a:ea typeface="Aptos" pitchFamily="34" charset="-122"/>
+                <a:cs typeface="Aptos" pitchFamily="34" charset="-120"/>
+              </a:rPr>
+              <a:t>20</a:t>
+            </a:r>
+            <a:endParaRPr lang="en-US" sz="900" dirty="0"/>
+          </a:p>
+        </p:txBody>
+      </p:sp>
+      <p:sp>
+        <p:nvSpPr>
+          <p:cNvPr id="8" name="Shape 6"/>
           <p:cNvSpPr/>
           <p:nvPr/>
         </p:nvSpPr>
@@ -9608,7 +10206,7 @@
       </p:sp>
       <p:sp>
         <p:nvSpPr>
-          <p:cNvPr id="8" name="Text 6"/>
+          <p:cNvPr id="9" name="Text 7"/>
           <p:cNvSpPr/>
           <p:nvPr/>
         </p:nvSpPr>
@@ -9647,14 +10245,14 @@
       </p:sp>
       <p:sp>
         <p:nvSpPr>
-          <p:cNvPr id="9" name="Text 7"/>
+          <p:cNvPr id="10" name="Text 8"/>
           <p:cNvSpPr/>
           <p:nvPr/>
         </p:nvSpPr>
         <p:spPr>
           <a:xfrm>
             <a:off x="640080" y="621792"/>
-            <a:ext cx="10881360" cy="566928"/>
+            <a:ext cx="10881360" cy="713232"/>
           </a:xfrm>
           <a:prstGeom prst="rect">
             <a:avLst/>
@@ -9672,7 +10270,7 @@
               <a:buNone/>
             </a:pPr>
             <a:r>
-              <a:rPr lang="en-US" sz="2700" b="1" dirty="0">
+              <a:rPr lang="en-US" sz="3400" b="1" dirty="0">
                 <a:solidFill>
                   <a:srgbClr val="003A63"/>
                 </a:solidFill>
@@ -9682,20 +10280,20 @@
               </a:rPr>
               <a:t>Expected Assignment</a:t>
             </a:r>
-            <a:endParaRPr lang="en-US" sz="2700" dirty="0"/>
-          </a:p>
-        </p:txBody>
-      </p:sp>
-      <p:sp>
-        <p:nvSpPr>
-          <p:cNvPr id="10" name="Text 8"/>
-          <p:cNvSpPr/>
-          <p:nvPr/>
-        </p:nvSpPr>
-        <p:spPr>
-          <a:xfrm>
-            <a:off x="868680" y="1417320"/>
-            <a:ext cx="6675120" cy="4434840"/>
+            <a:endParaRPr lang="en-US" sz="3400" dirty="0"/>
+          </a:p>
+        </p:txBody>
+      </p:sp>
+      <p:sp>
+        <p:nvSpPr>
+          <p:cNvPr id="11" name="Text 9"/>
+          <p:cNvSpPr/>
+          <p:nvPr/>
+        </p:nvSpPr>
+        <p:spPr>
+          <a:xfrm>
+            <a:off x="868680" y="1508760"/>
+            <a:ext cx="6537960" cy="4160520"/>
           </a:xfrm>
           <a:prstGeom prst="rect">
             <a:avLst/>
@@ -9710,7 +10308,7 @@
           <a:lstStyle/>
           <a:p>
             <a:r>
-              <a:rPr lang="en-US" sz="1700" dirty="0">
+              <a:rPr lang="en-US" sz="2100" dirty="0">
                 <a:solidFill>
                   <a:srgbClr val="17364A"/>
                 </a:solidFill>
@@ -9720,11 +10318,11 @@
               </a:rPr>
               <a:t>Integration pattern worksheet</a:t>
             </a:r>
-            <a:endParaRPr lang="en-US" sz="1700" dirty="0"/>
-          </a:p>
-          <a:p>
-            <a:r>
-              <a:rPr lang="en-US" sz="1700" dirty="0">
+            <a:endParaRPr lang="en-US" sz="2100" dirty="0"/>
+          </a:p>
+          <a:p>
+            <a:r>
+              <a:rPr lang="en-US" sz="2100" dirty="0">
                 <a:solidFill>
                   <a:srgbClr val="17364A"/>
                 </a:solidFill>
@@ -9734,11 +10332,11 @@
               </a:rPr>
               <a:t>System-of-record and source-system list</a:t>
             </a:r>
-            <a:endParaRPr lang="en-US" sz="1700" dirty="0"/>
-          </a:p>
-          <a:p>
-            <a:r>
-              <a:rPr lang="en-US" sz="1700" dirty="0">
+            <a:endParaRPr lang="en-US" sz="2100" dirty="0"/>
+          </a:p>
+          <a:p>
+            <a:r>
+              <a:rPr lang="en-US" sz="2100" dirty="0">
                 <a:solidFill>
                   <a:srgbClr val="17364A"/>
                 </a:solidFill>
@@ -9748,27 +10346,13 @@
               </a:rPr>
               <a:t>Read/write permission recommendation</a:t>
             </a:r>
-            <a:endParaRPr lang="en-US" sz="1700" dirty="0"/>
-          </a:p>
-          <a:p>
-            <a:r>
-              <a:rPr lang="en-US" sz="1700" dirty="0">
-                <a:solidFill>
-                  <a:srgbClr val="17364A"/>
-                </a:solidFill>
-                <a:latin typeface="Aptos" pitchFamily="34" charset="0"/>
-                <a:ea typeface="Aptos" pitchFamily="34" charset="-122"/>
-                <a:cs typeface="Aptos" pitchFamily="34" charset="-120"/>
-              </a:rPr>
-              <a:t>Error handling and audit log requirements</a:t>
-            </a:r>
-            <a:endParaRPr lang="en-US" sz="1700" dirty="0"/>
-          </a:p>
-        </p:txBody>
-      </p:sp>
-      <p:sp>
-        <p:nvSpPr>
-          <p:cNvPr id="11" name="Shape 9"/>
+            <a:endParaRPr lang="en-US" sz="2100" dirty="0"/>
+          </a:p>
+        </p:txBody>
+      </p:sp>
+      <p:sp>
+        <p:nvSpPr>
+          <p:cNvPr id="12" name="Shape 10"/>
           <p:cNvSpPr/>
           <p:nvPr/>
         </p:nvSpPr>
@@ -9795,14 +10379,14 @@
       </p:sp>
       <p:sp>
         <p:nvSpPr>
-          <p:cNvPr id="12" name="Text 10"/>
+          <p:cNvPr id="13" name="Text 11"/>
           <p:cNvSpPr/>
           <p:nvPr/>
         </p:nvSpPr>
         <p:spPr>
           <a:xfrm>
             <a:off x="8074152" y="1563624"/>
-            <a:ext cx="2825496" cy="201168"/>
+            <a:ext cx="2825496" cy="256032"/>
           </a:xfrm>
           <a:prstGeom prst="rect">
             <a:avLst/>
@@ -9818,7 +10402,7 @@
               <a:buNone/>
             </a:pPr>
             <a:r>
-              <a:rPr lang="en-US" sz="950" b="1" dirty="0">
+              <a:rPr lang="en-US" sz="1300" b="1" dirty="0">
                 <a:solidFill>
                   <a:srgbClr val="0068B7"/>
                 </a:solidFill>
@@ -9828,20 +10412,20 @@
               </a:rPr>
               <a:t>Key idea</a:t>
             </a:r>
-            <a:endParaRPr lang="en-US" sz="950" dirty="0"/>
-          </a:p>
-        </p:txBody>
-      </p:sp>
-      <p:sp>
-        <p:nvSpPr>
-          <p:cNvPr id="13" name="Text 11"/>
-          <p:cNvSpPr/>
-          <p:nvPr/>
-        </p:nvSpPr>
-        <p:spPr>
-          <a:xfrm>
-            <a:off x="8074152" y="1856232"/>
-            <a:ext cx="2825496" cy="1261872"/>
+            <a:endParaRPr lang="en-US" sz="1300" dirty="0"/>
+          </a:p>
+        </p:txBody>
+      </p:sp>
+      <p:sp>
+        <p:nvSpPr>
+          <p:cNvPr id="14" name="Text 12"/>
+          <p:cNvSpPr/>
+          <p:nvPr/>
+        </p:nvSpPr>
+        <p:spPr>
+          <a:xfrm>
+            <a:off x="8074152" y="1920240"/>
+            <a:ext cx="2825496" cy="1188720"/>
           </a:xfrm>
           <a:prstGeom prst="rect">
             <a:avLst/>
@@ -9859,7 +10443,7 @@
               <a:buNone/>
             </a:pPr>
             <a:r>
-              <a:rPr lang="en-US" sz="1250" dirty="0">
+              <a:rPr lang="en-US" sz="1550" dirty="0">
                 <a:solidFill>
                   <a:srgbClr val="17364A"/>
                 </a:solidFill>
@@ -9869,13 +10453,13 @@
               </a:rPr>
               <a:t>Integration pattern worksheet</a:t>
             </a:r>
-            <a:endParaRPr lang="en-US" sz="1250" dirty="0"/>
-          </a:p>
-        </p:txBody>
-      </p:sp>
-      <p:sp>
-        <p:nvSpPr>
-          <p:cNvPr id="14" name="Shape 12"/>
+            <a:endParaRPr lang="en-US" sz="1550" dirty="0"/>
+          </a:p>
+        </p:txBody>
+      </p:sp>
+      <p:sp>
+        <p:nvSpPr>
+          <p:cNvPr id="15" name="Shape 13"/>
           <p:cNvSpPr/>
           <p:nvPr/>
         </p:nvSpPr>
@@ -9902,14 +10486,14 @@
       </p:sp>
       <p:sp>
         <p:nvSpPr>
-          <p:cNvPr id="15" name="Text 13"/>
+          <p:cNvPr id="16" name="Text 14"/>
           <p:cNvSpPr/>
           <p:nvPr/>
         </p:nvSpPr>
         <p:spPr>
           <a:xfrm>
             <a:off x="8074152" y="3666744"/>
-            <a:ext cx="2825496" cy="201168"/>
+            <a:ext cx="2825496" cy="256032"/>
           </a:xfrm>
           <a:prstGeom prst="rect">
             <a:avLst/>
@@ -9925,7 +10509,7 @@
               <a:buNone/>
             </a:pPr>
             <a:r>
-              <a:rPr lang="en-US" sz="950" b="1" dirty="0">
+              <a:rPr lang="en-US" sz="1300" b="1" dirty="0">
                 <a:solidFill>
                   <a:srgbClr val="0068B7"/>
                 </a:solidFill>
@@ -9935,20 +10519,20 @@
               </a:rPr>
               <a:t>Use this for</a:t>
             </a:r>
-            <a:endParaRPr lang="en-US" sz="950" dirty="0"/>
-          </a:p>
-        </p:txBody>
-      </p:sp>
-      <p:sp>
-        <p:nvSpPr>
-          <p:cNvPr id="16" name="Text 14"/>
-          <p:cNvSpPr/>
-          <p:nvPr/>
-        </p:nvSpPr>
-        <p:spPr>
-          <a:xfrm>
-            <a:off x="8074152" y="3959352"/>
-            <a:ext cx="2825496" cy="1170432"/>
+            <a:endParaRPr lang="en-US" sz="1300" dirty="0"/>
+          </a:p>
+        </p:txBody>
+      </p:sp>
+      <p:sp>
+        <p:nvSpPr>
+          <p:cNvPr id="17" name="Text 15"/>
+          <p:cNvSpPr/>
+          <p:nvPr/>
+        </p:nvSpPr>
+        <p:spPr>
+          <a:xfrm>
+            <a:off x="8074152" y="4023360"/>
+            <a:ext cx="2825496" cy="1097280"/>
           </a:xfrm>
           <a:prstGeom prst="rect">
             <a:avLst/>
@@ -9966,7 +10550,7 @@
               <a:buNone/>
             </a:pPr>
             <a:r>
-              <a:rPr lang="en-US" sz="1250" dirty="0">
+              <a:rPr lang="en-US" sz="1550" dirty="0">
                 <a:solidFill>
                   <a:srgbClr val="17364A"/>
                 </a:solidFill>
@@ -9976,7 +10560,7 @@
               </a:rPr>
               <a:t>Connect the concept to public health decisions, safeguards, documentation, or implementation work.</a:t>
             </a:r>
-            <a:endParaRPr lang="en-US" sz="1250" dirty="0"/>
+            <a:endParaRPr lang="en-US" sz="1550" dirty="0"/>
           </a:p>
         </p:txBody>
       </p:sp>
@@ -10173,7 +10757,7 @@
                 <a:ea typeface="Aptos" pitchFamily="34" charset="-122"/>
                 <a:cs typeface="Aptos" pitchFamily="34" charset="-120"/>
               </a:rPr>
-              <a:t>© Paula Soper</a:t>
+              <a:t>Â© Paula Soper</a:t>
             </a:r>
             <a:endParaRPr lang="en-US" sz="800" dirty="0"/>
           </a:p>
@@ -10181,7 +10765,46 @@
       </p:sp>
       <p:sp>
         <p:nvSpPr>
-          <p:cNvPr id="7" name="Shape 5"/>
+          <p:cNvPr id="7" name="Text 5"/>
+          <p:cNvSpPr/>
+          <p:nvPr/>
+        </p:nvSpPr>
+        <p:spPr>
+          <a:xfrm>
+            <a:off x="11137392" y="6510528"/>
+            <a:ext cx="411480" cy="201168"/>
+          </a:xfrm>
+          <a:prstGeom prst="rect">
+            <a:avLst/>
+          </a:prstGeom>
+          <a:noFill/>
+          <a:ln/>
+        </p:spPr>
+        <p:txBody>
+          <a:bodyPr wrap="square" lIns="0" tIns="0" rIns="0" bIns="0" rtlCol="0" anchor="ctr"/>
+          <a:lstStyle/>
+          <a:p>
+            <a:pPr algn="r" indent="0" marL="0">
+              <a:buNone/>
+            </a:pPr>
+            <a:r>
+              <a:rPr lang="en-US" sz="900" dirty="0">
+                <a:solidFill>
+                  <a:srgbClr val="5F7181"/>
+                </a:solidFill>
+                <a:latin typeface="Aptos" pitchFamily="34" charset="0"/>
+                <a:ea typeface="Aptos" pitchFamily="34" charset="-122"/>
+                <a:cs typeface="Aptos" pitchFamily="34" charset="-120"/>
+              </a:rPr>
+              <a:t>21</a:t>
+            </a:r>
+            <a:endParaRPr lang="en-US" sz="900" dirty="0"/>
+          </a:p>
+        </p:txBody>
+      </p:sp>
+      <p:sp>
+        <p:nvSpPr>
+          <p:cNvPr id="8" name="Shape 6"/>
           <p:cNvSpPr/>
           <p:nvPr/>
         </p:nvSpPr>
@@ -10206,7 +10829,7 @@
       </p:sp>
       <p:sp>
         <p:nvSpPr>
-          <p:cNvPr id="8" name="Text 6"/>
+          <p:cNvPr id="9" name="Text 7"/>
           <p:cNvSpPr/>
           <p:nvPr/>
         </p:nvSpPr>
@@ -10245,14 +10868,14 @@
       </p:sp>
       <p:sp>
         <p:nvSpPr>
-          <p:cNvPr id="9" name="Text 7"/>
+          <p:cNvPr id="10" name="Text 8"/>
           <p:cNvSpPr/>
           <p:nvPr/>
         </p:nvSpPr>
         <p:spPr>
           <a:xfrm>
             <a:off x="640080" y="621792"/>
-            <a:ext cx="10881360" cy="566928"/>
+            <a:ext cx="10881360" cy="713232"/>
           </a:xfrm>
           <a:prstGeom prst="rect">
             <a:avLst/>
@@ -10270,7 +10893,7 @@
               <a:buNone/>
             </a:pPr>
             <a:r>
-              <a:rPr lang="en-US" sz="2700" b="1" dirty="0">
+              <a:rPr lang="en-US" sz="3400" b="1" dirty="0">
                 <a:solidFill>
                   <a:srgbClr val="003A63"/>
                 </a:solidFill>
@@ -10280,20 +10903,20 @@
               </a:rPr>
               <a:t>Knowledge Check</a:t>
             </a:r>
-            <a:endParaRPr lang="en-US" sz="2700" dirty="0"/>
-          </a:p>
-        </p:txBody>
-      </p:sp>
-      <p:sp>
-        <p:nvSpPr>
-          <p:cNvPr id="10" name="Text 8"/>
-          <p:cNvSpPr/>
-          <p:nvPr/>
-        </p:nvSpPr>
-        <p:spPr>
-          <a:xfrm>
-            <a:off x="868680" y="1417320"/>
-            <a:ext cx="6675120" cy="4434840"/>
+            <a:endParaRPr lang="en-US" sz="3400" dirty="0"/>
+          </a:p>
+        </p:txBody>
+      </p:sp>
+      <p:sp>
+        <p:nvSpPr>
+          <p:cNvPr id="11" name="Text 9"/>
+          <p:cNvSpPr/>
+          <p:nvPr/>
+        </p:nvSpPr>
+        <p:spPr>
+          <a:xfrm>
+            <a:off x="868680" y="1508760"/>
+            <a:ext cx="6537960" cy="4160520"/>
           </a:xfrm>
           <a:prstGeom prst="rect">
             <a:avLst/>
@@ -10308,7 +10931,7 @@
           <a:lstStyle/>
           <a:p>
             <a:r>
-              <a:rPr lang="en-US" sz="1700" dirty="0">
+              <a:rPr lang="en-US" sz="2100" dirty="0">
                 <a:solidFill>
                   <a:srgbClr val="17364A"/>
                 </a:solidFill>
@@ -10318,11 +10941,11 @@
               </a:rPr>
               <a:t>1. Which integration risk is most concerning for an AI tool that can update a case record?</a:t>
             </a:r>
-            <a:endParaRPr lang="en-US" sz="1700" dirty="0"/>
-          </a:p>
-          <a:p>
-            <a:r>
-              <a:rPr lang="en-US" sz="1700" dirty="0">
+            <a:endParaRPr lang="en-US" sz="2100" dirty="0"/>
+          </a:p>
+          <a:p>
+            <a:r>
+              <a:rPr lang="en-US" sz="2100" dirty="0">
                 <a:solidFill>
                   <a:srgbClr val="17364A"/>
                 </a:solidFill>
@@ -10332,11 +10955,11 @@
               </a:rPr>
               <a:t>2. What is the best reason to assign an accountability owner?</a:t>
             </a:r>
-            <a:endParaRPr lang="en-US" sz="1700" dirty="0"/>
-          </a:p>
-          <a:p>
-            <a:r>
-              <a:rPr lang="en-US" sz="1700" dirty="0">
+            <a:endParaRPr lang="en-US" sz="2100" dirty="0"/>
+          </a:p>
+          <a:p>
+            <a:r>
+              <a:rPr lang="en-US" sz="2100" dirty="0">
                 <a:solidFill>
                   <a:srgbClr val="17364A"/>
                 </a:solidFill>
@@ -10346,27 +10969,13 @@
               </a:rPr>
               <a:t>3. When should an AI-supported workflow be escalated for review?</a:t>
             </a:r>
-            <a:endParaRPr lang="en-US" sz="1700" dirty="0"/>
-          </a:p>
-          <a:p>
-            <a:r>
-              <a:rPr lang="en-US" sz="1700" dirty="0">
-                <a:solidFill>
-                  <a:srgbClr val="17364A"/>
-                </a:solidFill>
-                <a:latin typeface="Aptos" pitchFamily="34" charset="0"/>
-                <a:ea typeface="Aptos" pitchFamily="34" charset="-122"/>
-                <a:cs typeface="Aptos" pitchFamily="34" charset="-120"/>
-              </a:rPr>
-              <a:t>4. Which practice best supports public accountability?</a:t>
-            </a:r>
-            <a:endParaRPr lang="en-US" sz="1700" dirty="0"/>
-          </a:p>
-        </p:txBody>
-      </p:sp>
-      <p:sp>
-        <p:nvSpPr>
-          <p:cNvPr id="11" name="Shape 9"/>
+            <a:endParaRPr lang="en-US" sz="2100" dirty="0"/>
+          </a:p>
+        </p:txBody>
+      </p:sp>
+      <p:sp>
+        <p:nvSpPr>
+          <p:cNvPr id="12" name="Shape 10"/>
           <p:cNvSpPr/>
           <p:nvPr/>
         </p:nvSpPr>
@@ -10393,14 +11002,14 @@
       </p:sp>
       <p:sp>
         <p:nvSpPr>
-          <p:cNvPr id="12" name="Text 10"/>
+          <p:cNvPr id="13" name="Text 11"/>
           <p:cNvSpPr/>
           <p:nvPr/>
         </p:nvSpPr>
         <p:spPr>
           <a:xfrm>
             <a:off x="8074152" y="1563624"/>
-            <a:ext cx="2825496" cy="201168"/>
+            <a:ext cx="2825496" cy="256032"/>
           </a:xfrm>
           <a:prstGeom prst="rect">
             <a:avLst/>
@@ -10416,7 +11025,7 @@
               <a:buNone/>
             </a:pPr>
             <a:r>
-              <a:rPr lang="en-US" sz="950" b="1" dirty="0">
+              <a:rPr lang="en-US" sz="1300" b="1" dirty="0">
                 <a:solidFill>
                   <a:srgbClr val="0068B7"/>
                 </a:solidFill>
@@ -10426,20 +11035,20 @@
               </a:rPr>
               <a:t>Key idea</a:t>
             </a:r>
-            <a:endParaRPr lang="en-US" sz="950" dirty="0"/>
-          </a:p>
-        </p:txBody>
-      </p:sp>
-      <p:sp>
-        <p:nvSpPr>
-          <p:cNvPr id="13" name="Text 11"/>
-          <p:cNvSpPr/>
-          <p:nvPr/>
-        </p:nvSpPr>
-        <p:spPr>
-          <a:xfrm>
-            <a:off x="8074152" y="1856232"/>
-            <a:ext cx="2825496" cy="1261872"/>
+            <a:endParaRPr lang="en-US" sz="1300" dirty="0"/>
+          </a:p>
+        </p:txBody>
+      </p:sp>
+      <p:sp>
+        <p:nvSpPr>
+          <p:cNvPr id="14" name="Text 12"/>
+          <p:cNvSpPr/>
+          <p:nvPr/>
+        </p:nvSpPr>
+        <p:spPr>
+          <a:xfrm>
+            <a:off x="8074152" y="1920240"/>
+            <a:ext cx="2825496" cy="1188720"/>
           </a:xfrm>
           <a:prstGeom prst="rect">
             <a:avLst/>
@@ -10457,7 +11066,7 @@
               <a:buNone/>
             </a:pPr>
             <a:r>
-              <a:rPr lang="en-US" sz="1250" dirty="0">
+              <a:rPr lang="en-US" sz="1550" dirty="0">
                 <a:solidFill>
                   <a:srgbClr val="17364A"/>
                 </a:solidFill>
@@ -10467,13 +11076,13 @@
               </a:rPr>
               <a:t>1. Which integration risk is most concerning for an AI tool that can update a case record?</a:t>
             </a:r>
-            <a:endParaRPr lang="en-US" sz="1250" dirty="0"/>
-          </a:p>
-        </p:txBody>
-      </p:sp>
-      <p:sp>
-        <p:nvSpPr>
-          <p:cNvPr id="14" name="Shape 12"/>
+            <a:endParaRPr lang="en-US" sz="1550" dirty="0"/>
+          </a:p>
+        </p:txBody>
+      </p:sp>
+      <p:sp>
+        <p:nvSpPr>
+          <p:cNvPr id="15" name="Shape 13"/>
           <p:cNvSpPr/>
           <p:nvPr/>
         </p:nvSpPr>
@@ -10500,14 +11109,14 @@
       </p:sp>
       <p:sp>
         <p:nvSpPr>
-          <p:cNvPr id="15" name="Text 13"/>
+          <p:cNvPr id="16" name="Text 14"/>
           <p:cNvSpPr/>
           <p:nvPr/>
         </p:nvSpPr>
         <p:spPr>
           <a:xfrm>
             <a:off x="8074152" y="3666744"/>
-            <a:ext cx="2825496" cy="201168"/>
+            <a:ext cx="2825496" cy="256032"/>
           </a:xfrm>
           <a:prstGeom prst="rect">
             <a:avLst/>
@@ -10523,7 +11132,7 @@
               <a:buNone/>
             </a:pPr>
             <a:r>
-              <a:rPr lang="en-US" sz="950" b="1" dirty="0">
+              <a:rPr lang="en-US" sz="1300" b="1" dirty="0">
                 <a:solidFill>
                   <a:srgbClr val="0068B7"/>
                 </a:solidFill>
@@ -10533,20 +11142,20 @@
               </a:rPr>
               <a:t>Use this for</a:t>
             </a:r>
-            <a:endParaRPr lang="en-US" sz="950" dirty="0"/>
-          </a:p>
-        </p:txBody>
-      </p:sp>
-      <p:sp>
-        <p:nvSpPr>
-          <p:cNvPr id="16" name="Text 14"/>
-          <p:cNvSpPr/>
-          <p:nvPr/>
-        </p:nvSpPr>
-        <p:spPr>
-          <a:xfrm>
-            <a:off x="8074152" y="3959352"/>
-            <a:ext cx="2825496" cy="1170432"/>
+            <a:endParaRPr lang="en-US" sz="1300" dirty="0"/>
+          </a:p>
+        </p:txBody>
+      </p:sp>
+      <p:sp>
+        <p:nvSpPr>
+          <p:cNvPr id="17" name="Text 15"/>
+          <p:cNvSpPr/>
+          <p:nvPr/>
+        </p:nvSpPr>
+        <p:spPr>
+          <a:xfrm>
+            <a:off x="8074152" y="4023360"/>
+            <a:ext cx="2825496" cy="1097280"/>
           </a:xfrm>
           <a:prstGeom prst="rect">
             <a:avLst/>
@@ -10564,7 +11173,7 @@
               <a:buNone/>
             </a:pPr>
             <a:r>
-              <a:rPr lang="en-US" sz="1250" dirty="0">
+              <a:rPr lang="en-US" sz="1550" dirty="0">
                 <a:solidFill>
                   <a:srgbClr val="17364A"/>
                 </a:solidFill>
@@ -10574,7 +11183,7 @@
               </a:rPr>
               <a:t>Connect the concept to public health decisions, safeguards, documentation, or implementation work.</a:t>
             </a:r>
-            <a:endParaRPr lang="en-US" sz="1250" dirty="0"/>
+            <a:endParaRPr lang="en-US" sz="1550" dirty="0"/>
           </a:p>
         </p:txBody>
       </p:sp>
@@ -10771,7 +11380,7 @@
                 <a:ea typeface="Aptos" pitchFamily="34" charset="-122"/>
                 <a:cs typeface="Aptos" pitchFamily="34" charset="-120"/>
               </a:rPr>
-              <a:t>© Paula Soper</a:t>
+              <a:t>Â© Paula Soper</a:t>
             </a:r>
             <a:endParaRPr lang="en-US" sz="800" dirty="0"/>
           </a:p>
@@ -10779,7 +11388,46 @@
       </p:sp>
       <p:sp>
         <p:nvSpPr>
-          <p:cNvPr id="7" name="Shape 5"/>
+          <p:cNvPr id="7" name="Text 5"/>
+          <p:cNvSpPr/>
+          <p:nvPr/>
+        </p:nvSpPr>
+        <p:spPr>
+          <a:xfrm>
+            <a:off x="11137392" y="6510528"/>
+            <a:ext cx="411480" cy="201168"/>
+          </a:xfrm>
+          <a:prstGeom prst="rect">
+            <a:avLst/>
+          </a:prstGeom>
+          <a:noFill/>
+          <a:ln/>
+        </p:spPr>
+        <p:txBody>
+          <a:bodyPr wrap="square" lIns="0" tIns="0" rIns="0" bIns="0" rtlCol="0" anchor="ctr"/>
+          <a:lstStyle/>
+          <a:p>
+            <a:pPr algn="r" indent="0" marL="0">
+              <a:buNone/>
+            </a:pPr>
+            <a:r>
+              <a:rPr lang="en-US" sz="900" dirty="0">
+                <a:solidFill>
+                  <a:srgbClr val="5F7181"/>
+                </a:solidFill>
+                <a:latin typeface="Aptos" pitchFamily="34" charset="0"/>
+                <a:ea typeface="Aptos" pitchFamily="34" charset="-122"/>
+                <a:cs typeface="Aptos" pitchFamily="34" charset="-120"/>
+              </a:rPr>
+              <a:t>22</a:t>
+            </a:r>
+            <a:endParaRPr lang="en-US" sz="900" dirty="0"/>
+          </a:p>
+        </p:txBody>
+      </p:sp>
+      <p:sp>
+        <p:nvSpPr>
+          <p:cNvPr id="8" name="Shape 6"/>
           <p:cNvSpPr/>
           <p:nvPr/>
         </p:nvSpPr>
@@ -10804,7 +11452,7 @@
       </p:sp>
       <p:sp>
         <p:nvSpPr>
-          <p:cNvPr id="8" name="Text 6"/>
+          <p:cNvPr id="9" name="Text 7"/>
           <p:cNvSpPr/>
           <p:nvPr/>
         </p:nvSpPr>
@@ -10843,14 +11491,14 @@
       </p:sp>
       <p:sp>
         <p:nvSpPr>
-          <p:cNvPr id="9" name="Text 7"/>
+          <p:cNvPr id="10" name="Text 8"/>
           <p:cNvSpPr/>
           <p:nvPr/>
         </p:nvSpPr>
         <p:spPr>
           <a:xfrm>
             <a:off x="640080" y="621792"/>
-            <a:ext cx="10881360" cy="566928"/>
+            <a:ext cx="10881360" cy="713232"/>
           </a:xfrm>
           <a:prstGeom prst="rect">
             <a:avLst/>
@@ -10868,7 +11516,7 @@
               <a:buNone/>
             </a:pPr>
             <a:r>
-              <a:rPr lang="en-US" sz="2700" b="1" dirty="0">
+              <a:rPr lang="en-US" sz="3400" b="1" dirty="0">
                 <a:solidFill>
                   <a:srgbClr val="003A63"/>
                 </a:solidFill>
@@ -10878,20 +11526,20 @@
               </a:rPr>
               <a:t>References and Resources</a:t>
             </a:r>
-            <a:endParaRPr lang="en-US" sz="2700" dirty="0"/>
-          </a:p>
-        </p:txBody>
-      </p:sp>
-      <p:sp>
-        <p:nvSpPr>
-          <p:cNvPr id="10" name="Text 8"/>
-          <p:cNvSpPr/>
-          <p:nvPr/>
-        </p:nvSpPr>
-        <p:spPr>
-          <a:xfrm>
-            <a:off x="868680" y="1417320"/>
-            <a:ext cx="6675120" cy="4434840"/>
+            <a:endParaRPr lang="en-US" sz="3400" dirty="0"/>
+          </a:p>
+        </p:txBody>
+      </p:sp>
+      <p:sp>
+        <p:nvSpPr>
+          <p:cNvPr id="11" name="Text 9"/>
+          <p:cNvSpPr/>
+          <p:nvPr/>
+        </p:nvSpPr>
+        <p:spPr>
+          <a:xfrm>
+            <a:off x="868680" y="1508760"/>
+            <a:ext cx="6537960" cy="4160520"/>
           </a:xfrm>
           <a:prstGeom prst="rect">
             <a:avLst/>
@@ -10906,7 +11554,7 @@
           <a:lstStyle/>
           <a:p>
             <a:r>
-              <a:rPr lang="en-US" sz="1700" dirty="0">
+              <a:rPr lang="en-US" sz="2100" dirty="0">
                 <a:solidFill>
                   <a:srgbClr val="17364A"/>
                 </a:solidFill>
@@ -10916,11 +11564,11 @@
               </a:rPr>
               <a:t>CDC Public Health Data Strategy and Data Modernization resources:.</a:t>
             </a:r>
-            <a:endParaRPr lang="en-US" sz="1700" dirty="0"/>
-          </a:p>
-          <a:p>
-            <a:r>
-              <a:rPr lang="en-US" sz="1700" dirty="0">
+            <a:endParaRPr lang="en-US" sz="2100" dirty="0"/>
+          </a:p>
+          <a:p>
+            <a:r>
+              <a:rPr lang="en-US" sz="2100" dirty="0">
                 <a:solidFill>
                   <a:srgbClr val="17364A"/>
                 </a:solidFill>
@@ -10930,11 +11578,11 @@
               </a:rPr>
               <a:t>NIST Artificial Intelligence Risk Management Framework and NIST Generative AI Profile:.</a:t>
             </a:r>
-            <a:endParaRPr lang="en-US" sz="1700" dirty="0"/>
-          </a:p>
-          <a:p>
-            <a:r>
-              <a:rPr lang="en-US" sz="1700" dirty="0">
+            <a:endParaRPr lang="en-US" sz="2100" dirty="0"/>
+          </a:p>
+          <a:p>
+            <a:r>
+              <a:rPr lang="en-US" sz="2100" dirty="0">
                 <a:solidFill>
                   <a:srgbClr val="17364A"/>
                 </a:solidFill>
@@ -10942,29 +11590,15 @@
                 <a:ea typeface="Aptos" pitchFamily="34" charset="-122"/>
                 <a:cs typeface="Aptos" pitchFamily="34" charset="-120"/>
               </a:rPr>
-              <a:t>WHO Ethics and Governance of Artificial Intelligence for Health guidance: https://www.who.int/publications/i/item/9789240029200</a:t>
-            </a:r>
-            <a:endParaRPr lang="en-US" sz="1700" dirty="0"/>
-          </a:p>
-          <a:p>
-            <a:r>
-              <a:rPr lang="en-US" sz="1700" dirty="0">
-                <a:solidFill>
-                  <a:srgbClr val="17364A"/>
-                </a:solidFill>
-                <a:latin typeface="Aptos" pitchFamily="34" charset="0"/>
-                <a:ea typeface="Aptos" pitchFamily="34" charset="-122"/>
-                <a:cs typeface="Aptos" pitchFamily="34" charset="-120"/>
-              </a:rPr>
-              <a:t>OWASP Top 10 for Large Language Model Applications: https://owasp.org/www-project-top-10-for-large-language-model-applications/</a:t>
-            </a:r>
-            <a:endParaRPr lang="en-US" sz="1700" dirty="0"/>
-          </a:p>
-        </p:txBody>
-      </p:sp>
-      <p:sp>
-        <p:nvSpPr>
-          <p:cNvPr id="11" name="Shape 9"/>
+              <a:t>WHO Ethics and Governance of Artificial Intelligence for Health guidance:.</a:t>
+            </a:r>
+            <a:endParaRPr lang="en-US" sz="2100" dirty="0"/>
+          </a:p>
+        </p:txBody>
+      </p:sp>
+      <p:sp>
+        <p:nvSpPr>
+          <p:cNvPr id="12" name="Shape 10"/>
           <p:cNvSpPr/>
           <p:nvPr/>
         </p:nvSpPr>
@@ -10991,14 +11625,14 @@
       </p:sp>
       <p:sp>
         <p:nvSpPr>
-          <p:cNvPr id="12" name="Text 10"/>
+          <p:cNvPr id="13" name="Text 11"/>
           <p:cNvSpPr/>
           <p:nvPr/>
         </p:nvSpPr>
         <p:spPr>
           <a:xfrm>
             <a:off x="8074152" y="1563624"/>
-            <a:ext cx="2825496" cy="201168"/>
+            <a:ext cx="2825496" cy="256032"/>
           </a:xfrm>
           <a:prstGeom prst="rect">
             <a:avLst/>
@@ -11014,7 +11648,7 @@
               <a:buNone/>
             </a:pPr>
             <a:r>
-              <a:rPr lang="en-US" sz="950" b="1" dirty="0">
+              <a:rPr lang="en-US" sz="1300" b="1" dirty="0">
                 <a:solidFill>
                   <a:srgbClr val="0068B7"/>
                 </a:solidFill>
@@ -11024,20 +11658,20 @@
               </a:rPr>
               <a:t>Key idea</a:t>
             </a:r>
-            <a:endParaRPr lang="en-US" sz="950" dirty="0"/>
-          </a:p>
-        </p:txBody>
-      </p:sp>
-      <p:sp>
-        <p:nvSpPr>
-          <p:cNvPr id="13" name="Text 11"/>
-          <p:cNvSpPr/>
-          <p:nvPr/>
-        </p:nvSpPr>
-        <p:spPr>
-          <a:xfrm>
-            <a:off x="8074152" y="1856232"/>
-            <a:ext cx="2825496" cy="1261872"/>
+            <a:endParaRPr lang="en-US" sz="1300" dirty="0"/>
+          </a:p>
+        </p:txBody>
+      </p:sp>
+      <p:sp>
+        <p:nvSpPr>
+          <p:cNvPr id="14" name="Text 12"/>
+          <p:cNvSpPr/>
+          <p:nvPr/>
+        </p:nvSpPr>
+        <p:spPr>
+          <a:xfrm>
+            <a:off x="8074152" y="1920240"/>
+            <a:ext cx="2825496" cy="1188720"/>
           </a:xfrm>
           <a:prstGeom prst="rect">
             <a:avLst/>
@@ -11055,7 +11689,7 @@
               <a:buNone/>
             </a:pPr>
             <a:r>
-              <a:rPr lang="en-US" sz="1250" dirty="0">
+              <a:rPr lang="en-US" sz="1550" dirty="0">
                 <a:solidFill>
                   <a:srgbClr val="17364A"/>
                 </a:solidFill>
@@ -11065,13 +11699,13 @@
               </a:rPr>
               <a:t>CDC Public Health Data Strategy and Data Modernization resources:.</a:t>
             </a:r>
-            <a:endParaRPr lang="en-US" sz="1250" dirty="0"/>
-          </a:p>
-        </p:txBody>
-      </p:sp>
-      <p:sp>
-        <p:nvSpPr>
-          <p:cNvPr id="14" name="Shape 12"/>
+            <a:endParaRPr lang="en-US" sz="1550" dirty="0"/>
+          </a:p>
+        </p:txBody>
+      </p:sp>
+      <p:sp>
+        <p:nvSpPr>
+          <p:cNvPr id="15" name="Shape 13"/>
           <p:cNvSpPr/>
           <p:nvPr/>
         </p:nvSpPr>
@@ -11098,14 +11732,14 @@
       </p:sp>
       <p:sp>
         <p:nvSpPr>
-          <p:cNvPr id="15" name="Text 13"/>
+          <p:cNvPr id="16" name="Text 14"/>
           <p:cNvSpPr/>
           <p:nvPr/>
         </p:nvSpPr>
         <p:spPr>
           <a:xfrm>
             <a:off x="8074152" y="3666744"/>
-            <a:ext cx="2825496" cy="201168"/>
+            <a:ext cx="2825496" cy="256032"/>
           </a:xfrm>
           <a:prstGeom prst="rect">
             <a:avLst/>
@@ -11121,7 +11755,7 @@
               <a:buNone/>
             </a:pPr>
             <a:r>
-              <a:rPr lang="en-US" sz="950" b="1" dirty="0">
+              <a:rPr lang="en-US" sz="1300" b="1" dirty="0">
                 <a:solidFill>
                   <a:srgbClr val="0068B7"/>
                 </a:solidFill>
@@ -11131,20 +11765,20 @@
               </a:rPr>
               <a:t>Use this for</a:t>
             </a:r>
-            <a:endParaRPr lang="en-US" sz="950" dirty="0"/>
-          </a:p>
-        </p:txBody>
-      </p:sp>
-      <p:sp>
-        <p:nvSpPr>
-          <p:cNvPr id="16" name="Text 14"/>
-          <p:cNvSpPr/>
-          <p:nvPr/>
-        </p:nvSpPr>
-        <p:spPr>
-          <a:xfrm>
-            <a:off x="8074152" y="3959352"/>
-            <a:ext cx="2825496" cy="1170432"/>
+            <a:endParaRPr lang="en-US" sz="1300" dirty="0"/>
+          </a:p>
+        </p:txBody>
+      </p:sp>
+      <p:sp>
+        <p:nvSpPr>
+          <p:cNvPr id="17" name="Text 15"/>
+          <p:cNvSpPr/>
+          <p:nvPr/>
+        </p:nvSpPr>
+        <p:spPr>
+          <a:xfrm>
+            <a:off x="8074152" y="4023360"/>
+            <a:ext cx="2825496" cy="1097280"/>
           </a:xfrm>
           <a:prstGeom prst="rect">
             <a:avLst/>
@@ -11162,7 +11796,7 @@
               <a:buNone/>
             </a:pPr>
             <a:r>
-              <a:rPr lang="en-US" sz="1250" dirty="0">
+              <a:rPr lang="en-US" sz="1550" dirty="0">
                 <a:solidFill>
                   <a:srgbClr val="17364A"/>
                 </a:solidFill>
@@ -11172,7 +11806,7 @@
               </a:rPr>
               <a:t>Connect the concept to public health decisions, safeguards, documentation, or implementation work.</a:t>
             </a:r>
-            <a:endParaRPr lang="en-US" sz="1250" dirty="0"/>
+            <a:endParaRPr lang="en-US" sz="1550" dirty="0"/>
           </a:p>
         </p:txBody>
       </p:sp>
@@ -11369,7 +12003,7 @@
                 <a:ea typeface="Aptos" pitchFamily="34" charset="-122"/>
                 <a:cs typeface="Aptos" pitchFamily="34" charset="-120"/>
               </a:rPr>
-              <a:t>© Paula Soper</a:t>
+              <a:t>Â© Paula Soper</a:t>
             </a:r>
             <a:endParaRPr lang="en-US" sz="800" dirty="0"/>
           </a:p>
@@ -11383,8 +12017,47 @@
         </p:nvSpPr>
         <p:spPr>
           <a:xfrm>
+            <a:off x="11137392" y="6510528"/>
+            <a:ext cx="411480" cy="201168"/>
+          </a:xfrm>
+          <a:prstGeom prst="rect">
+            <a:avLst/>
+          </a:prstGeom>
+          <a:noFill/>
+          <a:ln/>
+        </p:spPr>
+        <p:txBody>
+          <a:bodyPr wrap="square" lIns="0" tIns="0" rIns="0" bIns="0" rtlCol="0" anchor="ctr"/>
+          <a:lstStyle/>
+          <a:p>
+            <a:pPr algn="r" indent="0" marL="0">
+              <a:buNone/>
+            </a:pPr>
+            <a:r>
+              <a:rPr lang="en-US" sz="900" dirty="0">
+                <a:solidFill>
+                  <a:srgbClr val="5F7181"/>
+                </a:solidFill>
+                <a:latin typeface="Aptos" pitchFamily="34" charset="0"/>
+                <a:ea typeface="Aptos" pitchFamily="34" charset="-122"/>
+                <a:cs typeface="Aptos" pitchFamily="34" charset="-120"/>
+              </a:rPr>
+              <a:t>23</a:t>
+            </a:r>
+            <a:endParaRPr lang="en-US" sz="900" dirty="0"/>
+          </a:p>
+        </p:txBody>
+      </p:sp>
+      <p:sp>
+        <p:nvSpPr>
+          <p:cNvPr id="8" name="Text 6"/>
+          <p:cNvSpPr/>
+          <p:nvPr/>
+        </p:nvSpPr>
+        <p:spPr>
+          <a:xfrm>
             <a:off x="640080" y="658368"/>
-            <a:ext cx="10881360" cy="566928"/>
+            <a:ext cx="10881360" cy="713232"/>
           </a:xfrm>
           <a:prstGeom prst="rect">
             <a:avLst/>
@@ -11402,7 +12075,7 @@
               <a:buNone/>
             </a:pPr>
             <a:r>
-              <a:rPr lang="en-US" sz="2700" b="1" dirty="0">
+              <a:rPr lang="en-US" sz="3400" b="1" dirty="0">
                 <a:solidFill>
                   <a:srgbClr val="003A63"/>
                 </a:solidFill>
@@ -11412,20 +12085,20 @@
               </a:rPr>
               <a:t>References and Resources Continued</a:t>
             </a:r>
-            <a:endParaRPr lang="en-US" sz="2700" dirty="0"/>
-          </a:p>
-        </p:txBody>
-      </p:sp>
-      <p:sp>
-        <p:nvSpPr>
-          <p:cNvPr id="8" name="Text 6"/>
-          <p:cNvSpPr/>
-          <p:nvPr/>
-        </p:nvSpPr>
-        <p:spPr>
-          <a:xfrm>
-            <a:off x="868680" y="1417320"/>
-            <a:ext cx="6675120" cy="4434840"/>
+            <a:endParaRPr lang="en-US" sz="3400" dirty="0"/>
+          </a:p>
+        </p:txBody>
+      </p:sp>
+      <p:sp>
+        <p:nvSpPr>
+          <p:cNvPr id="9" name="Text 7"/>
+          <p:cNvSpPr/>
+          <p:nvPr/>
+        </p:nvSpPr>
+        <p:spPr>
+          <a:xfrm>
+            <a:off x="868680" y="1508760"/>
+            <a:ext cx="6537960" cy="4160520"/>
           </a:xfrm>
           <a:prstGeom prst="rect">
             <a:avLst/>
@@ -11440,7 +12113,7 @@
           <a:lstStyle/>
           <a:p>
             <a:r>
-              <a:rPr lang="en-US" sz="1700" dirty="0">
+              <a:rPr lang="en-US" sz="2100" dirty="0">
                 <a:solidFill>
                   <a:srgbClr val="17364A"/>
                 </a:solidFill>
@@ -11448,15 +12121,15 @@
                 <a:ea typeface="Aptos" pitchFamily="34" charset="-122"/>
                 <a:cs typeface="Aptos" pitchFamily="34" charset="-120"/>
               </a:rPr>
-              <a:t>Agency policies for privacy, public records, cybersecurity, procurement, civil rights, accessibility, language access, and.</a:t>
-            </a:r>
-            <a:endParaRPr lang="en-US" sz="1700" dirty="0"/>
-          </a:p>
-        </p:txBody>
-      </p:sp>
-      <p:sp>
-        <p:nvSpPr>
-          <p:cNvPr id="9" name="Shape 7"/>
+              <a:t>Agency policies for privacy, public records, cybersecurity, procurement, civil rights, accessibility,.</a:t>
+            </a:r>
+            <a:endParaRPr lang="en-US" sz="2100" dirty="0"/>
+          </a:p>
+        </p:txBody>
+      </p:sp>
+      <p:sp>
+        <p:nvSpPr>
+          <p:cNvPr id="10" name="Shape 8"/>
           <p:cNvSpPr/>
           <p:nvPr/>
         </p:nvSpPr>
@@ -11483,14 +12156,14 @@
       </p:sp>
       <p:sp>
         <p:nvSpPr>
-          <p:cNvPr id="10" name="Text 8"/>
+          <p:cNvPr id="11" name="Text 9"/>
           <p:cNvSpPr/>
           <p:nvPr/>
         </p:nvSpPr>
         <p:spPr>
           <a:xfrm>
             <a:off x="8074152" y="1563624"/>
-            <a:ext cx="2825496" cy="201168"/>
+            <a:ext cx="2825496" cy="256032"/>
           </a:xfrm>
           <a:prstGeom prst="rect">
             <a:avLst/>
@@ -11506,7 +12179,7 @@
               <a:buNone/>
             </a:pPr>
             <a:r>
-              <a:rPr lang="en-US" sz="950" b="1" dirty="0">
+              <a:rPr lang="en-US" sz="1300" b="1" dirty="0">
                 <a:solidFill>
                   <a:srgbClr val="0068B7"/>
                 </a:solidFill>
@@ -11516,20 +12189,20 @@
               </a:rPr>
               <a:t>Key idea</a:t>
             </a:r>
-            <a:endParaRPr lang="en-US" sz="950" dirty="0"/>
-          </a:p>
-        </p:txBody>
-      </p:sp>
-      <p:sp>
-        <p:nvSpPr>
-          <p:cNvPr id="11" name="Text 9"/>
-          <p:cNvSpPr/>
-          <p:nvPr/>
-        </p:nvSpPr>
-        <p:spPr>
-          <a:xfrm>
-            <a:off x="8074152" y="1856232"/>
-            <a:ext cx="2825496" cy="1261872"/>
+            <a:endParaRPr lang="en-US" sz="1300" dirty="0"/>
+          </a:p>
+        </p:txBody>
+      </p:sp>
+      <p:sp>
+        <p:nvSpPr>
+          <p:cNvPr id="12" name="Text 10"/>
+          <p:cNvSpPr/>
+          <p:nvPr/>
+        </p:nvSpPr>
+        <p:spPr>
+          <a:xfrm>
+            <a:off x="8074152" y="1920240"/>
+            <a:ext cx="2825496" cy="1188720"/>
           </a:xfrm>
           <a:prstGeom prst="rect">
             <a:avLst/>
@@ -11547,7 +12220,7 @@
               <a:buNone/>
             </a:pPr>
             <a:r>
-              <a:rPr lang="en-US" sz="1250" dirty="0">
+              <a:rPr lang="en-US" sz="1550" dirty="0">
                 <a:solidFill>
                   <a:srgbClr val="17364A"/>
                 </a:solidFill>
@@ -11555,15 +12228,15 @@
                 <a:ea typeface="Aptos" pitchFamily="34" charset="-122"/>
                 <a:cs typeface="Aptos" pitchFamily="34" charset="-120"/>
               </a:rPr>
-              <a:t>Agency policies for privacy, public records, cybersecurity, procurement, civil rights, accessibility, language access, and.</a:t>
-            </a:r>
-            <a:endParaRPr lang="en-US" sz="1250" dirty="0"/>
-          </a:p>
-        </p:txBody>
-      </p:sp>
-      <p:sp>
-        <p:nvSpPr>
-          <p:cNvPr id="12" name="Shape 10"/>
+              <a:t>Agency policies for privacy, public records, cybersecurity, procurement, civil rights, accessibility,.</a:t>
+            </a:r>
+            <a:endParaRPr lang="en-US" sz="1550" dirty="0"/>
+          </a:p>
+        </p:txBody>
+      </p:sp>
+      <p:sp>
+        <p:nvSpPr>
+          <p:cNvPr id="13" name="Shape 11"/>
           <p:cNvSpPr/>
           <p:nvPr/>
         </p:nvSpPr>
@@ -11590,14 +12263,14 @@
       </p:sp>
       <p:sp>
         <p:nvSpPr>
-          <p:cNvPr id="13" name="Text 11"/>
+          <p:cNvPr id="14" name="Text 12"/>
           <p:cNvSpPr/>
           <p:nvPr/>
         </p:nvSpPr>
         <p:spPr>
           <a:xfrm>
             <a:off x="8074152" y="3666744"/>
-            <a:ext cx="2825496" cy="201168"/>
+            <a:ext cx="2825496" cy="256032"/>
           </a:xfrm>
           <a:prstGeom prst="rect">
             <a:avLst/>
@@ -11613,7 +12286,7 @@
               <a:buNone/>
             </a:pPr>
             <a:r>
-              <a:rPr lang="en-US" sz="950" b="1" dirty="0">
+              <a:rPr lang="en-US" sz="1300" b="1" dirty="0">
                 <a:solidFill>
                   <a:srgbClr val="0068B7"/>
                 </a:solidFill>
@@ -11623,20 +12296,20 @@
               </a:rPr>
               <a:t>Use this for</a:t>
             </a:r>
-            <a:endParaRPr lang="en-US" sz="950" dirty="0"/>
-          </a:p>
-        </p:txBody>
-      </p:sp>
-      <p:sp>
-        <p:nvSpPr>
-          <p:cNvPr id="14" name="Text 12"/>
-          <p:cNvSpPr/>
-          <p:nvPr/>
-        </p:nvSpPr>
-        <p:spPr>
-          <a:xfrm>
-            <a:off x="8074152" y="3959352"/>
-            <a:ext cx="2825496" cy="1170432"/>
+            <a:endParaRPr lang="en-US" sz="1300" dirty="0"/>
+          </a:p>
+        </p:txBody>
+      </p:sp>
+      <p:sp>
+        <p:nvSpPr>
+          <p:cNvPr id="15" name="Text 13"/>
+          <p:cNvSpPr/>
+          <p:nvPr/>
+        </p:nvSpPr>
+        <p:spPr>
+          <a:xfrm>
+            <a:off x="8074152" y="4023360"/>
+            <a:ext cx="2825496" cy="1097280"/>
           </a:xfrm>
           <a:prstGeom prst="rect">
             <a:avLst/>
@@ -11654,7 +12327,7 @@
               <a:buNone/>
             </a:pPr>
             <a:r>
-              <a:rPr lang="en-US" sz="1250" dirty="0">
+              <a:rPr lang="en-US" sz="1550" dirty="0">
                 <a:solidFill>
                   <a:srgbClr val="17364A"/>
                 </a:solidFill>
@@ -11664,7 +12337,7 @@
               </a:rPr>
               <a:t>Connect the concept to public health decisions, safeguards, documentation, or implementation work.</a:t>
             </a:r>
-            <a:endParaRPr lang="en-US" sz="1250" dirty="0"/>
+            <a:endParaRPr lang="en-US" sz="1550" dirty="0"/>
           </a:p>
         </p:txBody>
       </p:sp>
@@ -11861,7 +12534,7 @@
                 <a:ea typeface="Aptos" pitchFamily="34" charset="-122"/>
                 <a:cs typeface="Aptos" pitchFamily="34" charset="-120"/>
               </a:rPr>
-              <a:t>© Paula Soper</a:t>
+              <a:t>Â© Paula Soper</a:t>
             </a:r>
             <a:endParaRPr lang="en-US" sz="800" dirty="0"/>
           </a:p>
@@ -11875,8 +12548,47 @@
         </p:nvSpPr>
         <p:spPr>
           <a:xfrm>
+            <a:off x="11137392" y="6510528"/>
+            <a:ext cx="411480" cy="201168"/>
+          </a:xfrm>
+          <a:prstGeom prst="rect">
+            <a:avLst/>
+          </a:prstGeom>
+          <a:noFill/>
+          <a:ln/>
+        </p:spPr>
+        <p:txBody>
+          <a:bodyPr wrap="square" lIns="0" tIns="0" rIns="0" bIns="0" rtlCol="0" anchor="ctr"/>
+          <a:lstStyle/>
+          <a:p>
+            <a:pPr algn="r" indent="0" marL="0">
+              <a:buNone/>
+            </a:pPr>
+            <a:r>
+              <a:rPr lang="en-US" sz="900" dirty="0">
+                <a:solidFill>
+                  <a:srgbClr val="5F7181"/>
+                </a:solidFill>
+                <a:latin typeface="Aptos" pitchFamily="34" charset="0"/>
+                <a:ea typeface="Aptos" pitchFamily="34" charset="-122"/>
+                <a:cs typeface="Aptos" pitchFamily="34" charset="-120"/>
+              </a:rPr>
+              <a:t>3</a:t>
+            </a:r>
+            <a:endParaRPr lang="en-US" sz="900" dirty="0"/>
+          </a:p>
+        </p:txBody>
+      </p:sp>
+      <p:sp>
+        <p:nvSpPr>
+          <p:cNvPr id="8" name="Text 6"/>
+          <p:cNvSpPr/>
+          <p:nvPr/>
+        </p:nvSpPr>
+        <p:spPr>
+          <a:xfrm>
             <a:off x="640080" y="658368"/>
-            <a:ext cx="10881360" cy="566928"/>
+            <a:ext cx="10881360" cy="713232"/>
           </a:xfrm>
           <a:prstGeom prst="rect">
             <a:avLst/>
@@ -11894,7 +12606,7 @@
               <a:buNone/>
             </a:pPr>
             <a:r>
-              <a:rPr lang="en-US" sz="2700" b="1" dirty="0">
+              <a:rPr lang="en-US" sz="3400" b="1" dirty="0">
                 <a:solidFill>
                   <a:srgbClr val="003A63"/>
                 </a:solidFill>
@@ -11904,20 +12616,20 @@
               </a:rPr>
               <a:t>How this module connects to the playbook</a:t>
             </a:r>
-            <a:endParaRPr lang="en-US" sz="2700" dirty="0"/>
-          </a:p>
-        </p:txBody>
-      </p:sp>
-      <p:sp>
-        <p:nvSpPr>
-          <p:cNvPr id="8" name="Text 6"/>
-          <p:cNvSpPr/>
-          <p:nvPr/>
-        </p:nvSpPr>
-        <p:spPr>
-          <a:xfrm>
-            <a:off x="868680" y="1417320"/>
-            <a:ext cx="6903720" cy="4480560"/>
+            <a:endParaRPr lang="en-US" sz="3400" dirty="0"/>
+          </a:p>
+        </p:txBody>
+      </p:sp>
+      <p:sp>
+        <p:nvSpPr>
+          <p:cNvPr id="9" name="Text 7"/>
+          <p:cNvSpPr/>
+          <p:nvPr/>
+        </p:nvSpPr>
+        <p:spPr>
+          <a:xfrm>
+            <a:off x="868680" y="1508760"/>
+            <a:ext cx="6812280" cy="3977640"/>
           </a:xfrm>
           <a:prstGeom prst="rect">
             <a:avLst/>
@@ -11932,7 +12644,7 @@
           <a:lstStyle/>
           <a:p>
             <a:r>
-              <a:rPr lang="en-US" sz="1540" dirty="0">
+              <a:rPr lang="en-US" sz="1900" dirty="0">
                 <a:solidFill>
                   <a:srgbClr val="17364A"/>
                 </a:solidFill>
@@ -11940,13 +12652,13 @@
                 <a:ea typeface="Aptos" pitchFamily="34" charset="-122"/>
                 <a:cs typeface="Aptos" pitchFamily="34" charset="-120"/>
               </a:rPr>
-              <a:t>Play 11: Build and Deploy AI Solutions - This lesson informs Play 11 by helping learners connect the lesson topic to build and deploy.</a:t>
-            </a:r>
-            <a:endParaRPr lang="en-US" sz="1540" dirty="0"/>
-          </a:p>
-          <a:p>
-            <a:r>
-              <a:rPr lang="en-US" sz="1540" dirty="0">
+              <a:t>Play 11: Build and Deploy AI Solutions - This lesson informs Play 11 by helping learners connect the lesson.</a:t>
+            </a:r>
+            <a:endParaRPr lang="en-US" sz="1900" dirty="0"/>
+          </a:p>
+          <a:p>
+            <a:r>
+              <a:rPr lang="en-US" sz="1900" dirty="0">
                 <a:solidFill>
                   <a:srgbClr val="17364A"/>
                 </a:solidFill>
@@ -11954,13 +12666,13 @@
                 <a:ea typeface="Aptos" pitchFamily="34" charset="-122"/>
                 <a:cs typeface="Aptos" pitchFamily="34" charset="-120"/>
               </a:rPr>
-              <a:t>Play 2: Readiness Assessment - This lesson informs Play 2 by helping learners connect the lesson topic to readiness assessment work.</a:t>
-            </a:r>
-            <a:endParaRPr lang="en-US" sz="1540" dirty="0"/>
-          </a:p>
-          <a:p>
-            <a:r>
-              <a:rPr lang="en-US" sz="1540" dirty="0">
+              <a:t>Play 2: Readiness Assessment - This lesson informs Play 2 by helping learners connect the lesson topic to.</a:t>
+            </a:r>
+            <a:endParaRPr lang="en-US" sz="1900" dirty="0"/>
+          </a:p>
+          <a:p>
+            <a:r>
+              <a:rPr lang="en-US" sz="1900" dirty="0">
                 <a:solidFill>
                   <a:srgbClr val="17364A"/>
                 </a:solidFill>
@@ -11968,13 +12680,13 @@
                 <a:ea typeface="Aptos" pitchFamily="34" charset="-122"/>
                 <a:cs typeface="Aptos" pitchFamily="34" charset="-120"/>
               </a:rPr>
-              <a:t>Play 3: Establish AI Governance - This lesson informs Play 3 by helping learners connect the lesson topic to establish ai governance.</a:t>
-            </a:r>
-            <a:endParaRPr lang="en-US" sz="1540" dirty="0"/>
-          </a:p>
-          <a:p>
-            <a:r>
-              <a:rPr lang="en-US" sz="1540" dirty="0">
+              <a:t>Play 3: Establish AI Governance - This lesson informs Play 3 by helping learners connect the lesson topic to.</a:t>
+            </a:r>
+            <a:endParaRPr lang="en-US" sz="1900" dirty="0"/>
+          </a:p>
+          <a:p>
+            <a:r>
+              <a:rPr lang="en-US" sz="1900" dirty="0">
                 <a:solidFill>
                   <a:srgbClr val="17364A"/>
                 </a:solidFill>
@@ -11982,15 +12694,15 @@
                 <a:ea typeface="Aptos" pitchFamily="34" charset="-122"/>
                 <a:cs typeface="Aptos" pitchFamily="34" charset="-120"/>
               </a:rPr>
-              <a:t>Play 1: Vision &amp; Guardrails - This lesson informs Play 1 by helping learners connect the lesson topic to vision &amp; guardrails work in.</a:t>
-            </a:r>
-            <a:endParaRPr lang="en-US" sz="1540" dirty="0"/>
-          </a:p>
-        </p:txBody>
-      </p:sp>
-      <p:sp>
-        <p:nvSpPr>
-          <p:cNvPr id="9" name="Shape 7"/>
+              <a:t>Play 1: Vision &amp; Guardrails - This lesson informs Play 1 by helping learners connect the lesson topic to.</a:t>
+            </a:r>
+            <a:endParaRPr lang="en-US" sz="1900" dirty="0"/>
+          </a:p>
+        </p:txBody>
+      </p:sp>
+      <p:sp>
+        <p:nvSpPr>
+          <p:cNvPr id="10" name="Shape 8"/>
           <p:cNvSpPr/>
           <p:nvPr/>
         </p:nvSpPr>
@@ -12017,14 +12729,14 @@
       </p:sp>
       <p:sp>
         <p:nvSpPr>
-          <p:cNvPr id="10" name="Text 8"/>
+          <p:cNvPr id="11" name="Text 9"/>
           <p:cNvSpPr/>
           <p:nvPr/>
         </p:nvSpPr>
         <p:spPr>
           <a:xfrm>
             <a:off x="8211312" y="1563624"/>
-            <a:ext cx="2734056" cy="201168"/>
+            <a:ext cx="2734056" cy="256032"/>
           </a:xfrm>
           <a:prstGeom prst="rect">
             <a:avLst/>
@@ -12040,7 +12752,7 @@
               <a:buNone/>
             </a:pPr>
             <a:r>
-              <a:rPr lang="en-US" sz="950" b="1" dirty="0">
+              <a:rPr lang="en-US" sz="1300" b="1" dirty="0">
                 <a:solidFill>
                   <a:srgbClr val="0068B7"/>
                 </a:solidFill>
@@ -12050,20 +12762,20 @@
               </a:rPr>
               <a:t>Apply the lesson</a:t>
             </a:r>
-            <a:endParaRPr lang="en-US" sz="950" dirty="0"/>
-          </a:p>
-        </p:txBody>
-      </p:sp>
-      <p:sp>
-        <p:nvSpPr>
-          <p:cNvPr id="11" name="Text 9"/>
-          <p:cNvSpPr/>
-          <p:nvPr/>
-        </p:nvSpPr>
-        <p:spPr>
-          <a:xfrm>
-            <a:off x="8211312" y="1856232"/>
-            <a:ext cx="2734056" cy="1536192"/>
+            <a:endParaRPr lang="en-US" sz="1300" dirty="0"/>
+          </a:p>
+        </p:txBody>
+      </p:sp>
+      <p:sp>
+        <p:nvSpPr>
+          <p:cNvPr id="12" name="Text 10"/>
+          <p:cNvSpPr/>
+          <p:nvPr/>
+        </p:nvSpPr>
+        <p:spPr>
+          <a:xfrm>
+            <a:off x="8211312" y="1920240"/>
+            <a:ext cx="2734056" cy="1463040"/>
           </a:xfrm>
           <a:prstGeom prst="rect">
             <a:avLst/>
@@ -12081,7 +12793,7 @@
               <a:buNone/>
             </a:pPr>
             <a:r>
-              <a:rPr lang="en-US" sz="1250" dirty="0">
+              <a:rPr lang="en-US" sz="1550" dirty="0">
                 <a:solidFill>
                   <a:srgbClr val="17364A"/>
                 </a:solidFill>
@@ -12091,32 +12803,32 @@
               </a:rPr>
               <a:t>Use the related plays to identify decisions, participants, timing, approvals, and documentation needed for responsible implementation.</a:t>
             </a:r>
-            <a:endParaRPr lang="en-US" sz="1250" dirty="0"/>
-          </a:p>
-        </p:txBody>
-      </p:sp>
-      <p:sp>
-        <p:nvSpPr>
-          <p:cNvPr id="12" name="Shape 10"/>
-          <p:cNvSpPr/>
-          <p:nvPr/>
-        </p:nvSpPr>
-        <p:spPr>
-          <a:xfrm>
-            <a:off x="8046720" y="3794760"/>
-            <a:ext cx="3063240" cy="1508760"/>
+            <a:endParaRPr lang="en-US" sz="1550" dirty="0"/>
+          </a:p>
+        </p:txBody>
+      </p:sp>
+      <p:sp>
+        <p:nvSpPr>
+          <p:cNvPr id="13" name="Shape 11"/>
+          <p:cNvSpPr/>
+          <p:nvPr/>
+        </p:nvSpPr>
+        <p:spPr>
+          <a:xfrm>
+            <a:off x="7818120" y="3977640"/>
+            <a:ext cx="972312" cy="749808"/>
           </a:xfrm>
           <a:prstGeom prst="roundRect">
             <a:avLst>
-              <a:gd name="adj" fmla="val 7273"/>
+              <a:gd name="adj" fmla="val 14634"/>
             </a:avLst>
           </a:prstGeom>
           <a:solidFill>
-            <a:srgbClr val="FFF4D9"/>
+            <a:srgbClr val="0068B7"/>
           </a:solidFill>
           <a:ln w="12700">
             <a:solidFill>
-              <a:srgbClr val="B9D7E6"/>
+              <a:srgbClr val="0068B7"/>
             </a:solidFill>
             <a:prstDash val="solid"/>
           </a:ln>
@@ -12124,81 +12836,256 @@
       </p:sp>
       <p:sp>
         <p:nvSpPr>
-          <p:cNvPr id="13" name="Text 11"/>
-          <p:cNvSpPr/>
-          <p:nvPr/>
-        </p:nvSpPr>
-        <p:spPr>
-          <a:xfrm>
-            <a:off x="8211312" y="3941064"/>
-            <a:ext cx="2734056" cy="201168"/>
-          </a:xfrm>
-          <a:prstGeom prst="rect">
-            <a:avLst/>
-          </a:prstGeom>
-          <a:noFill/>
-          <a:ln/>
-        </p:spPr>
-        <p:txBody>
-          <a:bodyPr wrap="square" lIns="0" tIns="0" rIns="0" bIns="0" rtlCol="0" anchor="ctr"/>
-          <a:lstStyle/>
-          <a:p>
-            <a:pPr indent="0" marL="0">
-              <a:buNone/>
-            </a:pPr>
-            <a:r>
-              <a:rPr lang="en-US" sz="950" b="1" dirty="0">
-                <a:solidFill>
-                  <a:srgbClr val="0068B7"/>
-                </a:solidFill>
-                <a:latin typeface="Aptos" pitchFamily="34" charset="0"/>
-                <a:ea typeface="Aptos" pitchFamily="34" charset="-122"/>
-                <a:cs typeface="Aptos" pitchFamily="34" charset="-120"/>
-              </a:rPr>
-              <a:t>Keep in mind</a:t>
-            </a:r>
-            <a:endParaRPr lang="en-US" sz="950" dirty="0"/>
-          </a:p>
-        </p:txBody>
-      </p:sp>
-      <p:sp>
-        <p:nvSpPr>
           <p:cNvPr id="14" name="Text 12"/>
           <p:cNvSpPr/>
           <p:nvPr/>
         </p:nvSpPr>
         <p:spPr>
           <a:xfrm>
-            <a:off x="8211312" y="4233672"/>
-            <a:ext cx="2734056" cy="941832"/>
-          </a:xfrm>
-          <a:prstGeom prst="rect">
-            <a:avLst/>
-          </a:prstGeom>
-          <a:noFill/>
-          <a:ln/>
-        </p:spPr>
-        <p:txBody>
-          <a:bodyPr wrap="square" lIns="0" tIns="0" rIns="0" bIns="0" rtlCol="0" anchor="t">
+            <a:off x="7891272" y="4169664"/>
+            <a:ext cx="826008" cy="310896"/>
+          </a:xfrm>
+          <a:prstGeom prst="rect">
+            <a:avLst/>
+          </a:prstGeom>
+          <a:noFill/>
+          <a:ln/>
+        </p:spPr>
+        <p:txBody>
+          <a:bodyPr wrap="square" lIns="0" tIns="0" rIns="0" bIns="0" rtlCol="0" anchor="ctr">
             <a:normAutofit/>
           </a:bodyPr>
           <a:lstStyle/>
           <a:p>
-            <a:pPr indent="0" marL="0">
-              <a:buNone/>
-            </a:pPr>
-            <a:r>
-              <a:rPr lang="en-US" sz="1250" dirty="0">
-                <a:solidFill>
-                  <a:srgbClr val="17364A"/>
-                </a:solidFill>
-                <a:latin typeface="Aptos" pitchFamily="34" charset="0"/>
-                <a:ea typeface="Aptos" pitchFamily="34" charset="-122"/>
-                <a:cs typeface="Aptos" pitchFamily="34" charset="-120"/>
-              </a:rPr>
-              <a:t>The playbook connection helps turn training into agency work, not just individual knowledge.</a:t>
-            </a:r>
-            <a:endParaRPr lang="en-US" sz="1250" dirty="0"/>
+            <a:pPr algn="ctr" indent="0" marL="0">
+              <a:buNone/>
+            </a:pPr>
+            <a:r>
+              <a:rPr lang="en-US" sz="1500" b="1" dirty="0">
+                <a:solidFill>
+                  <a:srgbClr val="FFFFFF"/>
+                </a:solidFill>
+                <a:latin typeface="Aptos" pitchFamily="34" charset="0"/>
+                <a:ea typeface="Aptos" pitchFamily="34" charset="-122"/>
+                <a:cs typeface="Aptos" pitchFamily="34" charset="-120"/>
+              </a:rPr>
+              <a:t>Lesson</a:t>
+            </a:r>
+            <a:endParaRPr lang="en-US" sz="1500" dirty="0"/>
+          </a:p>
+        </p:txBody>
+      </p:sp>
+      <p:sp>
+        <p:nvSpPr>
+          <p:cNvPr id="15" name="Text 13"/>
+          <p:cNvSpPr/>
+          <p:nvPr/>
+        </p:nvSpPr>
+        <p:spPr>
+          <a:xfrm>
+            <a:off x="8817864" y="4187952"/>
+            <a:ext cx="201168" cy="256032"/>
+          </a:xfrm>
+          <a:prstGeom prst="rect">
+            <a:avLst/>
+          </a:prstGeom>
+          <a:noFill/>
+          <a:ln/>
+        </p:spPr>
+        <p:txBody>
+          <a:bodyPr wrap="square" lIns="0" tIns="0" rIns="0" bIns="0" rtlCol="0" anchor="ctr"/>
+          <a:lstStyle/>
+          <a:p>
+            <a:pPr algn="ctr" indent="0" marL="0">
+              <a:buNone/>
+            </a:pPr>
+            <a:r>
+              <a:rPr lang="en-US" sz="1800" b="1" dirty="0">
+                <a:solidFill>
+                  <a:srgbClr val="0068B7"/>
+                </a:solidFill>
+                <a:latin typeface="Aptos" pitchFamily="34" charset="0"/>
+                <a:ea typeface="Aptos" pitchFamily="34" charset="-122"/>
+                <a:cs typeface="Aptos" pitchFamily="34" charset="-120"/>
+              </a:rPr>
+              <a:t>â†’</a:t>
+            </a:r>
+            <a:endParaRPr lang="en-US" sz="1800" dirty="0"/>
+          </a:p>
+        </p:txBody>
+      </p:sp>
+      <p:sp>
+        <p:nvSpPr>
+          <p:cNvPr id="16" name="Shape 14"/>
+          <p:cNvSpPr/>
+          <p:nvPr/>
+        </p:nvSpPr>
+        <p:spPr>
+          <a:xfrm>
+            <a:off x="9046464" y="3977640"/>
+            <a:ext cx="972312" cy="749808"/>
+          </a:xfrm>
+          <a:prstGeom prst="roundRect">
+            <a:avLst>
+              <a:gd name="adj" fmla="val 14634"/>
+            </a:avLst>
+          </a:prstGeom>
+          <a:solidFill>
+            <a:srgbClr val="2F8A28"/>
+          </a:solidFill>
+          <a:ln w="12700">
+            <a:solidFill>
+              <a:srgbClr val="2F8A28"/>
+            </a:solidFill>
+            <a:prstDash val="solid"/>
+          </a:ln>
+        </p:spPr>
+      </p:sp>
+      <p:sp>
+        <p:nvSpPr>
+          <p:cNvPr id="17" name="Text 15"/>
+          <p:cNvSpPr/>
+          <p:nvPr/>
+        </p:nvSpPr>
+        <p:spPr>
+          <a:xfrm>
+            <a:off x="9119616" y="4169664"/>
+            <a:ext cx="826008" cy="310896"/>
+          </a:xfrm>
+          <a:prstGeom prst="rect">
+            <a:avLst/>
+          </a:prstGeom>
+          <a:noFill/>
+          <a:ln/>
+        </p:spPr>
+        <p:txBody>
+          <a:bodyPr wrap="square" lIns="0" tIns="0" rIns="0" bIns="0" rtlCol="0" anchor="ctr">
+            <a:normAutofit/>
+          </a:bodyPr>
+          <a:lstStyle/>
+          <a:p>
+            <a:pPr algn="ctr" indent="0" marL="0">
+              <a:buNone/>
+            </a:pPr>
+            <a:r>
+              <a:rPr lang="en-US" sz="1500" b="1" dirty="0">
+                <a:solidFill>
+                  <a:srgbClr val="FFFFFF"/>
+                </a:solidFill>
+                <a:latin typeface="Aptos" pitchFamily="34" charset="0"/>
+                <a:ea typeface="Aptos" pitchFamily="34" charset="-122"/>
+                <a:cs typeface="Aptos" pitchFamily="34" charset="-120"/>
+              </a:rPr>
+              <a:t>Plays</a:t>
+            </a:r>
+            <a:endParaRPr lang="en-US" sz="1500" dirty="0"/>
+          </a:p>
+        </p:txBody>
+      </p:sp>
+      <p:sp>
+        <p:nvSpPr>
+          <p:cNvPr id="18" name="Text 16"/>
+          <p:cNvSpPr/>
+          <p:nvPr/>
+        </p:nvSpPr>
+        <p:spPr>
+          <a:xfrm>
+            <a:off x="10046208" y="4187952"/>
+            <a:ext cx="201168" cy="256032"/>
+          </a:xfrm>
+          <a:prstGeom prst="rect">
+            <a:avLst/>
+          </a:prstGeom>
+          <a:noFill/>
+          <a:ln/>
+        </p:spPr>
+        <p:txBody>
+          <a:bodyPr wrap="square" lIns="0" tIns="0" rIns="0" bIns="0" rtlCol="0" anchor="ctr"/>
+          <a:lstStyle/>
+          <a:p>
+            <a:pPr algn="ctr" indent="0" marL="0">
+              <a:buNone/>
+            </a:pPr>
+            <a:r>
+              <a:rPr lang="en-US" sz="1800" b="1" dirty="0">
+                <a:solidFill>
+                  <a:srgbClr val="0068B7"/>
+                </a:solidFill>
+                <a:latin typeface="Aptos" pitchFamily="34" charset="0"/>
+                <a:ea typeface="Aptos" pitchFamily="34" charset="-122"/>
+                <a:cs typeface="Aptos" pitchFamily="34" charset="-120"/>
+              </a:rPr>
+              <a:t>â†’</a:t>
+            </a:r>
+            <a:endParaRPr lang="en-US" sz="1800" dirty="0"/>
+          </a:p>
+        </p:txBody>
+      </p:sp>
+      <p:sp>
+        <p:nvSpPr>
+          <p:cNvPr id="19" name="Shape 17"/>
+          <p:cNvSpPr/>
+          <p:nvPr/>
+        </p:nvSpPr>
+        <p:spPr>
+          <a:xfrm>
+            <a:off x="10274808" y="3977640"/>
+            <a:ext cx="972312" cy="749808"/>
+          </a:xfrm>
+          <a:prstGeom prst="roundRect">
+            <a:avLst>
+              <a:gd name="adj" fmla="val 14634"/>
+            </a:avLst>
+          </a:prstGeom>
+          <a:solidFill>
+            <a:srgbClr val="6A4CA3"/>
+          </a:solidFill>
+          <a:ln w="12700">
+            <a:solidFill>
+              <a:srgbClr val="6A4CA3"/>
+            </a:solidFill>
+            <a:prstDash val="solid"/>
+          </a:ln>
+        </p:spPr>
+      </p:sp>
+      <p:sp>
+        <p:nvSpPr>
+          <p:cNvPr id="20" name="Text 18"/>
+          <p:cNvSpPr/>
+          <p:nvPr/>
+        </p:nvSpPr>
+        <p:spPr>
+          <a:xfrm>
+            <a:off x="10347960" y="4169664"/>
+            <a:ext cx="826008" cy="310896"/>
+          </a:xfrm>
+          <a:prstGeom prst="rect">
+            <a:avLst/>
+          </a:prstGeom>
+          <a:noFill/>
+          <a:ln/>
+        </p:spPr>
+        <p:txBody>
+          <a:bodyPr wrap="square" lIns="0" tIns="0" rIns="0" bIns="0" rtlCol="0" anchor="ctr">
+            <a:normAutofit/>
+          </a:bodyPr>
+          <a:lstStyle/>
+          <a:p>
+            <a:pPr algn="ctr" indent="0" marL="0">
+              <a:buNone/>
+            </a:pPr>
+            <a:r>
+              <a:rPr lang="en-US" sz="1500" b="1" dirty="0">
+                <a:solidFill>
+                  <a:srgbClr val="FFFFFF"/>
+                </a:solidFill>
+                <a:latin typeface="Aptos" pitchFamily="34" charset="0"/>
+                <a:ea typeface="Aptos" pitchFamily="34" charset="-122"/>
+                <a:cs typeface="Aptos" pitchFamily="34" charset="-120"/>
+              </a:rPr>
+              <a:t>Action</a:t>
+            </a:r>
+            <a:endParaRPr lang="en-US" sz="1500" dirty="0"/>
           </a:p>
         </p:txBody>
       </p:sp>
@@ -12395,7 +13282,7 @@
                 <a:ea typeface="Aptos" pitchFamily="34" charset="-122"/>
                 <a:cs typeface="Aptos" pitchFamily="34" charset="-120"/>
               </a:rPr>
-              <a:t>© Paula Soper</a:t>
+              <a:t>Â© Paula Soper</a:t>
             </a:r>
             <a:endParaRPr lang="en-US" sz="800" dirty="0"/>
           </a:p>
@@ -12409,8 +13296,47 @@
         </p:nvSpPr>
         <p:spPr>
           <a:xfrm>
+            <a:off x="11137392" y="6510528"/>
+            <a:ext cx="411480" cy="201168"/>
+          </a:xfrm>
+          <a:prstGeom prst="rect">
+            <a:avLst/>
+          </a:prstGeom>
+          <a:noFill/>
+          <a:ln/>
+        </p:spPr>
+        <p:txBody>
+          <a:bodyPr wrap="square" lIns="0" tIns="0" rIns="0" bIns="0" rtlCol="0" anchor="ctr"/>
+          <a:lstStyle/>
+          <a:p>
+            <a:pPr algn="r" indent="0" marL="0">
+              <a:buNone/>
+            </a:pPr>
+            <a:r>
+              <a:rPr lang="en-US" sz="900" dirty="0">
+                <a:solidFill>
+                  <a:srgbClr val="5F7181"/>
+                </a:solidFill>
+                <a:latin typeface="Aptos" pitchFamily="34" charset="0"/>
+                <a:ea typeface="Aptos" pitchFamily="34" charset="-122"/>
+                <a:cs typeface="Aptos" pitchFamily="34" charset="-120"/>
+              </a:rPr>
+              <a:t>4</a:t>
+            </a:r>
+            <a:endParaRPr lang="en-US" sz="900" dirty="0"/>
+          </a:p>
+        </p:txBody>
+      </p:sp>
+      <p:sp>
+        <p:nvSpPr>
+          <p:cNvPr id="8" name="Text 6"/>
+          <p:cNvSpPr/>
+          <p:nvPr/>
+        </p:nvSpPr>
+        <p:spPr>
+          <a:xfrm>
             <a:off x="640080" y="658368"/>
-            <a:ext cx="10881360" cy="566928"/>
+            <a:ext cx="10881360" cy="713232"/>
           </a:xfrm>
           <a:prstGeom prst="rect">
             <a:avLst/>
@@ -12428,7 +13354,7 @@
               <a:buNone/>
             </a:pPr>
             <a:r>
-              <a:rPr lang="en-US" sz="2700" b="1" dirty="0">
+              <a:rPr lang="en-US" sz="3400" b="1" dirty="0">
                 <a:solidFill>
                   <a:srgbClr val="003A63"/>
                 </a:solidFill>
@@ -12438,20 +13364,20 @@
               </a:rPr>
               <a:t>Related toolkit resources</a:t>
             </a:r>
-            <a:endParaRPr lang="en-US" sz="2700" dirty="0"/>
-          </a:p>
-        </p:txBody>
-      </p:sp>
-      <p:sp>
-        <p:nvSpPr>
-          <p:cNvPr id="8" name="Text 6"/>
-          <p:cNvSpPr/>
-          <p:nvPr/>
-        </p:nvSpPr>
-        <p:spPr>
-          <a:xfrm>
-            <a:off x="868680" y="1417320"/>
-            <a:ext cx="6903720" cy="4480560"/>
+            <a:endParaRPr lang="en-US" sz="3400" dirty="0"/>
+          </a:p>
+        </p:txBody>
+      </p:sp>
+      <p:sp>
+        <p:nvSpPr>
+          <p:cNvPr id="9" name="Text 7"/>
+          <p:cNvSpPr/>
+          <p:nvPr/>
+        </p:nvSpPr>
+        <p:spPr>
+          <a:xfrm>
+            <a:off x="868680" y="1508760"/>
+            <a:ext cx="6812280" cy="3977640"/>
           </a:xfrm>
           <a:prstGeom prst="rect">
             <a:avLst/>
@@ -12466,7 +13392,7 @@
           <a:lstStyle/>
           <a:p>
             <a:r>
-              <a:rPr lang="en-US" sz="1460" dirty="0">
+              <a:rPr lang="en-US" sz="1850" dirty="0">
                 <a:solidFill>
                   <a:srgbClr val="17364A"/>
                 </a:solidFill>
@@ -12474,13 +13400,13 @@
                 <a:ea typeface="Aptos" pitchFamily="34" charset="-122"/>
                 <a:cs typeface="Aptos" pitchFamily="34" charset="-120"/>
               </a:rPr>
-              <a:t>Tool 4: AI Policy Landscape Scan (Worksheet) - Use AI Policy Landscape Scan to translate this lesson into a documented public health.</a:t>
-            </a:r>
-            <a:endParaRPr lang="en-US" sz="1460" dirty="0"/>
-          </a:p>
-          <a:p>
-            <a:r>
-              <a:rPr lang="en-US" sz="1460" dirty="0">
+              <a:t>Tool 4: AI Policy Landscape Scan (Worksheet) - Use AI Policy Landscape Scan to translate this lesson into a.</a:t>
+            </a:r>
+            <a:endParaRPr lang="en-US" sz="1850" dirty="0"/>
+          </a:p>
+          <a:p>
+            <a:r>
+              <a:rPr lang="en-US" sz="1850" dirty="0">
                 <a:solidFill>
                   <a:srgbClr val="17364A"/>
                 </a:solidFill>
@@ -12488,13 +13414,13 @@
                 <a:ea typeface="Aptos" pitchFamily="34" charset="-122"/>
                 <a:cs typeface="Aptos" pitchFamily="34" charset="-120"/>
               </a:rPr>
-              <a:t>Tool 5: AI Environmental and Resource Impact Review (Checklist) - Use AI Environmental and Resource Impact Review to translate this.</a:t>
-            </a:r>
-            <a:endParaRPr lang="en-US" sz="1460" dirty="0"/>
-          </a:p>
-          <a:p>
-            <a:r>
-              <a:rPr lang="en-US" sz="1460" dirty="0">
+              <a:t>Tool 5: AI Environmental and Resource Impact Review (Checklist) - Use AI Environmental and Resource Impact.</a:t>
+            </a:r>
+            <a:endParaRPr lang="en-US" sz="1850" dirty="0"/>
+          </a:p>
+          <a:p>
+            <a:r>
+              <a:rPr lang="en-US" sz="1850" dirty="0">
                 <a:solidFill>
                   <a:srgbClr val="17364A"/>
                 </a:solidFill>
@@ -12502,13 +13428,13 @@
                 <a:ea typeface="Aptos" pitchFamily="34" charset="-122"/>
                 <a:cs typeface="Aptos" pitchFamily="34" charset="-120"/>
               </a:rPr>
-              <a:t>Tool 6: Human-Centered AI Decision Rule Checklist (Checklist) - Use Human-Centered AI Decision Rule Checklist to translate this.</a:t>
-            </a:r>
-            <a:endParaRPr lang="en-US" sz="1460" dirty="0"/>
-          </a:p>
-          <a:p>
-            <a:r>
-              <a:rPr lang="en-US" sz="1460" dirty="0">
+              <a:t>Tool 6: Human-Centered AI Decision Rule Checklist (Checklist) - Use Human-Centered AI Decision Rule.</a:t>
+            </a:r>
+            <a:endParaRPr lang="en-US" sz="1850" dirty="0"/>
+          </a:p>
+          <a:p>
+            <a:r>
+              <a:rPr lang="en-US" sz="1850" dirty="0">
                 <a:solidFill>
                   <a:srgbClr val="17364A"/>
                 </a:solidFill>
@@ -12516,29 +13442,15 @@
                 <a:ea typeface="Aptos" pitchFamily="34" charset="-122"/>
                 <a:cs typeface="Aptos" pitchFamily="34" charset="-120"/>
               </a:rPr>
-              <a:t>Tool 8: AI Project Charter (Planning) - Use AI Project Charter to translate this lesson into a documented public health AI planning,.</a:t>
-            </a:r>
-            <a:endParaRPr lang="en-US" sz="1460" dirty="0"/>
-          </a:p>
-          <a:p>
-            <a:r>
-              <a:rPr lang="en-US" sz="1460" dirty="0">
-                <a:solidFill>
-                  <a:srgbClr val="17364A"/>
-                </a:solidFill>
-                <a:latin typeface="Aptos" pitchFamily="34" charset="0"/>
-                <a:ea typeface="Aptos" pitchFamily="34" charset="-122"/>
-                <a:cs typeface="Aptos" pitchFamily="34" charset="-120"/>
-              </a:rPr>
-              <a:t>Tool 9: Data Quality Assessment Checklist (Checklist) - Use this tool to complete or strengthen the practical exercise for the module.</a:t>
-            </a:r>
-            <a:endParaRPr lang="en-US" sz="1460" dirty="0"/>
-          </a:p>
-        </p:txBody>
-      </p:sp>
-      <p:sp>
-        <p:nvSpPr>
-          <p:cNvPr id="9" name="Shape 7"/>
+              <a:t>Tool 8: AI Project Charter (Planning) - Use AI Project Charter to translate this lesson into a documented.</a:t>
+            </a:r>
+            <a:endParaRPr lang="en-US" sz="1850" dirty="0"/>
+          </a:p>
+        </p:txBody>
+      </p:sp>
+      <p:sp>
+        <p:nvSpPr>
+          <p:cNvPr id="10" name="Shape 8"/>
           <p:cNvSpPr/>
           <p:nvPr/>
         </p:nvSpPr>
@@ -12565,14 +13477,14 @@
       </p:sp>
       <p:sp>
         <p:nvSpPr>
-          <p:cNvPr id="10" name="Text 8"/>
+          <p:cNvPr id="11" name="Text 9"/>
           <p:cNvSpPr/>
           <p:nvPr/>
         </p:nvSpPr>
         <p:spPr>
           <a:xfrm>
             <a:off x="8211312" y="1563624"/>
-            <a:ext cx="2734056" cy="201168"/>
+            <a:ext cx="2734056" cy="256032"/>
           </a:xfrm>
           <a:prstGeom prst="rect">
             <a:avLst/>
@@ -12588,7 +13500,7 @@
               <a:buNone/>
             </a:pPr>
             <a:r>
-              <a:rPr lang="en-US" sz="950" b="1" dirty="0">
+              <a:rPr lang="en-US" sz="1300" b="1" dirty="0">
                 <a:solidFill>
                   <a:srgbClr val="0068B7"/>
                 </a:solidFill>
@@ -12598,20 +13510,20 @@
               </a:rPr>
               <a:t>Use the tools</a:t>
             </a:r>
-            <a:endParaRPr lang="en-US" sz="950" dirty="0"/>
-          </a:p>
-        </p:txBody>
-      </p:sp>
-      <p:sp>
-        <p:nvSpPr>
-          <p:cNvPr id="11" name="Text 9"/>
-          <p:cNvSpPr/>
-          <p:nvPr/>
-        </p:nvSpPr>
-        <p:spPr>
-          <a:xfrm>
-            <a:off x="8211312" y="1856232"/>
-            <a:ext cx="2734056" cy="1536192"/>
+            <a:endParaRPr lang="en-US" sz="1300" dirty="0"/>
+          </a:p>
+        </p:txBody>
+      </p:sp>
+      <p:sp>
+        <p:nvSpPr>
+          <p:cNvPr id="12" name="Text 10"/>
+          <p:cNvSpPr/>
+          <p:nvPr/>
+        </p:nvSpPr>
+        <p:spPr>
+          <a:xfrm>
+            <a:off x="8211312" y="1920240"/>
+            <a:ext cx="2734056" cy="1463040"/>
           </a:xfrm>
           <a:prstGeom prst="rect">
             <a:avLst/>
@@ -12629,7 +13541,7 @@
               <a:buNone/>
             </a:pPr>
             <a:r>
-              <a:rPr lang="en-US" sz="1250" dirty="0">
+              <a:rPr lang="en-US" sz="1550" dirty="0">
                 <a:solidFill>
                   <a:srgbClr val="17364A"/>
                 </a:solidFill>
@@ -12639,32 +13551,32 @@
               </a:rPr>
               <a:t>Use linked tools when your department needs a structured worksheet, template, checklist, review process, or documentation artifact.</a:t>
             </a:r>
-            <a:endParaRPr lang="en-US" sz="1250" dirty="0"/>
-          </a:p>
-        </p:txBody>
-      </p:sp>
-      <p:sp>
-        <p:nvSpPr>
-          <p:cNvPr id="12" name="Shape 10"/>
-          <p:cNvSpPr/>
-          <p:nvPr/>
-        </p:nvSpPr>
-        <p:spPr>
-          <a:xfrm>
-            <a:off x="8046720" y="3794760"/>
-            <a:ext cx="3063240" cy="1508760"/>
+            <a:endParaRPr lang="en-US" sz="1550" dirty="0"/>
+          </a:p>
+        </p:txBody>
+      </p:sp>
+      <p:sp>
+        <p:nvSpPr>
+          <p:cNvPr id="13" name="Shape 11"/>
+          <p:cNvSpPr/>
+          <p:nvPr/>
+        </p:nvSpPr>
+        <p:spPr>
+          <a:xfrm>
+            <a:off x="7818120" y="3977640"/>
+            <a:ext cx="972312" cy="749808"/>
           </a:xfrm>
           <a:prstGeom prst="roundRect">
             <a:avLst>
-              <a:gd name="adj" fmla="val 7273"/>
+              <a:gd name="adj" fmla="val 14634"/>
             </a:avLst>
           </a:prstGeom>
           <a:solidFill>
-            <a:srgbClr val="EEF8ED"/>
+            <a:srgbClr val="0068B7"/>
           </a:solidFill>
           <a:ln w="12700">
             <a:solidFill>
-              <a:srgbClr val="B9D7E6"/>
+              <a:srgbClr val="0068B7"/>
             </a:solidFill>
             <a:prstDash val="solid"/>
           </a:ln>
@@ -12672,81 +13584,256 @@
       </p:sp>
       <p:sp>
         <p:nvSpPr>
-          <p:cNvPr id="13" name="Text 11"/>
-          <p:cNvSpPr/>
-          <p:nvPr/>
-        </p:nvSpPr>
-        <p:spPr>
-          <a:xfrm>
-            <a:off x="8211312" y="3941064"/>
-            <a:ext cx="2734056" cy="201168"/>
-          </a:xfrm>
-          <a:prstGeom prst="rect">
-            <a:avLst/>
-          </a:prstGeom>
-          <a:noFill/>
-          <a:ln/>
-        </p:spPr>
-        <p:txBody>
-          <a:bodyPr wrap="square" lIns="0" tIns="0" rIns="0" bIns="0" rtlCol="0" anchor="ctr"/>
-          <a:lstStyle/>
-          <a:p>
-            <a:pPr indent="0" marL="0">
-              <a:buNone/>
-            </a:pPr>
-            <a:r>
-              <a:rPr lang="en-US" sz="950" b="1" dirty="0">
-                <a:solidFill>
-                  <a:srgbClr val="0068B7"/>
-                </a:solidFill>
-                <a:latin typeface="Aptos" pitchFamily="34" charset="0"/>
-                <a:ea typeface="Aptos" pitchFamily="34" charset="-122"/>
-                <a:cs typeface="Aptos" pitchFamily="34" charset="-120"/>
-              </a:rPr>
-              <a:t>Avoid duplication</a:t>
-            </a:r>
-            <a:endParaRPr lang="en-US" sz="950" dirty="0"/>
-          </a:p>
-        </p:txBody>
-      </p:sp>
-      <p:sp>
-        <p:nvSpPr>
           <p:cNvPr id="14" name="Text 12"/>
           <p:cNvSpPr/>
           <p:nvPr/>
         </p:nvSpPr>
         <p:spPr>
           <a:xfrm>
-            <a:off x="8211312" y="4233672"/>
-            <a:ext cx="2734056" cy="941832"/>
-          </a:xfrm>
-          <a:prstGeom prst="rect">
-            <a:avLst/>
-          </a:prstGeom>
-          <a:noFill/>
-          <a:ln/>
-        </p:spPr>
-        <p:txBody>
-          <a:bodyPr wrap="square" lIns="0" tIns="0" rIns="0" bIns="0" rtlCol="0" anchor="t">
+            <a:off x="7891272" y="4169664"/>
+            <a:ext cx="826008" cy="310896"/>
+          </a:xfrm>
+          <a:prstGeom prst="rect">
+            <a:avLst/>
+          </a:prstGeom>
+          <a:noFill/>
+          <a:ln/>
+        </p:spPr>
+        <p:txBody>
+          <a:bodyPr wrap="square" lIns="0" tIns="0" rIns="0" bIns="0" rtlCol="0" anchor="ctr">
             <a:normAutofit/>
           </a:bodyPr>
           <a:lstStyle/>
           <a:p>
-            <a:pPr indent="0" marL="0">
-              <a:buNone/>
-            </a:pPr>
-            <a:r>
-              <a:rPr lang="en-US" sz="1250" dirty="0">
-                <a:solidFill>
-                  <a:srgbClr val="17364A"/>
-                </a:solidFill>
-                <a:latin typeface="Aptos" pitchFamily="34" charset="0"/>
-                <a:ea typeface="Aptos" pitchFamily="34" charset="-122"/>
-                <a:cs typeface="Aptos" pitchFamily="34" charset="-120"/>
-              </a:rPr>
-              <a:t>If your department already has a strong equivalent tool, adapt or use the existing process instead of recreating it.</a:t>
-            </a:r>
-            <a:endParaRPr lang="en-US" sz="1250" dirty="0"/>
+            <a:pPr algn="ctr" indent="0" marL="0">
+              <a:buNone/>
+            </a:pPr>
+            <a:r>
+              <a:rPr lang="en-US" sz="1500" b="1" dirty="0">
+                <a:solidFill>
+                  <a:srgbClr val="FFFFFF"/>
+                </a:solidFill>
+                <a:latin typeface="Aptos" pitchFamily="34" charset="0"/>
+                <a:ea typeface="Aptos" pitchFamily="34" charset="-122"/>
+                <a:cs typeface="Aptos" pitchFamily="34" charset="-120"/>
+              </a:rPr>
+              <a:t>Concept</a:t>
+            </a:r>
+            <a:endParaRPr lang="en-US" sz="1500" dirty="0"/>
+          </a:p>
+        </p:txBody>
+      </p:sp>
+      <p:sp>
+        <p:nvSpPr>
+          <p:cNvPr id="15" name="Text 13"/>
+          <p:cNvSpPr/>
+          <p:nvPr/>
+        </p:nvSpPr>
+        <p:spPr>
+          <a:xfrm>
+            <a:off x="8817864" y="4187952"/>
+            <a:ext cx="201168" cy="256032"/>
+          </a:xfrm>
+          <a:prstGeom prst="rect">
+            <a:avLst/>
+          </a:prstGeom>
+          <a:noFill/>
+          <a:ln/>
+        </p:spPr>
+        <p:txBody>
+          <a:bodyPr wrap="square" lIns="0" tIns="0" rIns="0" bIns="0" rtlCol="0" anchor="ctr"/>
+          <a:lstStyle/>
+          <a:p>
+            <a:pPr algn="ctr" indent="0" marL="0">
+              <a:buNone/>
+            </a:pPr>
+            <a:r>
+              <a:rPr lang="en-US" sz="1800" b="1" dirty="0">
+                <a:solidFill>
+                  <a:srgbClr val="0068B7"/>
+                </a:solidFill>
+                <a:latin typeface="Aptos" pitchFamily="34" charset="0"/>
+                <a:ea typeface="Aptos" pitchFamily="34" charset="-122"/>
+                <a:cs typeface="Aptos" pitchFamily="34" charset="-120"/>
+              </a:rPr>
+              <a:t>â†’</a:t>
+            </a:r>
+            <a:endParaRPr lang="en-US" sz="1800" dirty="0"/>
+          </a:p>
+        </p:txBody>
+      </p:sp>
+      <p:sp>
+        <p:nvSpPr>
+          <p:cNvPr id="16" name="Shape 14"/>
+          <p:cNvSpPr/>
+          <p:nvPr/>
+        </p:nvSpPr>
+        <p:spPr>
+          <a:xfrm>
+            <a:off x="9046464" y="3977640"/>
+            <a:ext cx="972312" cy="749808"/>
+          </a:xfrm>
+          <a:prstGeom prst="roundRect">
+            <a:avLst>
+              <a:gd name="adj" fmla="val 14634"/>
+            </a:avLst>
+          </a:prstGeom>
+          <a:solidFill>
+            <a:srgbClr val="2F8A28"/>
+          </a:solidFill>
+          <a:ln w="12700">
+            <a:solidFill>
+              <a:srgbClr val="2F8A28"/>
+            </a:solidFill>
+            <a:prstDash val="solid"/>
+          </a:ln>
+        </p:spPr>
+      </p:sp>
+      <p:sp>
+        <p:nvSpPr>
+          <p:cNvPr id="17" name="Text 15"/>
+          <p:cNvSpPr/>
+          <p:nvPr/>
+        </p:nvSpPr>
+        <p:spPr>
+          <a:xfrm>
+            <a:off x="9119616" y="4169664"/>
+            <a:ext cx="826008" cy="310896"/>
+          </a:xfrm>
+          <a:prstGeom prst="rect">
+            <a:avLst/>
+          </a:prstGeom>
+          <a:noFill/>
+          <a:ln/>
+        </p:spPr>
+        <p:txBody>
+          <a:bodyPr wrap="square" lIns="0" tIns="0" rIns="0" bIns="0" rtlCol="0" anchor="ctr">
+            <a:normAutofit/>
+          </a:bodyPr>
+          <a:lstStyle/>
+          <a:p>
+            <a:pPr algn="ctr" indent="0" marL="0">
+              <a:buNone/>
+            </a:pPr>
+            <a:r>
+              <a:rPr lang="en-US" sz="1500" b="1" dirty="0">
+                <a:solidFill>
+                  <a:srgbClr val="FFFFFF"/>
+                </a:solidFill>
+                <a:latin typeface="Aptos" pitchFamily="34" charset="0"/>
+                <a:ea typeface="Aptos" pitchFamily="34" charset="-122"/>
+                <a:cs typeface="Aptos" pitchFamily="34" charset="-120"/>
+              </a:rPr>
+              <a:t>Tool</a:t>
+            </a:r>
+            <a:endParaRPr lang="en-US" sz="1500" dirty="0"/>
+          </a:p>
+        </p:txBody>
+      </p:sp>
+      <p:sp>
+        <p:nvSpPr>
+          <p:cNvPr id="18" name="Text 16"/>
+          <p:cNvSpPr/>
+          <p:nvPr/>
+        </p:nvSpPr>
+        <p:spPr>
+          <a:xfrm>
+            <a:off x="10046208" y="4187952"/>
+            <a:ext cx="201168" cy="256032"/>
+          </a:xfrm>
+          <a:prstGeom prst="rect">
+            <a:avLst/>
+          </a:prstGeom>
+          <a:noFill/>
+          <a:ln/>
+        </p:spPr>
+        <p:txBody>
+          <a:bodyPr wrap="square" lIns="0" tIns="0" rIns="0" bIns="0" rtlCol="0" anchor="ctr"/>
+          <a:lstStyle/>
+          <a:p>
+            <a:pPr algn="ctr" indent="0" marL="0">
+              <a:buNone/>
+            </a:pPr>
+            <a:r>
+              <a:rPr lang="en-US" sz="1800" b="1" dirty="0">
+                <a:solidFill>
+                  <a:srgbClr val="0068B7"/>
+                </a:solidFill>
+                <a:latin typeface="Aptos" pitchFamily="34" charset="0"/>
+                <a:ea typeface="Aptos" pitchFamily="34" charset="-122"/>
+                <a:cs typeface="Aptos" pitchFamily="34" charset="-120"/>
+              </a:rPr>
+              <a:t>â†’</a:t>
+            </a:r>
+            <a:endParaRPr lang="en-US" sz="1800" dirty="0"/>
+          </a:p>
+        </p:txBody>
+      </p:sp>
+      <p:sp>
+        <p:nvSpPr>
+          <p:cNvPr id="19" name="Shape 17"/>
+          <p:cNvSpPr/>
+          <p:nvPr/>
+        </p:nvSpPr>
+        <p:spPr>
+          <a:xfrm>
+            <a:off x="10274808" y="3977640"/>
+            <a:ext cx="972312" cy="749808"/>
+          </a:xfrm>
+          <a:prstGeom prst="roundRect">
+            <a:avLst>
+              <a:gd name="adj" fmla="val 14634"/>
+            </a:avLst>
+          </a:prstGeom>
+          <a:solidFill>
+            <a:srgbClr val="D69A2D"/>
+          </a:solidFill>
+          <a:ln w="12700">
+            <a:solidFill>
+              <a:srgbClr val="D69A2D"/>
+            </a:solidFill>
+            <a:prstDash val="solid"/>
+          </a:ln>
+        </p:spPr>
+      </p:sp>
+      <p:sp>
+        <p:nvSpPr>
+          <p:cNvPr id="20" name="Text 18"/>
+          <p:cNvSpPr/>
+          <p:nvPr/>
+        </p:nvSpPr>
+        <p:spPr>
+          <a:xfrm>
+            <a:off x="10347960" y="4169664"/>
+            <a:ext cx="826008" cy="310896"/>
+          </a:xfrm>
+          <a:prstGeom prst="rect">
+            <a:avLst/>
+          </a:prstGeom>
+          <a:noFill/>
+          <a:ln/>
+        </p:spPr>
+        <p:txBody>
+          <a:bodyPr wrap="square" lIns="0" tIns="0" rIns="0" bIns="0" rtlCol="0" anchor="ctr">
+            <a:normAutofit/>
+          </a:bodyPr>
+          <a:lstStyle/>
+          <a:p>
+            <a:pPr algn="ctr" indent="0" marL="0">
+              <a:buNone/>
+            </a:pPr>
+            <a:r>
+              <a:rPr lang="en-US" sz="1500" b="1" dirty="0">
+                <a:solidFill>
+                  <a:srgbClr val="FFFFFF"/>
+                </a:solidFill>
+                <a:latin typeface="Aptos" pitchFamily="34" charset="0"/>
+                <a:ea typeface="Aptos" pitchFamily="34" charset="-122"/>
+                <a:cs typeface="Aptos" pitchFamily="34" charset="-120"/>
+              </a:rPr>
+              <a:t>Artifact</a:t>
+            </a:r>
+            <a:endParaRPr lang="en-US" sz="1500" dirty="0"/>
           </a:p>
         </p:txBody>
       </p:sp>
@@ -12943,7 +14030,7 @@
                 <a:ea typeface="Aptos" pitchFamily="34" charset="-122"/>
                 <a:cs typeface="Aptos" pitchFamily="34" charset="-120"/>
               </a:rPr>
-              <a:t>© Paula Soper</a:t>
+              <a:t>Â© Paula Soper</a:t>
             </a:r>
             <a:endParaRPr lang="en-US" sz="800" dirty="0"/>
           </a:p>
@@ -12951,7 +14038,46 @@
       </p:sp>
       <p:sp>
         <p:nvSpPr>
-          <p:cNvPr id="7" name="Shape 5"/>
+          <p:cNvPr id="7" name="Text 5"/>
+          <p:cNvSpPr/>
+          <p:nvPr/>
+        </p:nvSpPr>
+        <p:spPr>
+          <a:xfrm>
+            <a:off x="11137392" y="6510528"/>
+            <a:ext cx="411480" cy="201168"/>
+          </a:xfrm>
+          <a:prstGeom prst="rect">
+            <a:avLst/>
+          </a:prstGeom>
+          <a:noFill/>
+          <a:ln/>
+        </p:spPr>
+        <p:txBody>
+          <a:bodyPr wrap="square" lIns="0" tIns="0" rIns="0" bIns="0" rtlCol="0" anchor="ctr"/>
+          <a:lstStyle/>
+          <a:p>
+            <a:pPr algn="r" indent="0" marL="0">
+              <a:buNone/>
+            </a:pPr>
+            <a:r>
+              <a:rPr lang="en-US" sz="900" dirty="0">
+                <a:solidFill>
+                  <a:srgbClr val="5F7181"/>
+                </a:solidFill>
+                <a:latin typeface="Aptos" pitchFamily="34" charset="0"/>
+                <a:ea typeface="Aptos" pitchFamily="34" charset="-122"/>
+                <a:cs typeface="Aptos" pitchFamily="34" charset="-120"/>
+              </a:rPr>
+              <a:t>5</a:t>
+            </a:r>
+            <a:endParaRPr lang="en-US" sz="900" dirty="0"/>
+          </a:p>
+        </p:txBody>
+      </p:sp>
+      <p:sp>
+        <p:nvSpPr>
+          <p:cNvPr id="8" name="Shape 6"/>
           <p:cNvSpPr/>
           <p:nvPr/>
         </p:nvSpPr>
@@ -12976,7 +14102,7 @@
       </p:sp>
       <p:sp>
         <p:nvSpPr>
-          <p:cNvPr id="8" name="Text 6"/>
+          <p:cNvPr id="9" name="Text 7"/>
           <p:cNvSpPr/>
           <p:nvPr/>
         </p:nvSpPr>
@@ -13015,14 +14141,14 @@
       </p:sp>
       <p:sp>
         <p:nvSpPr>
-          <p:cNvPr id="9" name="Text 7"/>
+          <p:cNvPr id="10" name="Text 8"/>
           <p:cNvSpPr/>
           <p:nvPr/>
         </p:nvSpPr>
         <p:spPr>
           <a:xfrm>
             <a:off x="640080" y="621792"/>
-            <a:ext cx="10881360" cy="566928"/>
+            <a:ext cx="10881360" cy="713232"/>
           </a:xfrm>
           <a:prstGeom prst="rect">
             <a:avLst/>
@@ -13040,7 +14166,7 @@
               <a:buNone/>
             </a:pPr>
             <a:r>
-              <a:rPr lang="en-US" sz="2700" b="1" dirty="0">
+              <a:rPr lang="en-US" sz="3400" b="1" dirty="0">
                 <a:solidFill>
                   <a:srgbClr val="003A63"/>
                 </a:solidFill>
@@ -13050,20 +14176,20 @@
               </a:rPr>
               <a:t>Learning Objectives</a:t>
             </a:r>
-            <a:endParaRPr lang="en-US" sz="2700" dirty="0"/>
-          </a:p>
-        </p:txBody>
-      </p:sp>
-      <p:sp>
-        <p:nvSpPr>
-          <p:cNvPr id="10" name="Text 8"/>
-          <p:cNvSpPr/>
-          <p:nvPr/>
-        </p:nvSpPr>
-        <p:spPr>
-          <a:xfrm>
-            <a:off x="868680" y="1417320"/>
-            <a:ext cx="6675120" cy="4434840"/>
+            <a:endParaRPr lang="en-US" sz="3400" dirty="0"/>
+          </a:p>
+        </p:txBody>
+      </p:sp>
+      <p:sp>
+        <p:nvSpPr>
+          <p:cNvPr id="11" name="Text 9"/>
+          <p:cNvSpPr/>
+          <p:nvPr/>
+        </p:nvSpPr>
+        <p:spPr>
+          <a:xfrm>
+            <a:off x="868680" y="1508760"/>
+            <a:ext cx="6537960" cy="4160520"/>
           </a:xfrm>
           <a:prstGeom prst="rect">
             <a:avLst/>
@@ -13078,7 +14204,7 @@
           <a:lstStyle/>
           <a:p>
             <a:r>
-              <a:rPr lang="en-US" sz="1700" dirty="0">
+              <a:rPr lang="en-US" sz="2100" dirty="0">
                 <a:solidFill>
                   <a:srgbClr val="17364A"/>
                 </a:solidFill>
@@ -13088,11 +14214,11 @@
               </a:rPr>
               <a:t>Explain why system integration is central to AI readiness in public health.</a:t>
             </a:r>
-            <a:endParaRPr lang="en-US" sz="1700" dirty="0"/>
-          </a:p>
-          <a:p>
-            <a:r>
-              <a:rPr lang="en-US" sz="1700" dirty="0">
+            <a:endParaRPr lang="en-US" sz="2100" dirty="0"/>
+          </a:p>
+          <a:p>
+            <a:r>
+              <a:rPr lang="en-US" sz="2100" dirty="0">
                 <a:solidFill>
                   <a:srgbClr val="17364A"/>
                 </a:solidFill>
@@ -13100,13 +14226,13 @@
                 <a:ea typeface="Aptos" pitchFamily="34" charset="-122"/>
                 <a:cs typeface="Aptos" pitchFamily="34" charset="-120"/>
               </a:rPr>
-              <a:t>Distinguish among common integration patterns such as point-to-point interfaces, APIs, message brokers, interface engines,.</a:t>
-            </a:r>
-            <a:endParaRPr lang="en-US" sz="1700" dirty="0"/>
-          </a:p>
-          <a:p>
-            <a:r>
-              <a:rPr lang="en-US" sz="1700" dirty="0">
+              <a:t>Distinguish among common integration patterns such as point-to-point interfaces, APIs, message brokers,.</a:t>
+            </a:r>
+            <a:endParaRPr lang="en-US" sz="2100" dirty="0"/>
+          </a:p>
+          <a:p>
+            <a:r>
+              <a:rPr lang="en-US" sz="2100" dirty="0">
                 <a:solidFill>
                   <a:srgbClr val="17364A"/>
                 </a:solidFill>
@@ -13114,29 +14240,15 @@
                 <a:ea typeface="Aptos" pitchFamily="34" charset="-122"/>
                 <a:cs typeface="Aptos" pitchFamily="34" charset="-120"/>
               </a:rPr>
-              <a:t>Identify the systems of record, upstream sources, downstream systems, and shared services involved in an AI-supported workflow.</a:t>
-            </a:r>
-            <a:endParaRPr lang="en-US" sz="1700" dirty="0"/>
-          </a:p>
-          <a:p>
-            <a:r>
-              <a:rPr lang="en-US" sz="1700" dirty="0">
-                <a:solidFill>
-                  <a:srgbClr val="17364A"/>
-                </a:solidFill>
-                <a:latin typeface="Aptos" pitchFamily="34" charset="0"/>
-                <a:ea typeface="Aptos" pitchFamily="34" charset="-122"/>
-                <a:cs typeface="Aptos" pitchFamily="34" charset="-120"/>
-              </a:rPr>
-              <a:t>Assess whether a proposed AI tool requires read-only access, write-back access, embedded workflow integration, or manual review.</a:t>
-            </a:r>
-            <a:endParaRPr lang="en-US" sz="1700" dirty="0"/>
-          </a:p>
-        </p:txBody>
-      </p:sp>
-      <p:sp>
-        <p:nvSpPr>
-          <p:cNvPr id="11" name="Shape 9"/>
+              <a:t>Identify the systems of record, upstream sources, downstream systems, and shared services involved in.</a:t>
+            </a:r>
+            <a:endParaRPr lang="en-US" sz="2100" dirty="0"/>
+          </a:p>
+        </p:txBody>
+      </p:sp>
+      <p:sp>
+        <p:nvSpPr>
+          <p:cNvPr id="12" name="Shape 10"/>
           <p:cNvSpPr/>
           <p:nvPr/>
         </p:nvSpPr>
@@ -13163,14 +14275,14 @@
       </p:sp>
       <p:sp>
         <p:nvSpPr>
-          <p:cNvPr id="12" name="Text 10"/>
+          <p:cNvPr id="13" name="Text 11"/>
           <p:cNvSpPr/>
           <p:nvPr/>
         </p:nvSpPr>
         <p:spPr>
           <a:xfrm>
             <a:off x="8074152" y="1563624"/>
-            <a:ext cx="2825496" cy="201168"/>
+            <a:ext cx="2825496" cy="256032"/>
           </a:xfrm>
           <a:prstGeom prst="rect">
             <a:avLst/>
@@ -13186,7 +14298,7 @@
               <a:buNone/>
             </a:pPr>
             <a:r>
-              <a:rPr lang="en-US" sz="950" b="1" dirty="0">
+              <a:rPr lang="en-US" sz="1300" b="1" dirty="0">
                 <a:solidFill>
                   <a:srgbClr val="0068B7"/>
                 </a:solidFill>
@@ -13196,20 +14308,20 @@
               </a:rPr>
               <a:t>Key idea</a:t>
             </a:r>
-            <a:endParaRPr lang="en-US" sz="950" dirty="0"/>
-          </a:p>
-        </p:txBody>
-      </p:sp>
-      <p:sp>
-        <p:nvSpPr>
-          <p:cNvPr id="13" name="Text 11"/>
-          <p:cNvSpPr/>
-          <p:nvPr/>
-        </p:nvSpPr>
-        <p:spPr>
-          <a:xfrm>
-            <a:off x="8074152" y="1856232"/>
-            <a:ext cx="2825496" cy="1261872"/>
+            <a:endParaRPr lang="en-US" sz="1300" dirty="0"/>
+          </a:p>
+        </p:txBody>
+      </p:sp>
+      <p:sp>
+        <p:nvSpPr>
+          <p:cNvPr id="14" name="Text 12"/>
+          <p:cNvSpPr/>
+          <p:nvPr/>
+        </p:nvSpPr>
+        <p:spPr>
+          <a:xfrm>
+            <a:off x="8074152" y="1920240"/>
+            <a:ext cx="2825496" cy="1188720"/>
           </a:xfrm>
           <a:prstGeom prst="rect">
             <a:avLst/>
@@ -13227,7 +14339,7 @@
               <a:buNone/>
             </a:pPr>
             <a:r>
-              <a:rPr lang="en-US" sz="1250" dirty="0">
+              <a:rPr lang="en-US" sz="1550" dirty="0">
                 <a:solidFill>
                   <a:srgbClr val="17364A"/>
                 </a:solidFill>
@@ -13237,13 +14349,13 @@
               </a:rPr>
               <a:t>Explain why system integration is central to AI readiness in public health.</a:t>
             </a:r>
-            <a:endParaRPr lang="en-US" sz="1250" dirty="0"/>
-          </a:p>
-        </p:txBody>
-      </p:sp>
-      <p:sp>
-        <p:nvSpPr>
-          <p:cNvPr id="14" name="Shape 12"/>
+            <a:endParaRPr lang="en-US" sz="1550" dirty="0"/>
+          </a:p>
+        </p:txBody>
+      </p:sp>
+      <p:sp>
+        <p:nvSpPr>
+          <p:cNvPr id="15" name="Shape 13"/>
           <p:cNvSpPr/>
           <p:nvPr/>
         </p:nvSpPr>
@@ -13270,14 +14382,14 @@
       </p:sp>
       <p:sp>
         <p:nvSpPr>
-          <p:cNvPr id="15" name="Text 13"/>
+          <p:cNvPr id="16" name="Text 14"/>
           <p:cNvSpPr/>
           <p:nvPr/>
         </p:nvSpPr>
         <p:spPr>
           <a:xfrm>
             <a:off x="8074152" y="3666744"/>
-            <a:ext cx="2825496" cy="201168"/>
+            <a:ext cx="2825496" cy="256032"/>
           </a:xfrm>
           <a:prstGeom prst="rect">
             <a:avLst/>
@@ -13293,7 +14405,7 @@
               <a:buNone/>
             </a:pPr>
             <a:r>
-              <a:rPr lang="en-US" sz="950" b="1" dirty="0">
+              <a:rPr lang="en-US" sz="1300" b="1" dirty="0">
                 <a:solidFill>
                   <a:srgbClr val="0068B7"/>
                 </a:solidFill>
@@ -13303,20 +14415,20 @@
               </a:rPr>
               <a:t>Use this for</a:t>
             </a:r>
-            <a:endParaRPr lang="en-US" sz="950" dirty="0"/>
-          </a:p>
-        </p:txBody>
-      </p:sp>
-      <p:sp>
-        <p:nvSpPr>
-          <p:cNvPr id="16" name="Text 14"/>
-          <p:cNvSpPr/>
-          <p:nvPr/>
-        </p:nvSpPr>
-        <p:spPr>
-          <a:xfrm>
-            <a:off x="8074152" y="3959352"/>
-            <a:ext cx="2825496" cy="1170432"/>
+            <a:endParaRPr lang="en-US" sz="1300" dirty="0"/>
+          </a:p>
+        </p:txBody>
+      </p:sp>
+      <p:sp>
+        <p:nvSpPr>
+          <p:cNvPr id="17" name="Text 15"/>
+          <p:cNvSpPr/>
+          <p:nvPr/>
+        </p:nvSpPr>
+        <p:spPr>
+          <a:xfrm>
+            <a:off x="8074152" y="4023360"/>
+            <a:ext cx="2825496" cy="1097280"/>
           </a:xfrm>
           <a:prstGeom prst="rect">
             <a:avLst/>
@@ -13334,7 +14446,7 @@
               <a:buNone/>
             </a:pPr>
             <a:r>
-              <a:rPr lang="en-US" sz="1250" dirty="0">
+              <a:rPr lang="en-US" sz="1550" dirty="0">
                 <a:solidFill>
                   <a:srgbClr val="17364A"/>
                 </a:solidFill>
@@ -13344,7 +14456,7 @@
               </a:rPr>
               <a:t>Connect the concept to public health decisions, safeguards, documentation, or implementation work.</a:t>
             </a:r>
-            <a:endParaRPr lang="en-US" sz="1250" dirty="0"/>
+            <a:endParaRPr lang="en-US" sz="1550" dirty="0"/>
           </a:p>
         </p:txBody>
       </p:sp>
@@ -13541,7 +14653,7 @@
                 <a:ea typeface="Aptos" pitchFamily="34" charset="-122"/>
                 <a:cs typeface="Aptos" pitchFamily="34" charset="-120"/>
               </a:rPr>
-              <a:t>© Paula Soper</a:t>
+              <a:t>Â© Paula Soper</a:t>
             </a:r>
             <a:endParaRPr lang="en-US" sz="800" dirty="0"/>
           </a:p>
@@ -13555,8 +14667,47 @@
         </p:nvSpPr>
         <p:spPr>
           <a:xfrm>
+            <a:off x="11137392" y="6510528"/>
+            <a:ext cx="411480" cy="201168"/>
+          </a:xfrm>
+          <a:prstGeom prst="rect">
+            <a:avLst/>
+          </a:prstGeom>
+          <a:noFill/>
+          <a:ln/>
+        </p:spPr>
+        <p:txBody>
+          <a:bodyPr wrap="square" lIns="0" tIns="0" rIns="0" bIns="0" rtlCol="0" anchor="ctr"/>
+          <a:lstStyle/>
+          <a:p>
+            <a:pPr algn="r" indent="0" marL="0">
+              <a:buNone/>
+            </a:pPr>
+            <a:r>
+              <a:rPr lang="en-US" sz="900" dirty="0">
+                <a:solidFill>
+                  <a:srgbClr val="5F7181"/>
+                </a:solidFill>
+                <a:latin typeface="Aptos" pitchFamily="34" charset="0"/>
+                <a:ea typeface="Aptos" pitchFamily="34" charset="-122"/>
+                <a:cs typeface="Aptos" pitchFamily="34" charset="-120"/>
+              </a:rPr>
+              <a:t>6</a:t>
+            </a:r>
+            <a:endParaRPr lang="en-US" sz="900" dirty="0"/>
+          </a:p>
+        </p:txBody>
+      </p:sp>
+      <p:sp>
+        <p:nvSpPr>
+          <p:cNvPr id="8" name="Text 6"/>
+          <p:cNvSpPr/>
+          <p:nvPr/>
+        </p:nvSpPr>
+        <p:spPr>
+          <a:xfrm>
             <a:off x="640080" y="658368"/>
-            <a:ext cx="10881360" cy="566928"/>
+            <a:ext cx="10881360" cy="713232"/>
           </a:xfrm>
           <a:prstGeom prst="rect">
             <a:avLst/>
@@ -13574,7 +14725,7 @@
               <a:buNone/>
             </a:pPr>
             <a:r>
-              <a:rPr lang="en-US" sz="2700" b="1" dirty="0">
+              <a:rPr lang="en-US" sz="3400" b="1" dirty="0">
                 <a:solidFill>
                   <a:srgbClr val="003A63"/>
                 </a:solidFill>
@@ -13584,20 +14735,20 @@
               </a:rPr>
               <a:t>Learning Objectives Continued</a:t>
             </a:r>
-            <a:endParaRPr lang="en-US" sz="2700" dirty="0"/>
-          </a:p>
-        </p:txBody>
-      </p:sp>
-      <p:sp>
-        <p:nvSpPr>
-          <p:cNvPr id="8" name="Text 6"/>
-          <p:cNvSpPr/>
-          <p:nvPr/>
-        </p:nvSpPr>
-        <p:spPr>
-          <a:xfrm>
-            <a:off x="868680" y="1417320"/>
-            <a:ext cx="6675120" cy="4434840"/>
+            <a:endParaRPr lang="en-US" sz="3400" dirty="0"/>
+          </a:p>
+        </p:txBody>
+      </p:sp>
+      <p:sp>
+        <p:nvSpPr>
+          <p:cNvPr id="9" name="Text 7"/>
+          <p:cNvSpPr/>
+          <p:nvPr/>
+        </p:nvSpPr>
+        <p:spPr>
+          <a:xfrm>
+            <a:off x="868680" y="1508760"/>
+            <a:ext cx="6537960" cy="4160520"/>
           </a:xfrm>
           <a:prstGeom prst="rect">
             <a:avLst/>
@@ -13612,7 +14763,7 @@
           <a:lstStyle/>
           <a:p>
             <a:r>
-              <a:rPr lang="en-US" sz="1700" dirty="0">
+              <a:rPr lang="en-US" sz="2100" dirty="0">
                 <a:solidFill>
                   <a:srgbClr val="17364A"/>
                 </a:solidFill>
@@ -13622,13 +14773,13 @@
               </a:rPr>
               <a:t>Produce an integration pattern worksheet for a public health AI use case.</a:t>
             </a:r>
-            <a:endParaRPr lang="en-US" sz="1700" dirty="0"/>
-          </a:p>
-        </p:txBody>
-      </p:sp>
-      <p:sp>
-        <p:nvSpPr>
-          <p:cNvPr id="9" name="Shape 7"/>
+            <a:endParaRPr lang="en-US" sz="2100" dirty="0"/>
+          </a:p>
+        </p:txBody>
+      </p:sp>
+      <p:sp>
+        <p:nvSpPr>
+          <p:cNvPr id="10" name="Shape 8"/>
           <p:cNvSpPr/>
           <p:nvPr/>
         </p:nvSpPr>
@@ -13655,14 +14806,14 @@
       </p:sp>
       <p:sp>
         <p:nvSpPr>
-          <p:cNvPr id="10" name="Text 8"/>
+          <p:cNvPr id="11" name="Text 9"/>
           <p:cNvSpPr/>
           <p:nvPr/>
         </p:nvSpPr>
         <p:spPr>
           <a:xfrm>
             <a:off x="8074152" y="1563624"/>
-            <a:ext cx="2825496" cy="201168"/>
+            <a:ext cx="2825496" cy="256032"/>
           </a:xfrm>
           <a:prstGeom prst="rect">
             <a:avLst/>
@@ -13678,7 +14829,7 @@
               <a:buNone/>
             </a:pPr>
             <a:r>
-              <a:rPr lang="en-US" sz="950" b="1" dirty="0">
+              <a:rPr lang="en-US" sz="1300" b="1" dirty="0">
                 <a:solidFill>
                   <a:srgbClr val="0068B7"/>
                 </a:solidFill>
@@ -13688,20 +14839,20 @@
               </a:rPr>
               <a:t>Key idea</a:t>
             </a:r>
-            <a:endParaRPr lang="en-US" sz="950" dirty="0"/>
-          </a:p>
-        </p:txBody>
-      </p:sp>
-      <p:sp>
-        <p:nvSpPr>
-          <p:cNvPr id="11" name="Text 9"/>
-          <p:cNvSpPr/>
-          <p:nvPr/>
-        </p:nvSpPr>
-        <p:spPr>
-          <a:xfrm>
-            <a:off x="8074152" y="1856232"/>
-            <a:ext cx="2825496" cy="1261872"/>
+            <a:endParaRPr lang="en-US" sz="1300" dirty="0"/>
+          </a:p>
+        </p:txBody>
+      </p:sp>
+      <p:sp>
+        <p:nvSpPr>
+          <p:cNvPr id="12" name="Text 10"/>
+          <p:cNvSpPr/>
+          <p:nvPr/>
+        </p:nvSpPr>
+        <p:spPr>
+          <a:xfrm>
+            <a:off x="8074152" y="1920240"/>
+            <a:ext cx="2825496" cy="1188720"/>
           </a:xfrm>
           <a:prstGeom prst="rect">
             <a:avLst/>
@@ -13719,7 +14870,7 @@
               <a:buNone/>
             </a:pPr>
             <a:r>
-              <a:rPr lang="en-US" sz="1250" dirty="0">
+              <a:rPr lang="en-US" sz="1550" dirty="0">
                 <a:solidFill>
                   <a:srgbClr val="17364A"/>
                 </a:solidFill>
@@ -13729,13 +14880,13 @@
               </a:rPr>
               <a:t>Produce an integration pattern worksheet for a public health AI use case.</a:t>
             </a:r>
-            <a:endParaRPr lang="en-US" sz="1250" dirty="0"/>
-          </a:p>
-        </p:txBody>
-      </p:sp>
-      <p:sp>
-        <p:nvSpPr>
-          <p:cNvPr id="12" name="Shape 10"/>
+            <a:endParaRPr lang="en-US" sz="1550" dirty="0"/>
+          </a:p>
+        </p:txBody>
+      </p:sp>
+      <p:sp>
+        <p:nvSpPr>
+          <p:cNvPr id="13" name="Shape 11"/>
           <p:cNvSpPr/>
           <p:nvPr/>
         </p:nvSpPr>
@@ -13762,14 +14913,14 @@
       </p:sp>
       <p:sp>
         <p:nvSpPr>
-          <p:cNvPr id="13" name="Text 11"/>
+          <p:cNvPr id="14" name="Text 12"/>
           <p:cNvSpPr/>
           <p:nvPr/>
         </p:nvSpPr>
         <p:spPr>
           <a:xfrm>
             <a:off x="8074152" y="3666744"/>
-            <a:ext cx="2825496" cy="201168"/>
+            <a:ext cx="2825496" cy="256032"/>
           </a:xfrm>
           <a:prstGeom prst="rect">
             <a:avLst/>
@@ -13785,7 +14936,7 @@
               <a:buNone/>
             </a:pPr>
             <a:r>
-              <a:rPr lang="en-US" sz="950" b="1" dirty="0">
+              <a:rPr lang="en-US" sz="1300" b="1" dirty="0">
                 <a:solidFill>
                   <a:srgbClr val="0068B7"/>
                 </a:solidFill>
@@ -13795,20 +14946,20 @@
               </a:rPr>
               <a:t>Use this for</a:t>
             </a:r>
-            <a:endParaRPr lang="en-US" sz="950" dirty="0"/>
-          </a:p>
-        </p:txBody>
-      </p:sp>
-      <p:sp>
-        <p:nvSpPr>
-          <p:cNvPr id="14" name="Text 12"/>
-          <p:cNvSpPr/>
-          <p:nvPr/>
-        </p:nvSpPr>
-        <p:spPr>
-          <a:xfrm>
-            <a:off x="8074152" y="3959352"/>
-            <a:ext cx="2825496" cy="1170432"/>
+            <a:endParaRPr lang="en-US" sz="1300" dirty="0"/>
+          </a:p>
+        </p:txBody>
+      </p:sp>
+      <p:sp>
+        <p:nvSpPr>
+          <p:cNvPr id="15" name="Text 13"/>
+          <p:cNvSpPr/>
+          <p:nvPr/>
+        </p:nvSpPr>
+        <p:spPr>
+          <a:xfrm>
+            <a:off x="8074152" y="4023360"/>
+            <a:ext cx="2825496" cy="1097280"/>
           </a:xfrm>
           <a:prstGeom prst="rect">
             <a:avLst/>
@@ -13826,7 +14977,7 @@
               <a:buNone/>
             </a:pPr>
             <a:r>
-              <a:rPr lang="en-US" sz="1250" dirty="0">
+              <a:rPr lang="en-US" sz="1550" dirty="0">
                 <a:solidFill>
                   <a:srgbClr val="17364A"/>
                 </a:solidFill>
@@ -13836,7 +14987,7 @@
               </a:rPr>
               <a:t>Connect the concept to public health decisions, safeguards, documentation, or implementation work.</a:t>
             </a:r>
-            <a:endParaRPr lang="en-US" sz="1250" dirty="0"/>
+            <a:endParaRPr lang="en-US" sz="1550" dirty="0"/>
           </a:p>
         </p:txBody>
       </p:sp>
@@ -14033,7 +15184,7 @@
                 <a:ea typeface="Aptos" pitchFamily="34" charset="-122"/>
                 <a:cs typeface="Aptos" pitchFamily="34" charset="-120"/>
               </a:rPr>
-              <a:t>© Paula Soper</a:t>
+              <a:t>Â© Paula Soper</a:t>
             </a:r>
             <a:endParaRPr lang="en-US" sz="800" dirty="0"/>
           </a:p>
@@ -14041,7 +15192,46 @@
       </p:sp>
       <p:sp>
         <p:nvSpPr>
-          <p:cNvPr id="7" name="Shape 5"/>
+          <p:cNvPr id="7" name="Text 5"/>
+          <p:cNvSpPr/>
+          <p:nvPr/>
+        </p:nvSpPr>
+        <p:spPr>
+          <a:xfrm>
+            <a:off x="11137392" y="6510528"/>
+            <a:ext cx="411480" cy="201168"/>
+          </a:xfrm>
+          <a:prstGeom prst="rect">
+            <a:avLst/>
+          </a:prstGeom>
+          <a:noFill/>
+          <a:ln/>
+        </p:spPr>
+        <p:txBody>
+          <a:bodyPr wrap="square" lIns="0" tIns="0" rIns="0" bIns="0" rtlCol="0" anchor="ctr"/>
+          <a:lstStyle/>
+          <a:p>
+            <a:pPr algn="r" indent="0" marL="0">
+              <a:buNone/>
+            </a:pPr>
+            <a:r>
+              <a:rPr lang="en-US" sz="900" dirty="0">
+                <a:solidFill>
+                  <a:srgbClr val="5F7181"/>
+                </a:solidFill>
+                <a:latin typeface="Aptos" pitchFamily="34" charset="0"/>
+                <a:ea typeface="Aptos" pitchFamily="34" charset="-122"/>
+                <a:cs typeface="Aptos" pitchFamily="34" charset="-120"/>
+              </a:rPr>
+              <a:t>7</a:t>
+            </a:r>
+            <a:endParaRPr lang="en-US" sz="900" dirty="0"/>
+          </a:p>
+        </p:txBody>
+      </p:sp>
+      <p:sp>
+        <p:nvSpPr>
+          <p:cNvPr id="8" name="Shape 6"/>
           <p:cNvSpPr/>
           <p:nvPr/>
         </p:nvSpPr>
@@ -14066,7 +15256,7 @@
       </p:sp>
       <p:sp>
         <p:nvSpPr>
-          <p:cNvPr id="8" name="Text 6"/>
+          <p:cNvPr id="9" name="Text 7"/>
           <p:cNvSpPr/>
           <p:nvPr/>
         </p:nvSpPr>
@@ -14105,14 +15295,14 @@
       </p:sp>
       <p:sp>
         <p:nvSpPr>
-          <p:cNvPr id="9" name="Text 7"/>
+          <p:cNvPr id="10" name="Text 8"/>
           <p:cNvSpPr/>
           <p:nvPr/>
         </p:nvSpPr>
         <p:spPr>
           <a:xfrm>
             <a:off x="640080" y="621792"/>
-            <a:ext cx="10881360" cy="566928"/>
+            <a:ext cx="10881360" cy="713232"/>
           </a:xfrm>
           <a:prstGeom prst="rect">
             <a:avLst/>
@@ -14130,7 +15320,7 @@
               <a:buNone/>
             </a:pPr>
             <a:r>
-              <a:rPr lang="en-US" sz="2700" b="1" dirty="0">
+              <a:rPr lang="en-US" sz="3400" b="1" dirty="0">
                 <a:solidFill>
                   <a:srgbClr val="003A63"/>
                 </a:solidFill>
@@ -14140,20 +15330,20 @@
               </a:rPr>
               <a:t>Module Overview</a:t>
             </a:r>
-            <a:endParaRPr lang="en-US" sz="2700" dirty="0"/>
-          </a:p>
-        </p:txBody>
-      </p:sp>
-      <p:sp>
-        <p:nvSpPr>
-          <p:cNvPr id="10" name="Text 8"/>
-          <p:cNvSpPr/>
-          <p:nvPr/>
-        </p:nvSpPr>
-        <p:spPr>
-          <a:xfrm>
-            <a:off x="868680" y="1417320"/>
-            <a:ext cx="6675120" cy="4434840"/>
+            <a:endParaRPr lang="en-US" sz="3400" dirty="0"/>
+          </a:p>
+        </p:txBody>
+      </p:sp>
+      <p:sp>
+        <p:nvSpPr>
+          <p:cNvPr id="11" name="Text 9"/>
+          <p:cNvSpPr/>
+          <p:nvPr/>
+        </p:nvSpPr>
+        <p:spPr>
+          <a:xfrm>
+            <a:off x="868680" y="1508760"/>
+            <a:ext cx="6537960" cy="4160520"/>
           </a:xfrm>
           <a:prstGeom prst="rect">
             <a:avLst/>
@@ -14168,7 +15358,7 @@
           <a:lstStyle/>
           <a:p>
             <a:r>
-              <a:rPr lang="en-US" sz="1700" dirty="0">
+              <a:rPr lang="en-US" sz="2100" dirty="0">
                 <a:solidFill>
                   <a:srgbClr val="17364A"/>
                 </a:solidFill>
@@ -14178,11 +15368,11 @@
               </a:rPr>
               <a:t>Public health AI rarely succeeds as a stand-alone application.</a:t>
             </a:r>
-            <a:endParaRPr lang="en-US" sz="1700" dirty="0"/>
-          </a:p>
-          <a:p>
-            <a:r>
-              <a:rPr lang="en-US" sz="1700" dirty="0">
+            <a:endParaRPr lang="en-US" sz="2100" dirty="0"/>
+          </a:p>
+          <a:p>
+            <a:r>
+              <a:rPr lang="en-US" sz="2100" dirty="0">
                 <a:solidFill>
                   <a:srgbClr val="17364A"/>
                 </a:solidFill>
@@ -14190,13 +15380,13 @@
                 <a:ea typeface="Aptos" pitchFamily="34" charset="-122"/>
                 <a:cs typeface="Aptos" pitchFamily="34" charset="-120"/>
               </a:rPr>
-              <a:t>The value of an AI-supported workflow depends on how well it is integrated with systems of record, data exchange services,.</a:t>
-            </a:r>
-            <a:endParaRPr lang="en-US" sz="1700" dirty="0"/>
-          </a:p>
-          <a:p>
-            <a:r>
-              <a:rPr lang="en-US" sz="1700" dirty="0">
+              <a:t>The value of an AI-supported workflow depends on how well it is integrated with systems of record, data.</a:t>
+            </a:r>
+            <a:endParaRPr lang="en-US" sz="2100" dirty="0"/>
+          </a:p>
+          <a:p>
+            <a:r>
+              <a:rPr lang="en-US" sz="2100" dirty="0">
                 <a:solidFill>
                   <a:srgbClr val="17364A"/>
                 </a:solidFill>
@@ -14204,29 +15394,15 @@
                 <a:ea typeface="Aptos" pitchFamily="34" charset="-122"/>
                 <a:cs typeface="Aptos" pitchFamily="34" charset="-120"/>
               </a:rPr>
-              <a:t>This module helps learners understand the integration patterns that allow AI to support public health work without creating.</a:t>
-            </a:r>
-            <a:endParaRPr lang="en-US" sz="1700" dirty="0"/>
-          </a:p>
-          <a:p>
-            <a:r>
-              <a:rPr lang="en-US" sz="1700" dirty="0">
-                <a:solidFill>
-                  <a:srgbClr val="17364A"/>
-                </a:solidFill>
-                <a:latin typeface="Aptos" pitchFamily="34" charset="0"/>
-                <a:ea typeface="Aptos" pitchFamily="34" charset="-122"/>
-                <a:cs typeface="Aptos" pitchFamily="34" charset="-120"/>
-              </a:rPr>
-              <a:t>The module focuses on practical integration choices rather than software engineering theory.</a:t>
-            </a:r>
-            <a:endParaRPr lang="en-US" sz="1700" dirty="0"/>
-          </a:p>
-        </p:txBody>
-      </p:sp>
-      <p:sp>
-        <p:nvSpPr>
-          <p:cNvPr id="11" name="Shape 9"/>
+              <a:t>This module helps learners understand the integration patterns that allow AI to support public health.</a:t>
+            </a:r>
+            <a:endParaRPr lang="en-US" sz="2100" dirty="0"/>
+          </a:p>
+        </p:txBody>
+      </p:sp>
+      <p:sp>
+        <p:nvSpPr>
+          <p:cNvPr id="12" name="Shape 10"/>
           <p:cNvSpPr/>
           <p:nvPr/>
         </p:nvSpPr>
@@ -14253,14 +15429,14 @@
       </p:sp>
       <p:sp>
         <p:nvSpPr>
-          <p:cNvPr id="12" name="Text 10"/>
+          <p:cNvPr id="13" name="Text 11"/>
           <p:cNvSpPr/>
           <p:nvPr/>
         </p:nvSpPr>
         <p:spPr>
           <a:xfrm>
             <a:off x="8074152" y="1563624"/>
-            <a:ext cx="2825496" cy="201168"/>
+            <a:ext cx="2825496" cy="256032"/>
           </a:xfrm>
           <a:prstGeom prst="rect">
             <a:avLst/>
@@ -14276,7 +15452,7 @@
               <a:buNone/>
             </a:pPr>
             <a:r>
-              <a:rPr lang="en-US" sz="950" b="1" dirty="0">
+              <a:rPr lang="en-US" sz="1300" b="1" dirty="0">
                 <a:solidFill>
                   <a:srgbClr val="0068B7"/>
                 </a:solidFill>
@@ -14286,20 +15462,20 @@
               </a:rPr>
               <a:t>Key idea</a:t>
             </a:r>
-            <a:endParaRPr lang="en-US" sz="950" dirty="0"/>
-          </a:p>
-        </p:txBody>
-      </p:sp>
-      <p:sp>
-        <p:nvSpPr>
-          <p:cNvPr id="13" name="Text 11"/>
-          <p:cNvSpPr/>
-          <p:nvPr/>
-        </p:nvSpPr>
-        <p:spPr>
-          <a:xfrm>
-            <a:off x="8074152" y="1856232"/>
-            <a:ext cx="2825496" cy="1261872"/>
+            <a:endParaRPr lang="en-US" sz="1300" dirty="0"/>
+          </a:p>
+        </p:txBody>
+      </p:sp>
+      <p:sp>
+        <p:nvSpPr>
+          <p:cNvPr id="14" name="Text 12"/>
+          <p:cNvSpPr/>
+          <p:nvPr/>
+        </p:nvSpPr>
+        <p:spPr>
+          <a:xfrm>
+            <a:off x="8074152" y="1920240"/>
+            <a:ext cx="2825496" cy="1188720"/>
           </a:xfrm>
           <a:prstGeom prst="rect">
             <a:avLst/>
@@ -14317,7 +15493,7 @@
               <a:buNone/>
             </a:pPr>
             <a:r>
-              <a:rPr lang="en-US" sz="1250" dirty="0">
+              <a:rPr lang="en-US" sz="1550" dirty="0">
                 <a:solidFill>
                   <a:srgbClr val="17364A"/>
                 </a:solidFill>
@@ -14327,13 +15503,13 @@
               </a:rPr>
               <a:t>Public health AI rarely succeeds as a stand-alone application.</a:t>
             </a:r>
-            <a:endParaRPr lang="en-US" sz="1250" dirty="0"/>
-          </a:p>
-        </p:txBody>
-      </p:sp>
-      <p:sp>
-        <p:nvSpPr>
-          <p:cNvPr id="14" name="Shape 12"/>
+            <a:endParaRPr lang="en-US" sz="1550" dirty="0"/>
+          </a:p>
+        </p:txBody>
+      </p:sp>
+      <p:sp>
+        <p:nvSpPr>
+          <p:cNvPr id="15" name="Shape 13"/>
           <p:cNvSpPr/>
           <p:nvPr/>
         </p:nvSpPr>
@@ -14360,14 +15536,14 @@
       </p:sp>
       <p:sp>
         <p:nvSpPr>
-          <p:cNvPr id="15" name="Text 13"/>
+          <p:cNvPr id="16" name="Text 14"/>
           <p:cNvSpPr/>
           <p:nvPr/>
         </p:nvSpPr>
         <p:spPr>
           <a:xfrm>
             <a:off x="8074152" y="3666744"/>
-            <a:ext cx="2825496" cy="201168"/>
+            <a:ext cx="2825496" cy="256032"/>
           </a:xfrm>
           <a:prstGeom prst="rect">
             <a:avLst/>
@@ -14383,7 +15559,7 @@
               <a:buNone/>
             </a:pPr>
             <a:r>
-              <a:rPr lang="en-US" sz="950" b="1" dirty="0">
+              <a:rPr lang="en-US" sz="1300" b="1" dirty="0">
                 <a:solidFill>
                   <a:srgbClr val="0068B7"/>
                 </a:solidFill>
@@ -14393,20 +15569,20 @@
               </a:rPr>
               <a:t>Use this for</a:t>
             </a:r>
-            <a:endParaRPr lang="en-US" sz="950" dirty="0"/>
-          </a:p>
-        </p:txBody>
-      </p:sp>
-      <p:sp>
-        <p:nvSpPr>
-          <p:cNvPr id="16" name="Text 14"/>
-          <p:cNvSpPr/>
-          <p:nvPr/>
-        </p:nvSpPr>
-        <p:spPr>
-          <a:xfrm>
-            <a:off x="8074152" y="3959352"/>
-            <a:ext cx="2825496" cy="1170432"/>
+            <a:endParaRPr lang="en-US" sz="1300" dirty="0"/>
+          </a:p>
+        </p:txBody>
+      </p:sp>
+      <p:sp>
+        <p:nvSpPr>
+          <p:cNvPr id="17" name="Text 15"/>
+          <p:cNvSpPr/>
+          <p:nvPr/>
+        </p:nvSpPr>
+        <p:spPr>
+          <a:xfrm>
+            <a:off x="8074152" y="4023360"/>
+            <a:ext cx="2825496" cy="1097280"/>
           </a:xfrm>
           <a:prstGeom prst="rect">
             <a:avLst/>
@@ -14424,7 +15600,7 @@
               <a:buNone/>
             </a:pPr>
             <a:r>
-              <a:rPr lang="en-US" sz="1250" dirty="0">
+              <a:rPr lang="en-US" sz="1550" dirty="0">
                 <a:solidFill>
                   <a:srgbClr val="17364A"/>
                 </a:solidFill>
@@ -14434,7 +15610,7 @@
               </a:rPr>
               <a:t>Connect the concept to public health decisions, safeguards, documentation, or implementation work.</a:t>
             </a:r>
-            <a:endParaRPr lang="en-US" sz="1250" dirty="0"/>
+            <a:endParaRPr lang="en-US" sz="1550" dirty="0"/>
           </a:p>
         </p:txBody>
       </p:sp>
@@ -14631,7 +15807,7 @@
                 <a:ea typeface="Aptos" pitchFamily="34" charset="-122"/>
                 <a:cs typeface="Aptos" pitchFamily="34" charset="-120"/>
               </a:rPr>
-              <a:t>© Paula Soper</a:t>
+              <a:t>Â© Paula Soper</a:t>
             </a:r>
             <a:endParaRPr lang="en-US" sz="800" dirty="0"/>
           </a:p>
@@ -14639,7 +15815,46 @@
       </p:sp>
       <p:sp>
         <p:nvSpPr>
-          <p:cNvPr id="7" name="Shape 5"/>
+          <p:cNvPr id="7" name="Text 5"/>
+          <p:cNvSpPr/>
+          <p:nvPr/>
+        </p:nvSpPr>
+        <p:spPr>
+          <a:xfrm>
+            <a:off x="11137392" y="6510528"/>
+            <a:ext cx="411480" cy="201168"/>
+          </a:xfrm>
+          <a:prstGeom prst="rect">
+            <a:avLst/>
+          </a:prstGeom>
+          <a:noFill/>
+          <a:ln/>
+        </p:spPr>
+        <p:txBody>
+          <a:bodyPr wrap="square" lIns="0" tIns="0" rIns="0" bIns="0" rtlCol="0" anchor="ctr"/>
+          <a:lstStyle/>
+          <a:p>
+            <a:pPr algn="r" indent="0" marL="0">
+              <a:buNone/>
+            </a:pPr>
+            <a:r>
+              <a:rPr lang="en-US" sz="900" dirty="0">
+                <a:solidFill>
+                  <a:srgbClr val="5F7181"/>
+                </a:solidFill>
+                <a:latin typeface="Aptos" pitchFamily="34" charset="0"/>
+                <a:ea typeface="Aptos" pitchFamily="34" charset="-122"/>
+                <a:cs typeface="Aptos" pitchFamily="34" charset="-120"/>
+              </a:rPr>
+              <a:t>8</a:t>
+            </a:r>
+            <a:endParaRPr lang="en-US" sz="900" dirty="0"/>
+          </a:p>
+        </p:txBody>
+      </p:sp>
+      <p:sp>
+        <p:nvSpPr>
+          <p:cNvPr id="8" name="Shape 6"/>
           <p:cNvSpPr/>
           <p:nvPr/>
         </p:nvSpPr>
@@ -14664,7 +15879,7 @@
       </p:sp>
       <p:sp>
         <p:nvSpPr>
-          <p:cNvPr id="8" name="Text 6"/>
+          <p:cNvPr id="9" name="Text 7"/>
           <p:cNvSpPr/>
           <p:nvPr/>
         </p:nvSpPr>
@@ -14703,14 +15918,14 @@
       </p:sp>
       <p:sp>
         <p:nvSpPr>
-          <p:cNvPr id="9" name="Text 7"/>
+          <p:cNvPr id="10" name="Text 8"/>
           <p:cNvSpPr/>
           <p:nvPr/>
         </p:nvSpPr>
         <p:spPr>
           <a:xfrm>
             <a:off x="640080" y="621792"/>
-            <a:ext cx="10881360" cy="566928"/>
+            <a:ext cx="10881360" cy="713232"/>
           </a:xfrm>
           <a:prstGeom prst="rect">
             <a:avLst/>
@@ -14728,7 +15943,7 @@
               <a:buNone/>
             </a:pPr>
             <a:r>
-              <a:rPr lang="en-US" sz="2700" b="1" dirty="0">
+              <a:rPr lang="en-US" sz="3400" b="1" dirty="0">
                 <a:solidFill>
                   <a:srgbClr val="003A63"/>
                 </a:solidFill>
@@ -14738,20 +15953,20 @@
               </a:rPr>
               <a:t>Definitions</a:t>
             </a:r>
-            <a:endParaRPr lang="en-US" sz="2700" dirty="0"/>
-          </a:p>
-        </p:txBody>
-      </p:sp>
-      <p:sp>
-        <p:nvSpPr>
-          <p:cNvPr id="10" name="Text 8"/>
-          <p:cNvSpPr/>
-          <p:nvPr/>
-        </p:nvSpPr>
-        <p:spPr>
-          <a:xfrm>
-            <a:off x="868680" y="1417320"/>
-            <a:ext cx="6675120" cy="4434840"/>
+            <a:endParaRPr lang="en-US" sz="3400" dirty="0"/>
+          </a:p>
+        </p:txBody>
+      </p:sp>
+      <p:sp>
+        <p:nvSpPr>
+          <p:cNvPr id="11" name="Text 9"/>
+          <p:cNvSpPr/>
+          <p:nvPr/>
+        </p:nvSpPr>
+        <p:spPr>
+          <a:xfrm>
+            <a:off x="868680" y="1508760"/>
+            <a:ext cx="6537960" cy="4160520"/>
           </a:xfrm>
           <a:prstGeom prst="rect">
             <a:avLst/>
@@ -14766,7 +15981,7 @@
           <a:lstStyle/>
           <a:p>
             <a:r>
-              <a:rPr lang="en-US" sz="1700" dirty="0">
+              <a:rPr lang="en-US" sz="2100" dirty="0">
                 <a:solidFill>
                   <a:srgbClr val="17364A"/>
                 </a:solidFill>
@@ -14776,11 +15991,11 @@
               </a:rPr>
               <a:t>Integration pattern: A reusable approach for connecting systems, services, data flows, and workflows.</a:t>
             </a:r>
-            <a:endParaRPr lang="en-US" sz="1700" dirty="0"/>
-          </a:p>
-          <a:p>
-            <a:r>
-              <a:rPr lang="en-US" sz="1700" dirty="0">
+            <a:endParaRPr lang="en-US" sz="2100" dirty="0"/>
+          </a:p>
+          <a:p>
+            <a:r>
+              <a:rPr lang="en-US" sz="2100" dirty="0">
                 <a:solidFill>
                   <a:srgbClr val="17364A"/>
                 </a:solidFill>
@@ -14790,11 +16005,11 @@
               </a:rPr>
               <a:t>Interface engine: Software that routes, transforms, validates, and monitors messages between systems.</a:t>
             </a:r>
-            <a:endParaRPr lang="en-US" sz="1700" dirty="0"/>
-          </a:p>
-          <a:p>
-            <a:r>
-              <a:rPr lang="en-US" sz="1700" dirty="0">
+            <a:endParaRPr lang="en-US" sz="2100" dirty="0"/>
+          </a:p>
+          <a:p>
+            <a:r>
+              <a:rPr lang="en-US" sz="2100" dirty="0">
                 <a:solidFill>
                   <a:srgbClr val="17364A"/>
                 </a:solidFill>
@@ -14802,29 +16017,15 @@
                 <a:ea typeface="Aptos" pitchFamily="34" charset="-122"/>
                 <a:cs typeface="Aptos" pitchFamily="34" charset="-120"/>
               </a:rPr>
-              <a:t>Message broker: A service that allows systems to send and receive messages through a managed queue or topic.</a:t>
-            </a:r>
-            <a:endParaRPr lang="en-US" sz="1700" dirty="0"/>
-          </a:p>
-          <a:p>
-            <a:r>
-              <a:rPr lang="en-US" sz="1700" dirty="0">
-                <a:solidFill>
-                  <a:srgbClr val="17364A"/>
-                </a:solidFill>
-                <a:latin typeface="Aptos" pitchFamily="34" charset="0"/>
-                <a:ea typeface="Aptos" pitchFamily="34" charset="-122"/>
-                <a:cs typeface="Aptos" pitchFamily="34" charset="-120"/>
-              </a:rPr>
-              <a:t>Bulk data exchange: The transfer of large datasets at scheduled intervals or on demand.</a:t>
-            </a:r>
-            <a:endParaRPr lang="en-US" sz="1700" dirty="0"/>
-          </a:p>
-        </p:txBody>
-      </p:sp>
-      <p:sp>
-        <p:nvSpPr>
-          <p:cNvPr id="11" name="Shape 9"/>
+              <a:t>Message broker: A service that allows systems to send and receive messages through a managed queue or.</a:t>
+            </a:r>
+            <a:endParaRPr lang="en-US" sz="2100" dirty="0"/>
+          </a:p>
+        </p:txBody>
+      </p:sp>
+      <p:sp>
+        <p:nvSpPr>
+          <p:cNvPr id="12" name="Shape 10"/>
           <p:cNvSpPr/>
           <p:nvPr/>
         </p:nvSpPr>
@@ -14851,14 +16052,14 @@
       </p:sp>
       <p:sp>
         <p:nvSpPr>
-          <p:cNvPr id="12" name="Text 10"/>
+          <p:cNvPr id="13" name="Text 11"/>
           <p:cNvSpPr/>
           <p:nvPr/>
         </p:nvSpPr>
         <p:spPr>
           <a:xfrm>
             <a:off x="8074152" y="1563624"/>
-            <a:ext cx="2825496" cy="201168"/>
+            <a:ext cx="2825496" cy="256032"/>
           </a:xfrm>
           <a:prstGeom prst="rect">
             <a:avLst/>
@@ -14874,7 +16075,7 @@
               <a:buNone/>
             </a:pPr>
             <a:r>
-              <a:rPr lang="en-US" sz="950" b="1" dirty="0">
+              <a:rPr lang="en-US" sz="1300" b="1" dirty="0">
                 <a:solidFill>
                   <a:srgbClr val="0068B7"/>
                 </a:solidFill>
@@ -14884,20 +16085,20 @@
               </a:rPr>
               <a:t>Key idea</a:t>
             </a:r>
-            <a:endParaRPr lang="en-US" sz="950" dirty="0"/>
-          </a:p>
-        </p:txBody>
-      </p:sp>
-      <p:sp>
-        <p:nvSpPr>
-          <p:cNvPr id="13" name="Text 11"/>
-          <p:cNvSpPr/>
-          <p:nvPr/>
-        </p:nvSpPr>
-        <p:spPr>
-          <a:xfrm>
-            <a:off x="8074152" y="1856232"/>
-            <a:ext cx="2825496" cy="1261872"/>
+            <a:endParaRPr lang="en-US" sz="1300" dirty="0"/>
+          </a:p>
+        </p:txBody>
+      </p:sp>
+      <p:sp>
+        <p:nvSpPr>
+          <p:cNvPr id="14" name="Text 12"/>
+          <p:cNvSpPr/>
+          <p:nvPr/>
+        </p:nvSpPr>
+        <p:spPr>
+          <a:xfrm>
+            <a:off x="8074152" y="1920240"/>
+            <a:ext cx="2825496" cy="1188720"/>
           </a:xfrm>
           <a:prstGeom prst="rect">
             <a:avLst/>
@@ -14915,7 +16116,7 @@
               <a:buNone/>
             </a:pPr>
             <a:r>
-              <a:rPr lang="en-US" sz="1250" dirty="0">
+              <a:rPr lang="en-US" sz="1550" dirty="0">
                 <a:solidFill>
                   <a:srgbClr val="17364A"/>
                 </a:solidFill>
@@ -14925,13 +16126,13 @@
               </a:rPr>
               <a:t>Integration pattern: A reusable approach for connecting systems, services, data flows, and workflows.</a:t>
             </a:r>
-            <a:endParaRPr lang="en-US" sz="1250" dirty="0"/>
-          </a:p>
-        </p:txBody>
-      </p:sp>
-      <p:sp>
-        <p:nvSpPr>
-          <p:cNvPr id="14" name="Shape 12"/>
+            <a:endParaRPr lang="en-US" sz="1550" dirty="0"/>
+          </a:p>
+        </p:txBody>
+      </p:sp>
+      <p:sp>
+        <p:nvSpPr>
+          <p:cNvPr id="15" name="Shape 13"/>
           <p:cNvSpPr/>
           <p:nvPr/>
         </p:nvSpPr>
@@ -14958,14 +16159,14 @@
       </p:sp>
       <p:sp>
         <p:nvSpPr>
-          <p:cNvPr id="15" name="Text 13"/>
+          <p:cNvPr id="16" name="Text 14"/>
           <p:cNvSpPr/>
           <p:nvPr/>
         </p:nvSpPr>
         <p:spPr>
           <a:xfrm>
             <a:off x="8074152" y="3666744"/>
-            <a:ext cx="2825496" cy="201168"/>
+            <a:ext cx="2825496" cy="256032"/>
           </a:xfrm>
           <a:prstGeom prst="rect">
             <a:avLst/>
@@ -14981,7 +16182,7 @@
               <a:buNone/>
             </a:pPr>
             <a:r>
-              <a:rPr lang="en-US" sz="950" b="1" dirty="0">
+              <a:rPr lang="en-US" sz="1300" b="1" dirty="0">
                 <a:solidFill>
                   <a:srgbClr val="0068B7"/>
                 </a:solidFill>
@@ -14991,20 +16192,20 @@
               </a:rPr>
               <a:t>Use this for</a:t>
             </a:r>
-            <a:endParaRPr lang="en-US" sz="950" dirty="0"/>
-          </a:p>
-        </p:txBody>
-      </p:sp>
-      <p:sp>
-        <p:nvSpPr>
-          <p:cNvPr id="16" name="Text 14"/>
-          <p:cNvSpPr/>
-          <p:nvPr/>
-        </p:nvSpPr>
-        <p:spPr>
-          <a:xfrm>
-            <a:off x="8074152" y="3959352"/>
-            <a:ext cx="2825496" cy="1170432"/>
+            <a:endParaRPr lang="en-US" sz="1300" dirty="0"/>
+          </a:p>
+        </p:txBody>
+      </p:sp>
+      <p:sp>
+        <p:nvSpPr>
+          <p:cNvPr id="17" name="Text 15"/>
+          <p:cNvSpPr/>
+          <p:nvPr/>
+        </p:nvSpPr>
+        <p:spPr>
+          <a:xfrm>
+            <a:off x="8074152" y="4023360"/>
+            <a:ext cx="2825496" cy="1097280"/>
           </a:xfrm>
           <a:prstGeom prst="rect">
             <a:avLst/>
@@ -15022,7 +16223,7 @@
               <a:buNone/>
             </a:pPr>
             <a:r>
-              <a:rPr lang="en-US" sz="1250" dirty="0">
+              <a:rPr lang="en-US" sz="1550" dirty="0">
                 <a:solidFill>
                   <a:srgbClr val="17364A"/>
                 </a:solidFill>
@@ -15032,7 +16233,7 @@
               </a:rPr>
               <a:t>Connect the concept to public health decisions, safeguards, documentation, or implementation work.</a:t>
             </a:r>
-            <a:endParaRPr lang="en-US" sz="1250" dirty="0"/>
+            <a:endParaRPr lang="en-US" sz="1550" dirty="0"/>
           </a:p>
         </p:txBody>
       </p:sp>
@@ -15229,7 +16430,7 @@
                 <a:ea typeface="Aptos" pitchFamily="34" charset="-122"/>
                 <a:cs typeface="Aptos" pitchFamily="34" charset="-120"/>
               </a:rPr>
-              <a:t>© Paula Soper</a:t>
+              <a:t>Â© Paula Soper</a:t>
             </a:r>
             <a:endParaRPr lang="en-US" sz="800" dirty="0"/>
           </a:p>
@@ -15237,7 +16438,46 @@
       </p:sp>
       <p:sp>
         <p:nvSpPr>
-          <p:cNvPr id="7" name="Shape 5"/>
+          <p:cNvPr id="7" name="Text 5"/>
+          <p:cNvSpPr/>
+          <p:nvPr/>
+        </p:nvSpPr>
+        <p:spPr>
+          <a:xfrm>
+            <a:off x="11137392" y="6510528"/>
+            <a:ext cx="411480" cy="201168"/>
+          </a:xfrm>
+          <a:prstGeom prst="rect">
+            <a:avLst/>
+          </a:prstGeom>
+          <a:noFill/>
+          <a:ln/>
+        </p:spPr>
+        <p:txBody>
+          <a:bodyPr wrap="square" lIns="0" tIns="0" rIns="0" bIns="0" rtlCol="0" anchor="ctr"/>
+          <a:lstStyle/>
+          <a:p>
+            <a:pPr algn="r" indent="0" marL="0">
+              <a:buNone/>
+            </a:pPr>
+            <a:r>
+              <a:rPr lang="en-US" sz="900" dirty="0">
+                <a:solidFill>
+                  <a:srgbClr val="5F7181"/>
+                </a:solidFill>
+                <a:latin typeface="Aptos" pitchFamily="34" charset="0"/>
+                <a:ea typeface="Aptos" pitchFamily="34" charset="-122"/>
+                <a:cs typeface="Aptos" pitchFamily="34" charset="-120"/>
+              </a:rPr>
+              <a:t>9</a:t>
+            </a:r>
+            <a:endParaRPr lang="en-US" sz="900" dirty="0"/>
+          </a:p>
+        </p:txBody>
+      </p:sp>
+      <p:sp>
+        <p:nvSpPr>
+          <p:cNvPr id="8" name="Shape 6"/>
           <p:cNvSpPr/>
           <p:nvPr/>
         </p:nvSpPr>
@@ -15262,7 +16502,7 @@
       </p:sp>
       <p:sp>
         <p:nvSpPr>
-          <p:cNvPr id="8" name="Text 6"/>
+          <p:cNvPr id="9" name="Text 7"/>
           <p:cNvSpPr/>
           <p:nvPr/>
         </p:nvSpPr>
@@ -15301,14 +16541,14 @@
       </p:sp>
       <p:sp>
         <p:nvSpPr>
-          <p:cNvPr id="9" name="Text 7"/>
+          <p:cNvPr id="10" name="Text 8"/>
           <p:cNvSpPr/>
           <p:nvPr/>
         </p:nvSpPr>
         <p:spPr>
           <a:xfrm>
             <a:off x="640080" y="621792"/>
-            <a:ext cx="10881360" cy="566928"/>
+            <a:ext cx="10881360" cy="713232"/>
           </a:xfrm>
           <a:prstGeom prst="rect">
             <a:avLst/>
@@ -15326,7 +16566,7 @@
               <a:buNone/>
             </a:pPr>
             <a:r>
-              <a:rPr lang="en-US" sz="2700" b="1" dirty="0">
+              <a:rPr lang="en-US" sz="3400" b="1" dirty="0">
                 <a:solidFill>
                   <a:srgbClr val="003A63"/>
                 </a:solidFill>
@@ -15336,20 +16576,20 @@
               </a:rPr>
               <a:t>Jurisdiction and Agency Policy Note</a:t>
             </a:r>
-            <a:endParaRPr lang="en-US" sz="2700" dirty="0"/>
-          </a:p>
-        </p:txBody>
-      </p:sp>
-      <p:sp>
-        <p:nvSpPr>
-          <p:cNvPr id="10" name="Text 8"/>
-          <p:cNvSpPr/>
-          <p:nvPr/>
-        </p:nvSpPr>
-        <p:spPr>
-          <a:xfrm>
-            <a:off x="868680" y="1417320"/>
-            <a:ext cx="6675120" cy="4434840"/>
+            <a:endParaRPr lang="en-US" sz="3400" dirty="0"/>
+          </a:p>
+        </p:txBody>
+      </p:sp>
+      <p:sp>
+        <p:nvSpPr>
+          <p:cNvPr id="11" name="Text 9"/>
+          <p:cNvSpPr/>
+          <p:nvPr/>
+        </p:nvSpPr>
+        <p:spPr>
+          <a:xfrm>
+            <a:off x="868680" y="1508760"/>
+            <a:ext cx="6537960" cy="4160520"/>
           </a:xfrm>
           <a:prstGeom prst="rect">
             <a:avLst/>
@@ -15364,7 +16604,7 @@
           <a:lstStyle/>
           <a:p>
             <a:r>
-              <a:rPr lang="en-US" sz="1700" dirty="0">
+              <a:rPr lang="en-US" sz="2100" dirty="0">
                 <a:solidFill>
                   <a:srgbClr val="17364A"/>
                 </a:solidFill>
@@ -15374,11 +16614,11 @@
               </a:rPr>
               <a:t>This national-level module is intended for training and planning purposes.</a:t>
             </a:r>
-            <a:endParaRPr lang="en-US" sz="1700" dirty="0"/>
-          </a:p>
-          <a:p>
-            <a:r>
-              <a:rPr lang="en-US" sz="1700" dirty="0">
+            <a:endParaRPr lang="en-US" sz="2100" dirty="0"/>
+          </a:p>
+          <a:p>
+            <a:r>
+              <a:rPr lang="en-US" sz="2100" dirty="0">
                 <a:solidFill>
                   <a:srgbClr val="17364A"/>
                 </a:solidFill>
@@ -15388,11 +16628,11 @@
               </a:rPr>
               <a:t>It does not replace legal, privacy, procurement, civil rights, records, or agency policy review.</a:t>
             </a:r>
-            <a:endParaRPr lang="en-US" sz="1700" dirty="0"/>
-          </a:p>
-          <a:p>
-            <a:r>
-              <a:rPr lang="en-US" sz="1700" dirty="0">
+            <a:endParaRPr lang="en-US" sz="2100" dirty="0"/>
+          </a:p>
+          <a:p>
+            <a:r>
+              <a:rPr lang="en-US" sz="2100" dirty="0">
                 <a:solidFill>
                   <a:srgbClr val="17364A"/>
                 </a:solidFill>
@@ -15400,15 +16640,15 @@
                 <a:ea typeface="Aptos" pitchFamily="34" charset="-122"/>
                 <a:cs typeface="Aptos" pitchFamily="34" charset="-120"/>
               </a:rPr>
-              <a:t>Learners should confirm applicable requirements in their own jurisdiction and organization before implementing AI-supported.</a:t>
-            </a:r>
-            <a:endParaRPr lang="en-US" sz="1700" dirty="0"/>
-          </a:p>
-        </p:txBody>
-      </p:sp>
-      <p:sp>
-        <p:nvSpPr>
-          <p:cNvPr id="11" name="Shape 9"/>
+              <a:t>Learners should confirm applicable requirements in their own jurisdiction and organization before.</a:t>
+            </a:r>
+            <a:endParaRPr lang="en-US" sz="2100" dirty="0"/>
+          </a:p>
+        </p:txBody>
+      </p:sp>
+      <p:sp>
+        <p:nvSpPr>
+          <p:cNvPr id="12" name="Shape 10"/>
           <p:cNvSpPr/>
           <p:nvPr/>
         </p:nvSpPr>
@@ -15435,14 +16675,14 @@
       </p:sp>
       <p:sp>
         <p:nvSpPr>
-          <p:cNvPr id="12" name="Text 10"/>
+          <p:cNvPr id="13" name="Text 11"/>
           <p:cNvSpPr/>
           <p:nvPr/>
         </p:nvSpPr>
         <p:spPr>
           <a:xfrm>
             <a:off x="8074152" y="1563624"/>
-            <a:ext cx="2825496" cy="201168"/>
+            <a:ext cx="2825496" cy="256032"/>
           </a:xfrm>
           <a:prstGeom prst="rect">
             <a:avLst/>
@@ -15458,7 +16698,7 @@
               <a:buNone/>
             </a:pPr>
             <a:r>
-              <a:rPr lang="en-US" sz="950" b="1" dirty="0">
+              <a:rPr lang="en-US" sz="1300" b="1" dirty="0">
                 <a:solidFill>
                   <a:srgbClr val="0068B7"/>
                 </a:solidFill>
@@ -15468,20 +16708,20 @@
               </a:rPr>
               <a:t>Key idea</a:t>
             </a:r>
-            <a:endParaRPr lang="en-US" sz="950" dirty="0"/>
-          </a:p>
-        </p:txBody>
-      </p:sp>
-      <p:sp>
-        <p:nvSpPr>
-          <p:cNvPr id="13" name="Text 11"/>
-          <p:cNvSpPr/>
-          <p:nvPr/>
-        </p:nvSpPr>
-        <p:spPr>
-          <a:xfrm>
-            <a:off x="8074152" y="1856232"/>
-            <a:ext cx="2825496" cy="1261872"/>
+            <a:endParaRPr lang="en-US" sz="1300" dirty="0"/>
+          </a:p>
+        </p:txBody>
+      </p:sp>
+      <p:sp>
+        <p:nvSpPr>
+          <p:cNvPr id="14" name="Text 12"/>
+          <p:cNvSpPr/>
+          <p:nvPr/>
+        </p:nvSpPr>
+        <p:spPr>
+          <a:xfrm>
+            <a:off x="8074152" y="1920240"/>
+            <a:ext cx="2825496" cy="1188720"/>
           </a:xfrm>
           <a:prstGeom prst="rect">
             <a:avLst/>
@@ -15499,7 +16739,7 @@
               <a:buNone/>
             </a:pPr>
             <a:r>
-              <a:rPr lang="en-US" sz="1250" dirty="0">
+              <a:rPr lang="en-US" sz="1550" dirty="0">
                 <a:solidFill>
                   <a:srgbClr val="17364A"/>
                 </a:solidFill>
@@ -15509,13 +16749,13 @@
               </a:rPr>
               <a:t>This national-level module is intended for training and planning purposes.</a:t>
             </a:r>
-            <a:endParaRPr lang="en-US" sz="1250" dirty="0"/>
-          </a:p>
-        </p:txBody>
-      </p:sp>
-      <p:sp>
-        <p:nvSpPr>
-          <p:cNvPr id="14" name="Shape 12"/>
+            <a:endParaRPr lang="en-US" sz="1550" dirty="0"/>
+          </a:p>
+        </p:txBody>
+      </p:sp>
+      <p:sp>
+        <p:nvSpPr>
+          <p:cNvPr id="15" name="Shape 13"/>
           <p:cNvSpPr/>
           <p:nvPr/>
         </p:nvSpPr>
@@ -15542,14 +16782,14 @@
       </p:sp>
       <p:sp>
         <p:nvSpPr>
-          <p:cNvPr id="15" name="Text 13"/>
+          <p:cNvPr id="16" name="Text 14"/>
           <p:cNvSpPr/>
           <p:nvPr/>
         </p:nvSpPr>
         <p:spPr>
           <a:xfrm>
             <a:off x="8074152" y="3666744"/>
-            <a:ext cx="2825496" cy="201168"/>
+            <a:ext cx="2825496" cy="256032"/>
           </a:xfrm>
           <a:prstGeom prst="rect">
             <a:avLst/>
@@ -15565,7 +16805,7 @@
               <a:buNone/>
             </a:pPr>
             <a:r>
-              <a:rPr lang="en-US" sz="950" b="1" dirty="0">
+              <a:rPr lang="en-US" sz="1300" b="1" dirty="0">
                 <a:solidFill>
                   <a:srgbClr val="0068B7"/>
                 </a:solidFill>
@@ -15575,20 +16815,20 @@
               </a:rPr>
               <a:t>Use this for</a:t>
             </a:r>
-            <a:endParaRPr lang="en-US" sz="950" dirty="0"/>
-          </a:p>
-        </p:txBody>
-      </p:sp>
-      <p:sp>
-        <p:nvSpPr>
-          <p:cNvPr id="16" name="Text 14"/>
-          <p:cNvSpPr/>
-          <p:nvPr/>
-        </p:nvSpPr>
-        <p:spPr>
-          <a:xfrm>
-            <a:off x="8074152" y="3959352"/>
-            <a:ext cx="2825496" cy="1170432"/>
+            <a:endParaRPr lang="en-US" sz="1300" dirty="0"/>
+          </a:p>
+        </p:txBody>
+      </p:sp>
+      <p:sp>
+        <p:nvSpPr>
+          <p:cNvPr id="17" name="Text 15"/>
+          <p:cNvSpPr/>
+          <p:nvPr/>
+        </p:nvSpPr>
+        <p:spPr>
+          <a:xfrm>
+            <a:off x="8074152" y="4023360"/>
+            <a:ext cx="2825496" cy="1097280"/>
           </a:xfrm>
           <a:prstGeom prst="rect">
             <a:avLst/>
@@ -15606,7 +16846,7 @@
               <a:buNone/>
             </a:pPr>
             <a:r>
-              <a:rPr lang="en-US" sz="1250" dirty="0">
+              <a:rPr lang="en-US" sz="1550" dirty="0">
                 <a:solidFill>
                   <a:srgbClr val="17364A"/>
                 </a:solidFill>
@@ -15616,7 +16856,7 @@
               </a:rPr>
               <a:t>Connect the concept to public health decisions, safeguards, documentation, or implementation work.</a:t>
             </a:r>
-            <a:endParaRPr lang="en-US" sz="1250" dirty="0"/>
+            <a:endParaRPr lang="en-US" sz="1550" dirty="0"/>
           </a:p>
         </p:txBody>
       </p:sp>
